--- a/submission/Kasi-Grid-deck.pptx
+++ b/submission/Kasi-Grid-deck.pptx
@@ -3158,7 +3158,7 @@
                 <a:ea typeface="Cambria" pitchFamily="34" charset="-122"/>
                 <a:cs typeface="Cambria" pitchFamily="34" charset="-120"/>
               </a:rPr>
-              <a:t>New this weekend: Outage Pulse</a:t>
+              <a:t>New this weekend: Pulse and Forecast</a:t>
             </a:r>
             <a:endParaRPr lang="en-US" sz="3400" dirty="0"/>
           </a:p>
@@ -3180,8 +3180,8 @@
         </p:blipFill>
         <p:spPr>
           <a:xfrm>
-            <a:off x="5852160" y="502920"/>
-            <a:ext cx="2098867" cy="4297680"/>
+            <a:off x="6903720" y="457200"/>
+            <a:ext cx="2009553" cy="4114800"/>
           </a:xfrm>
           <a:prstGeom prst="rect">
             <a:avLst/>
@@ -3204,7 +3204,7 @@
         <p:spPr>
           <a:xfrm>
             <a:off x="457200" y="1188720"/>
-            <a:ext cx="5029200" cy="3291840"/>
+            <a:ext cx="3566160" cy="3474720"/>
           </a:xfrm>
           <a:prstGeom prst="rect">
             <a:avLst/>
@@ -3224,7 +3224,7 @@
               <a:buChar char="•"/>
             </a:pPr>
             <a:r>
-              <a:rPr lang="en-US" sz="1600" dirty="0">
+              <a:rPr lang="en-US" sz="1400" dirty="0">
                 <a:solidFill>
                   <a:srgbClr val="FFFFFF"/>
                 </a:solidFill>
@@ -3232,9 +3232,9 @@
                 <a:ea typeface="Calibri" pitchFamily="34" charset="-122"/>
                 <a:cs typeface="Calibri" pitchFamily="34" charset="-120"/>
               </a:rPr>
-              <a:t>3+ different neighbours report the same power or water problem in a suburb within 6 hours, and it becomes a Verified outage</a:t>
-            </a:r>
-            <a:endParaRPr lang="en-US" sz="1600" dirty="0"/>
+              <a:t>Outage Pulse: 3+ different neighbours report the same problem and it becomes a Verified outage</a:t>
+            </a:r>
+            <a:endParaRPr lang="en-US" sz="1400" dirty="0"/>
           </a:p>
           <a:p>
             <a:pPr marL="342900" indent="-342900">
@@ -3245,7 +3245,7 @@
               <a:buChar char="•"/>
             </a:pPr>
             <a:r>
-              <a:rPr lang="en-US" sz="1600" dirty="0">
+              <a:rPr lang="en-US" sz="1400" dirty="0">
                 <a:solidFill>
                   <a:srgbClr val="FFFFFF"/>
                 </a:solidFill>
@@ -3253,9 +3253,9 @@
                 <a:ea typeface="Calibri" pitchFamily="34" charset="-122"/>
                 <a:cs typeface="Calibri" pitchFamily="34" charset="-120"/>
               </a:rPr>
-              <a:t>Neighbours vote "It is back on for me". Half agree (minimum 2) and the card turns green</a:t>
-            </a:r>
-            <a:endParaRPr lang="en-US" sz="1600" dirty="0"/>
+              <a:t>Neighbours vote "back on" and the alert closes itself</a:t>
+            </a:r>
+            <a:endParaRPr lang="en-US" sz="1400" dirty="0"/>
           </a:p>
           <a:p>
             <a:pPr marL="342900" indent="-342900">
@@ -3266,7 +3266,7 @@
               <a:buChar char="•"/>
             </a:pPr>
             <a:r>
-              <a:rPr lang="en-US" sz="1600" dirty="0">
+              <a:rPr lang="en-US" sz="1400" dirty="0">
                 <a:solidFill>
                   <a:srgbClr val="FFFFFF"/>
                 </a:solidFill>
@@ -3274,9 +3274,9 @@
                 <a:ea typeface="Calibri" pitchFamily="34" charset="-122"/>
                 <a:cs typeface="Calibri" pitchFamily="34" charset="-120"/>
               </a:rPr>
-              <a:t>Opt-in phone notification when a new verified outage appears</a:t>
-            </a:r>
-            <a:endParaRPr lang="en-US" sz="1600" dirty="0"/>
+              <a:t>Outage Forecast: learns the weekday and time-of-day pattern from its own reports</a:t>
+            </a:r>
+            <a:endParaRPr lang="en-US" sz="1400" dirty="0"/>
           </a:p>
           <a:p>
             <a:pPr marL="342900" indent="-342900">
@@ -3287,7 +3287,7 @@
               <a:buChar char="•"/>
             </a:pPr>
             <a:r>
-              <a:rPr lang="en-US" sz="1600" dirty="0">
+              <a:rPr lang="en-US" sz="1400" dirty="0">
                 <a:solidFill>
                   <a:srgbClr val="FFFFFF"/>
                 </a:solidFill>
@@ -3295,9 +3295,93 @@
                 <a:ea typeface="Calibri" pitchFamily="34" charset="-122"/>
                 <a:cs typeface="Calibri" pitchFamily="34" charset="-120"/>
               </a:rPr>
-              <a:t>Sample data and hidden posts are excluded. One vote per device</a:t>
-            </a:r>
-            <a:endParaRPr lang="en-US" sz="1600" dirty="0"/>
+              <a:t>Early warning at 2 reports, one short of verified</a:t>
+            </a:r>
+            <a:endParaRPr lang="en-US" sz="1400" dirty="0"/>
+          </a:p>
+          <a:p>
+            <a:pPr marL="342900" indent="-342900">
+              <a:spcAft>
+                <a:spcPts val="800"/>
+              </a:spcAft>
+              <a:buSzPct val="100000"/>
+              <a:buChar char="•"/>
+            </a:pPr>
+            <a:r>
+              <a:rPr lang="en-US" sz="1400" dirty="0">
+                <a:solidFill>
+                  <a:srgbClr val="FFFFFF"/>
+                </a:solidFill>
+                <a:latin typeface="Calibri" pitchFamily="34" charset="0"/>
+                <a:ea typeface="Calibri" pitchFamily="34" charset="-122"/>
+                <a:cs typeface="Calibri" pitchFamily="34" charset="-120"/>
+              </a:rPr>
+              <a:t>Opt-in phone notifications</a:t>
+            </a:r>
+            <a:endParaRPr lang="en-US" sz="1400" dirty="0"/>
+          </a:p>
+        </p:txBody>
+      </p:sp>
+      <p:pic>
+        <p:nvPicPr>
+          <p:cNvPr id="5" name="Image 1" descr="shots/forecast.png">    </p:cNvPr>
+          <p:cNvPicPr>
+            <a:picLocks noChangeAspect="1"/>
+          </p:cNvPicPr>
+          <p:nvPr/>
+        </p:nvPicPr>
+        <p:blipFill>
+          <a:blip r:embed="rId2"/>
+          <a:stretch>
+            <a:fillRect/>
+          </a:stretch>
+        </p:blipFill>
+        <p:spPr>
+          <a:xfrm>
+            <a:off x="4297680" y="1280160"/>
+            <a:ext cx="2377440" cy="1856609"/>
+          </a:xfrm>
+          <a:prstGeom prst="rect">
+            <a:avLst/>
+          </a:prstGeom>
+        </p:spPr>
+      </p:pic>
+      <p:sp>
+        <p:nvSpPr>
+          <p:cNvPr id="6" name="Text 2"/>
+          <p:cNvSpPr txBox="1"/>
+          <p:nvPr/>
+        </p:nvSpPr>
+        <p:spPr>
+          <a:xfrm>
+            <a:off x="4297680" y="3246120"/>
+            <a:ext cx="2377440" cy="822960"/>
+          </a:xfrm>
+          <a:prstGeom prst="rect">
+            <a:avLst/>
+          </a:prstGeom>
+          <a:noFill/>
+          <a:ln/>
+        </p:spPr>
+        <p:txBody>
+          <a:bodyPr wrap="square" lIns="0" tIns="0" rIns="0" bIns="0" rtlCol="0" anchor="t"/>
+          <a:lstStyle/>
+          <a:p>
+            <a:pPr indent="0" marL="0">
+              <a:buNone/>
+            </a:pPr>
+            <a:r>
+              <a:rPr lang="en-US" sz="1200" i="1" dirty="0">
+                <a:solidFill>
+                  <a:srgbClr val="CFE3E1"/>
+                </a:solidFill>
+                <a:latin typeface="Calibri" pitchFamily="34" charset="0"/>
+                <a:ea typeface="Calibri" pitchFamily="34" charset="-122"/>
+                <a:cs typeface="Calibri" pitchFamily="34" charset="-120"/>
+              </a:rPr>
+              <a:t>Rule-based and transparent: it shows its confidence and says when there is not enough data.</a:t>
+            </a:r>
+            <a:endParaRPr lang="en-US" sz="1200" dirty="0"/>
           </a:p>
         </p:txBody>
       </p:sp>
@@ -5701,6 +5785,27 @@
                 <a:cs typeface="Calibri" pitchFamily="34" charset="-120"/>
               </a:rPr>
               <a:t>Data ownership: all community data sits in our own database, exportable and anonymous</a:t>
+            </a:r>
+            <a:endParaRPr lang="en-US" sz="1600" dirty="0"/>
+          </a:p>
+          <a:p>
+            <a:pPr marL="342900" indent="-342900">
+              <a:spcAft>
+                <a:spcPts val="800"/>
+              </a:spcAft>
+              <a:buSzPct val="100000"/>
+              <a:buChar char="•"/>
+            </a:pPr>
+            <a:r>
+              <a:rPr lang="en-US" sz="1600" dirty="0">
+                <a:solidFill>
+                  <a:srgbClr val="FFFFFF"/>
+                </a:solidFill>
+                <a:latin typeface="Calibri" pitchFamily="34" charset="0"/>
+                <a:ea typeface="Calibri" pitchFamily="34" charset="-122"/>
+                <a:cs typeface="Calibri" pitchFamily="34" charset="-120"/>
+              </a:rPr>
+              <a:t>Pilot: [N] neighbours in [SUBURB], [N] reports, [N] verified outages</a:t>
             </a:r>
             <a:endParaRPr lang="en-US" sz="1600" dirty="0"/>
           </a:p>

--- a/submission/Kasi-Grid-deck.pptx
+++ b/submission/Kasi-Grid-deck.pptx
@@ -1658,7 +1658,7 @@
     <p:bg>
       <p:bgPr>
         <a:solidFill>
-          <a:srgbClr val="0B3D3D"/>
+          <a:srgbClr val="2E2457"/>
         </a:solidFill>
       </p:bgPr>
     </p:bg>
@@ -1742,7 +1742,7 @@
             <a:r>
               <a:rPr lang="en-US" sz="2400" i="1" dirty="0">
                 <a:solidFill>
-                  <a:srgbClr val="F2A33A"/>
+                  <a:srgbClr val="9FD3F0"/>
                 </a:solidFill>
                 <a:latin typeface="Cambria" pitchFamily="34" charset="0"/>
                 <a:ea typeface="Cambria" pitchFamily="34" charset="-122"/>
@@ -1781,7 +1781,7 @@
             <a:r>
               <a:rPr lang="en-US" sz="1600" dirty="0">
                 <a:solidFill>
-                  <a:srgbClr val="CFE3E1"/>
+                  <a:srgbClr val="DDD4F6"/>
                 </a:solidFill>
                 <a:latin typeface="Calibri" pitchFamily="34" charset="0"/>
                 <a:ea typeface="Calibri" pitchFamily="34" charset="-122"/>
@@ -1820,7 +1820,7 @@
             <a:r>
               <a:rPr lang="en-US" sz="1200" dirty="0">
                 <a:solidFill>
-                  <a:srgbClr val="CFE3E1"/>
+                  <a:srgbClr val="DDD4F6"/>
                 </a:solidFill>
                 <a:latin typeface="Calibri" pitchFamily="34" charset="0"/>
                 <a:ea typeface="Calibri" pitchFamily="34" charset="-122"/>
@@ -1922,7 +1922,7 @@
             <a:r>
               <a:rPr lang="en-US" sz="3400" b="1" dirty="0">
                 <a:solidFill>
-                  <a:srgbClr val="0B3D3D"/>
+                  <a:srgbClr val="2E2457"/>
                 </a:solidFill>
                 <a:latin typeface="Cambria" pitchFamily="34" charset="0"/>
                 <a:ea typeface="Cambria" pitchFamily="34" charset="-122"/>
@@ -1951,11 +1951,11 @@
             </a:avLst>
           </a:prstGeom>
           <a:solidFill>
-            <a:srgbClr val="F4F6F5"/>
+            <a:srgbClr val="F4F1FC"/>
           </a:solidFill>
           <a:ln w="12700">
             <a:solidFill>
-              <a:srgbClr val="F4F6F5"/>
+              <a:srgbClr val="F4F1FC"/>
             </a:solidFill>
             <a:prstDash val="solid"/>
           </a:ln>
@@ -1988,7 +1988,7 @@
             <a:r>
               <a:rPr lang="en-US" sz="1800" b="1" dirty="0">
                 <a:solidFill>
-                  <a:srgbClr val="0B6E6E"/>
+                  <a:srgbClr val="6A57B8"/>
                 </a:solidFill>
                 <a:latin typeface="Cambria" pitchFamily="34" charset="0"/>
                 <a:ea typeface="Cambria" pitchFamily="34" charset="-122"/>
@@ -2027,7 +2027,7 @@
             <a:r>
               <a:rPr lang="en-US" sz="1400" dirty="0">
                 <a:solidFill>
-                  <a:srgbClr val="16211F"/>
+                  <a:srgbClr val="241F38"/>
                 </a:solidFill>
                 <a:latin typeface="Calibri" pitchFamily="34" charset="0"/>
                 <a:ea typeface="Calibri" pitchFamily="34" charset="-122"/>
@@ -2044,7 +2044,7 @@
             <a:r>
               <a:rPr lang="en-US" sz="1400" dirty="0">
                 <a:solidFill>
-                  <a:srgbClr val="16211F"/>
+                  <a:srgbClr val="241F38"/>
                 </a:solidFill>
                 <a:latin typeface="Calibri" pitchFamily="34" charset="0"/>
                 <a:ea typeface="Calibri" pitchFamily="34" charset="-122"/>
@@ -2061,7 +2061,7 @@
             <a:r>
               <a:rPr lang="en-US" sz="1400" dirty="0">
                 <a:solidFill>
-                  <a:srgbClr val="16211F"/>
+                  <a:srgbClr val="241F38"/>
                 </a:solidFill>
                 <a:latin typeface="Calibri" pitchFamily="34" charset="0"/>
                 <a:ea typeface="Calibri" pitchFamily="34" charset="-122"/>
@@ -2078,7 +2078,7 @@
             <a:r>
               <a:rPr lang="en-US" sz="1400" dirty="0">
                 <a:solidFill>
-                  <a:srgbClr val="16211F"/>
+                  <a:srgbClr val="241F38"/>
                 </a:solidFill>
                 <a:latin typeface="Calibri" pitchFamily="34" charset="0"/>
                 <a:ea typeface="Calibri" pitchFamily="34" charset="-122"/>
@@ -2107,11 +2107,11 @@
             </a:avLst>
           </a:prstGeom>
           <a:solidFill>
-            <a:srgbClr val="F4F6F5"/>
+            <a:srgbClr val="F4F1FC"/>
           </a:solidFill>
           <a:ln w="12700">
             <a:solidFill>
-              <a:srgbClr val="F4F6F5"/>
+              <a:srgbClr val="F4F1FC"/>
             </a:solidFill>
             <a:prstDash val="solid"/>
           </a:ln>
@@ -2144,7 +2144,7 @@
             <a:r>
               <a:rPr lang="en-US" sz="1800" b="1" dirty="0">
                 <a:solidFill>
-                  <a:srgbClr val="0B6E6E"/>
+                  <a:srgbClr val="6A57B8"/>
                 </a:solidFill>
                 <a:latin typeface="Cambria" pitchFamily="34" charset="0"/>
                 <a:ea typeface="Cambria" pitchFamily="34" charset="-122"/>
@@ -2183,7 +2183,7 @@
             <a:r>
               <a:rPr lang="en-US" sz="1400" dirty="0">
                 <a:solidFill>
-                  <a:srgbClr val="16211F"/>
+                  <a:srgbClr val="241F38"/>
                 </a:solidFill>
                 <a:latin typeface="Calibri" pitchFamily="34" charset="0"/>
                 <a:ea typeface="Calibri" pitchFamily="34" charset="-122"/>
@@ -2200,7 +2200,7 @@
             <a:r>
               <a:rPr lang="en-US" sz="1400" dirty="0">
                 <a:solidFill>
-                  <a:srgbClr val="16211F"/>
+                  <a:srgbClr val="241F38"/>
                 </a:solidFill>
                 <a:latin typeface="Calibri" pitchFamily="34" charset="0"/>
                 <a:ea typeface="Calibri" pitchFamily="34" charset="-122"/>
@@ -2217,7 +2217,7 @@
             <a:r>
               <a:rPr lang="en-US" sz="1400" dirty="0">
                 <a:solidFill>
-                  <a:srgbClr val="16211F"/>
+                  <a:srgbClr val="241F38"/>
                 </a:solidFill>
                 <a:latin typeface="Calibri" pitchFamily="34" charset="0"/>
                 <a:ea typeface="Calibri" pitchFamily="34" charset="-122"/>
@@ -2234,7 +2234,7 @@
             <a:r>
               <a:rPr lang="en-US" sz="1400" dirty="0">
                 <a:solidFill>
-                  <a:srgbClr val="16211F"/>
+                  <a:srgbClr val="241F38"/>
                 </a:solidFill>
                 <a:latin typeface="Calibri" pitchFamily="34" charset="0"/>
                 <a:ea typeface="Calibri" pitchFamily="34" charset="-122"/>
@@ -2251,7 +2251,7 @@
             <a:r>
               <a:rPr lang="en-US" sz="1400" dirty="0">
                 <a:solidFill>
-                  <a:srgbClr val="16211F"/>
+                  <a:srgbClr val="241F38"/>
                 </a:solidFill>
                 <a:latin typeface="Calibri" pitchFamily="34" charset="0"/>
                 <a:ea typeface="Calibri" pitchFamily="34" charset="-122"/>
@@ -2274,7 +2274,7 @@
             <a:r>
               <a:rPr lang="en-US" sz="1400" dirty="0">
                 <a:solidFill>
-                  <a:srgbClr val="16211F"/>
+                  <a:srgbClr val="241F38"/>
                 </a:solidFill>
                 <a:latin typeface="Calibri" pitchFamily="34" charset="0"/>
                 <a:ea typeface="Calibri" pitchFamily="34" charset="-122"/>
@@ -2345,7 +2345,7 @@
             <a:r>
               <a:rPr lang="en-US" sz="3400" b="1" dirty="0">
                 <a:solidFill>
-                  <a:srgbClr val="0B3D3D"/>
+                  <a:srgbClr val="2E2457"/>
                 </a:solidFill>
                 <a:latin typeface="Cambria" pitchFamily="34" charset="0"/>
                 <a:ea typeface="Cambria" pitchFamily="34" charset="-122"/>
@@ -2374,11 +2374,11 @@
             </a:avLst>
           </a:prstGeom>
           <a:solidFill>
-            <a:srgbClr val="F4F6F5"/>
+            <a:srgbClr val="F4F1FC"/>
           </a:solidFill>
           <a:ln w="12700">
             <a:solidFill>
-              <a:srgbClr val="F4F6F5"/>
+              <a:srgbClr val="F4F1FC"/>
             </a:solidFill>
             <a:prstDash val="solid"/>
           </a:ln>
@@ -2411,7 +2411,7 @@
             <a:r>
               <a:rPr lang="en-US" sz="1800" b="1" dirty="0">
                 <a:solidFill>
-                  <a:srgbClr val="0B6E6E"/>
+                  <a:srgbClr val="6A57B8"/>
                 </a:solidFill>
                 <a:latin typeface="Cambria" pitchFamily="34" charset="0"/>
                 <a:ea typeface="Cambria" pitchFamily="34" charset="-122"/>
@@ -2450,7 +2450,7 @@
             <a:r>
               <a:rPr lang="en-US" sz="1400" dirty="0">
                 <a:solidFill>
-                  <a:srgbClr val="16211F"/>
+                  <a:srgbClr val="241F38"/>
                 </a:solidFill>
                 <a:latin typeface="Calibri" pitchFamily="34" charset="0"/>
                 <a:ea typeface="Calibri" pitchFamily="34" charset="-122"/>
@@ -2479,11 +2479,11 @@
             </a:avLst>
           </a:prstGeom>
           <a:solidFill>
-            <a:srgbClr val="F4F6F5"/>
+            <a:srgbClr val="F4F1FC"/>
           </a:solidFill>
           <a:ln w="12700">
             <a:solidFill>
-              <a:srgbClr val="F4F6F5"/>
+              <a:srgbClr val="F4F1FC"/>
             </a:solidFill>
             <a:prstDash val="solid"/>
           </a:ln>
@@ -2516,7 +2516,7 @@
             <a:r>
               <a:rPr lang="en-US" sz="1800" b="1" dirty="0">
                 <a:solidFill>
-                  <a:srgbClr val="0B6E6E"/>
+                  <a:srgbClr val="6A57B8"/>
                 </a:solidFill>
                 <a:latin typeface="Cambria" pitchFamily="34" charset="0"/>
                 <a:ea typeface="Cambria" pitchFamily="34" charset="-122"/>
@@ -2555,7 +2555,7 @@
             <a:r>
               <a:rPr lang="en-US" sz="1400" dirty="0">
                 <a:solidFill>
-                  <a:srgbClr val="16211F"/>
+                  <a:srgbClr val="241F38"/>
                 </a:solidFill>
                 <a:latin typeface="Calibri" pitchFamily="34" charset="0"/>
                 <a:ea typeface="Calibri" pitchFamily="34" charset="-122"/>
@@ -2584,11 +2584,11 @@
             </a:avLst>
           </a:prstGeom>
           <a:solidFill>
-            <a:srgbClr val="F4F6F5"/>
+            <a:srgbClr val="F4F1FC"/>
           </a:solidFill>
           <a:ln w="12700">
             <a:solidFill>
-              <a:srgbClr val="F4F6F5"/>
+              <a:srgbClr val="F4F1FC"/>
             </a:solidFill>
             <a:prstDash val="solid"/>
           </a:ln>
@@ -2621,7 +2621,7 @@
             <a:r>
               <a:rPr lang="en-US" sz="1800" b="1" dirty="0">
                 <a:solidFill>
-                  <a:srgbClr val="0B6E6E"/>
+                  <a:srgbClr val="6A57B8"/>
                 </a:solidFill>
                 <a:latin typeface="Cambria" pitchFamily="34" charset="0"/>
                 <a:ea typeface="Cambria" pitchFamily="34" charset="-122"/>
@@ -2660,7 +2660,7 @@
             <a:r>
               <a:rPr lang="en-US" sz="1400" dirty="0">
                 <a:solidFill>
-                  <a:srgbClr val="16211F"/>
+                  <a:srgbClr val="241F38"/>
                 </a:solidFill>
                 <a:latin typeface="Calibri" pitchFamily="34" charset="0"/>
                 <a:ea typeface="Calibri" pitchFamily="34" charset="-122"/>
@@ -2699,7 +2699,7 @@
             <a:r>
               <a:rPr lang="en-US" sz="2000" i="1" dirty="0">
                 <a:solidFill>
-                  <a:srgbClr val="0B3D3D"/>
+                  <a:srgbClr val="2E2457"/>
                 </a:solidFill>
                 <a:latin typeface="Cambria" pitchFamily="34" charset="0"/>
                 <a:ea typeface="Cambria" pitchFamily="34" charset="-122"/>
@@ -2770,7 +2770,7 @@
             <a:r>
               <a:rPr lang="en-US" sz="3400" b="1" dirty="0">
                 <a:solidFill>
-                  <a:srgbClr val="0B3D3D"/>
+                  <a:srgbClr val="2E2457"/>
                 </a:solidFill>
                 <a:latin typeface="Cambria" pitchFamily="34" charset="0"/>
                 <a:ea typeface="Cambria" pitchFamily="34" charset="-122"/>
@@ -2840,7 +2840,7 @@
             <a:r>
               <a:rPr lang="en-US" sz="1400" b="1" dirty="0">
                 <a:solidFill>
-                  <a:srgbClr val="0B6E6E"/>
+                  <a:srgbClr val="6A57B8"/>
                 </a:solidFill>
                 <a:latin typeface="Calibri" pitchFamily="34" charset="0"/>
                 <a:ea typeface="Calibri" pitchFamily="34" charset="-122"/>
@@ -2857,7 +2857,7 @@
             <a:r>
               <a:rPr lang="en-US" sz="1400" dirty="0">
                 <a:solidFill>
-                  <a:srgbClr val="16211F"/>
+                  <a:srgbClr val="241F38"/>
                 </a:solidFill>
                 <a:latin typeface="Calibri" pitchFamily="34" charset="0"/>
                 <a:ea typeface="Calibri" pitchFamily="34" charset="-122"/>
@@ -2896,7 +2896,7 @@
             <a:r>
               <a:rPr lang="en-US" sz="1400" b="1" dirty="0">
                 <a:solidFill>
-                  <a:srgbClr val="0B6E6E"/>
+                  <a:srgbClr val="6A57B8"/>
                 </a:solidFill>
                 <a:latin typeface="Calibri" pitchFamily="34" charset="0"/>
                 <a:ea typeface="Calibri" pitchFamily="34" charset="-122"/>
@@ -2913,7 +2913,7 @@
             <a:r>
               <a:rPr lang="en-US" sz="1400" dirty="0">
                 <a:solidFill>
-                  <a:srgbClr val="16211F"/>
+                  <a:srgbClr val="241F38"/>
                 </a:solidFill>
                 <a:latin typeface="Calibri" pitchFamily="34" charset="0"/>
                 <a:ea typeface="Calibri" pitchFamily="34" charset="-122"/>
@@ -2952,7 +2952,7 @@
             <a:r>
               <a:rPr lang="en-US" sz="1400" b="1" dirty="0">
                 <a:solidFill>
-                  <a:srgbClr val="0B6E6E"/>
+                  <a:srgbClr val="6A57B8"/>
                 </a:solidFill>
                 <a:latin typeface="Calibri" pitchFamily="34" charset="0"/>
                 <a:ea typeface="Calibri" pitchFamily="34" charset="-122"/>
@@ -2969,7 +2969,7 @@
             <a:r>
               <a:rPr lang="en-US" sz="1400" dirty="0">
                 <a:solidFill>
-                  <a:srgbClr val="16211F"/>
+                  <a:srgbClr val="241F38"/>
                 </a:solidFill>
                 <a:latin typeface="Calibri" pitchFamily="34" charset="0"/>
                 <a:ea typeface="Calibri" pitchFamily="34" charset="-122"/>
@@ -3008,7 +3008,7 @@
             <a:r>
               <a:rPr lang="en-US" sz="1400" b="1" dirty="0">
                 <a:solidFill>
-                  <a:srgbClr val="0B6E6E"/>
+                  <a:srgbClr val="6A57B8"/>
                 </a:solidFill>
                 <a:latin typeface="Calibri" pitchFamily="34" charset="0"/>
                 <a:ea typeface="Calibri" pitchFamily="34" charset="-122"/>
@@ -3025,7 +3025,7 @@
             <a:r>
               <a:rPr lang="en-US" sz="1400" dirty="0">
                 <a:solidFill>
-                  <a:srgbClr val="16211F"/>
+                  <a:srgbClr val="241F38"/>
                 </a:solidFill>
                 <a:latin typeface="Calibri" pitchFamily="34" charset="0"/>
                 <a:ea typeface="Calibri" pitchFamily="34" charset="-122"/>
@@ -3064,7 +3064,7 @@
             <a:r>
               <a:rPr lang="en-US" sz="1400" b="1" dirty="0">
                 <a:solidFill>
-                  <a:srgbClr val="0B6E6E"/>
+                  <a:srgbClr val="6A57B8"/>
                 </a:solidFill>
                 <a:latin typeface="Calibri" pitchFamily="34" charset="0"/>
                 <a:ea typeface="Calibri" pitchFamily="34" charset="-122"/>
@@ -3081,7 +3081,7 @@
             <a:r>
               <a:rPr lang="en-US" sz="1400" dirty="0">
                 <a:solidFill>
-                  <a:srgbClr val="16211F"/>
+                  <a:srgbClr val="241F38"/>
                 </a:solidFill>
                 <a:latin typeface="Calibri" pitchFamily="34" charset="0"/>
                 <a:ea typeface="Calibri" pitchFamily="34" charset="-122"/>
@@ -3107,7 +3107,7 @@
     <p:bg>
       <p:bgPr>
         <a:solidFill>
-          <a:srgbClr val="0B3D3D"/>
+          <a:srgbClr val="2E2457"/>
         </a:solidFill>
       </p:bgPr>
     </p:bg>
@@ -3373,7 +3373,7 @@
             <a:r>
               <a:rPr lang="en-US" sz="1200" i="1" dirty="0">
                 <a:solidFill>
-                  <a:srgbClr val="CFE3E1"/>
+                  <a:srgbClr val="DDD4F6"/>
                 </a:solidFill>
                 <a:latin typeface="Calibri" pitchFamily="34" charset="0"/>
                 <a:ea typeface="Calibri" pitchFamily="34" charset="-122"/>
@@ -3444,7 +3444,7 @@
             <a:r>
               <a:rPr lang="en-US" sz="3400" b="1" dirty="0">
                 <a:solidFill>
-                  <a:srgbClr val="0B3D3D"/>
+                  <a:srgbClr val="2E2457"/>
                 </a:solidFill>
                 <a:latin typeface="Cambria" pitchFamily="34" charset="0"/>
                 <a:ea typeface="Cambria" pitchFamily="34" charset="-122"/>
@@ -3471,11 +3471,11 @@
             <a:avLst/>
           </a:prstGeom>
           <a:solidFill>
-            <a:srgbClr val="0B6E6E"/>
+            <a:srgbClr val="6A57B8"/>
           </a:solidFill>
           <a:ln w="12700">
             <a:solidFill>
-              <a:srgbClr val="0B6E6E"/>
+              <a:srgbClr val="6A57B8"/>
             </a:solidFill>
             <a:prstDash val="solid"/>
           </a:ln>
@@ -3547,7 +3547,7 @@
             <a:r>
               <a:rPr lang="en-US" sz="1600" b="1" dirty="0">
                 <a:solidFill>
-                  <a:srgbClr val="0B3D3D"/>
+                  <a:srgbClr val="2E2457"/>
                 </a:solidFill>
                 <a:latin typeface="Cambria" pitchFamily="34" charset="0"/>
                 <a:ea typeface="Cambria" pitchFamily="34" charset="-122"/>
@@ -3586,7 +3586,7 @@
             <a:r>
               <a:rPr lang="en-US" sz="1400" dirty="0">
                 <a:solidFill>
-                  <a:srgbClr val="16211F"/>
+                  <a:srgbClr val="241F38"/>
                 </a:solidFill>
                 <a:latin typeface="Calibri" pitchFamily="34" charset="0"/>
                 <a:ea typeface="Calibri" pitchFamily="34" charset="-122"/>
@@ -3613,11 +3613,11 @@
             <a:avLst/>
           </a:prstGeom>
           <a:solidFill>
-            <a:srgbClr val="0B6E6E"/>
+            <a:srgbClr val="6A57B8"/>
           </a:solidFill>
           <a:ln w="12700">
             <a:solidFill>
-              <a:srgbClr val="0B6E6E"/>
+              <a:srgbClr val="6A57B8"/>
             </a:solidFill>
             <a:prstDash val="solid"/>
           </a:ln>
@@ -3689,7 +3689,7 @@
             <a:r>
               <a:rPr lang="en-US" sz="1600" b="1" dirty="0">
                 <a:solidFill>
-                  <a:srgbClr val="0B3D3D"/>
+                  <a:srgbClr val="2E2457"/>
                 </a:solidFill>
                 <a:latin typeface="Cambria" pitchFamily="34" charset="0"/>
                 <a:ea typeface="Cambria" pitchFamily="34" charset="-122"/>
@@ -3728,7 +3728,7 @@
             <a:r>
               <a:rPr lang="en-US" sz="1400" dirty="0">
                 <a:solidFill>
-                  <a:srgbClr val="16211F"/>
+                  <a:srgbClr val="241F38"/>
                 </a:solidFill>
                 <a:latin typeface="Calibri" pitchFamily="34" charset="0"/>
                 <a:ea typeface="Calibri" pitchFamily="34" charset="-122"/>
@@ -3755,11 +3755,11 @@
             <a:avLst/>
           </a:prstGeom>
           <a:solidFill>
-            <a:srgbClr val="0B6E6E"/>
+            <a:srgbClr val="6A57B8"/>
           </a:solidFill>
           <a:ln w="12700">
             <a:solidFill>
-              <a:srgbClr val="0B6E6E"/>
+              <a:srgbClr val="6A57B8"/>
             </a:solidFill>
             <a:prstDash val="solid"/>
           </a:ln>
@@ -3831,7 +3831,7 @@
             <a:r>
               <a:rPr lang="en-US" sz="1600" b="1" dirty="0">
                 <a:solidFill>
-                  <a:srgbClr val="0B3D3D"/>
+                  <a:srgbClr val="2E2457"/>
                 </a:solidFill>
                 <a:latin typeface="Cambria" pitchFamily="34" charset="0"/>
                 <a:ea typeface="Cambria" pitchFamily="34" charset="-122"/>
@@ -3870,7 +3870,7 @@
             <a:r>
               <a:rPr lang="en-US" sz="1400" dirty="0">
                 <a:solidFill>
-                  <a:srgbClr val="16211F"/>
+                  <a:srgbClr val="241F38"/>
                 </a:solidFill>
                 <a:latin typeface="Calibri" pitchFamily="34" charset="0"/>
                 <a:ea typeface="Calibri" pitchFamily="34" charset="-122"/>
@@ -3897,11 +3897,11 @@
             <a:avLst/>
           </a:prstGeom>
           <a:solidFill>
-            <a:srgbClr val="0B6E6E"/>
+            <a:srgbClr val="6A57B8"/>
           </a:solidFill>
           <a:ln w="12700">
             <a:solidFill>
-              <a:srgbClr val="0B6E6E"/>
+              <a:srgbClr val="6A57B8"/>
             </a:solidFill>
             <a:prstDash val="solid"/>
           </a:ln>
@@ -3973,7 +3973,7 @@
             <a:r>
               <a:rPr lang="en-US" sz="1600" b="1" dirty="0">
                 <a:solidFill>
-                  <a:srgbClr val="0B3D3D"/>
+                  <a:srgbClr val="2E2457"/>
                 </a:solidFill>
                 <a:latin typeface="Cambria" pitchFamily="34" charset="0"/>
                 <a:ea typeface="Cambria" pitchFamily="34" charset="-122"/>
@@ -4012,7 +4012,7 @@
             <a:r>
               <a:rPr lang="en-US" sz="1400" dirty="0">
                 <a:solidFill>
-                  <a:srgbClr val="16211F"/>
+                  <a:srgbClr val="241F38"/>
                 </a:solidFill>
                 <a:latin typeface="Calibri" pitchFamily="34" charset="0"/>
                 <a:ea typeface="Calibri" pitchFamily="34" charset="-122"/>
@@ -4039,11 +4039,11 @@
             <a:avLst/>
           </a:prstGeom>
           <a:solidFill>
-            <a:srgbClr val="0B6E6E"/>
+            <a:srgbClr val="6A57B8"/>
           </a:solidFill>
           <a:ln w="12700">
             <a:solidFill>
-              <a:srgbClr val="0B6E6E"/>
+              <a:srgbClr val="6A57B8"/>
             </a:solidFill>
             <a:prstDash val="solid"/>
           </a:ln>
@@ -4115,7 +4115,7 @@
             <a:r>
               <a:rPr lang="en-US" sz="1600" b="1" dirty="0">
                 <a:solidFill>
-                  <a:srgbClr val="0B3D3D"/>
+                  <a:srgbClr val="2E2457"/>
                 </a:solidFill>
                 <a:latin typeface="Cambria" pitchFamily="34" charset="0"/>
                 <a:ea typeface="Cambria" pitchFamily="34" charset="-122"/>
@@ -4154,7 +4154,7 @@
             <a:r>
               <a:rPr lang="en-US" sz="1400" dirty="0">
                 <a:solidFill>
-                  <a:srgbClr val="16211F"/>
+                  <a:srgbClr val="241F38"/>
                 </a:solidFill>
                 <a:latin typeface="Calibri" pitchFamily="34" charset="0"/>
                 <a:ea typeface="Calibri" pitchFamily="34" charset="-122"/>
@@ -4225,7 +4225,7 @@
             <a:r>
               <a:rPr lang="en-US" sz="3400" b="1" dirty="0">
                 <a:solidFill>
-                  <a:srgbClr val="0B3D3D"/>
+                  <a:srgbClr val="2E2457"/>
                 </a:solidFill>
                 <a:latin typeface="Cambria" pitchFamily="34" charset="0"/>
                 <a:ea typeface="Cambria" pitchFamily="34" charset="-122"/>
@@ -4361,7 +4361,7 @@
             <a:r>
               <a:rPr lang="en-US" sz="1400" dirty="0">
                 <a:solidFill>
-                  <a:srgbClr val="16211F"/>
+                  <a:srgbClr val="241F38"/>
                 </a:solidFill>
                 <a:latin typeface="Calibri" pitchFamily="34" charset="0"/>
                 <a:ea typeface="Calibri" pitchFamily="34" charset="-122"/>
@@ -4382,7 +4382,7 @@
             <a:r>
               <a:rPr lang="en-US" sz="1400" dirty="0">
                 <a:solidFill>
-                  <a:srgbClr val="16211F"/>
+                  <a:srgbClr val="241F38"/>
                 </a:solidFill>
                 <a:latin typeface="Calibri" pitchFamily="34" charset="0"/>
                 <a:ea typeface="Calibri" pitchFamily="34" charset="-122"/>
@@ -4403,7 +4403,7 @@
             <a:r>
               <a:rPr lang="en-US" sz="1400" dirty="0">
                 <a:solidFill>
-                  <a:srgbClr val="16211F"/>
+                  <a:srgbClr val="241F38"/>
                 </a:solidFill>
                 <a:latin typeface="Calibri" pitchFamily="34" charset="0"/>
                 <a:ea typeface="Calibri" pitchFamily="34" charset="-122"/>
@@ -4424,7 +4424,7 @@
             <a:r>
               <a:rPr lang="en-US" sz="1400" dirty="0">
                 <a:solidFill>
-                  <a:srgbClr val="16211F"/>
+                  <a:srgbClr val="241F38"/>
                 </a:solidFill>
                 <a:latin typeface="Calibri" pitchFamily="34" charset="0"/>
                 <a:ea typeface="Calibri" pitchFamily="34" charset="-122"/>
@@ -4495,7 +4495,7 @@
             <a:r>
               <a:rPr lang="en-US" sz="3400" b="1" dirty="0">
                 <a:solidFill>
-                  <a:srgbClr val="0B3D3D"/>
+                  <a:srgbClr val="2E2457"/>
                 </a:solidFill>
                 <a:latin typeface="Cambria" pitchFamily="34" charset="0"/>
                 <a:ea typeface="Cambria" pitchFamily="34" charset="-122"/>
@@ -4524,11 +4524,11 @@
             </a:avLst>
           </a:prstGeom>
           <a:solidFill>
-            <a:srgbClr val="0B6E6E"/>
+            <a:srgbClr val="6A57B8"/>
           </a:solidFill>
           <a:ln w="12700">
             <a:solidFill>
-              <a:srgbClr val="0B6E6E"/>
+              <a:srgbClr val="6A57B8"/>
             </a:solidFill>
             <a:prstDash val="solid"/>
           </a:ln>
@@ -4607,11 +4607,11 @@
             </a:avLst>
           </a:prstGeom>
           <a:solidFill>
-            <a:srgbClr val="0B3D3D"/>
+            <a:srgbClr val="2E2457"/>
           </a:solidFill>
           <a:ln w="12700">
             <a:solidFill>
-              <a:srgbClr val="0B3D3D"/>
+              <a:srgbClr val="2E2457"/>
             </a:solidFill>
             <a:prstDash val="solid"/>
           </a:ln>
@@ -4690,11 +4690,11 @@
             </a:avLst>
           </a:prstGeom>
           <a:solidFill>
-            <a:srgbClr val="0B6E6E"/>
+            <a:srgbClr val="6A57B8"/>
           </a:solidFill>
           <a:ln w="12700">
             <a:solidFill>
-              <a:srgbClr val="0B6E6E"/>
+              <a:srgbClr val="6A57B8"/>
             </a:solidFill>
             <a:prstDash val="solid"/>
           </a:ln>
@@ -4773,11 +4773,11 @@
             </a:avLst>
           </a:prstGeom>
           <a:solidFill>
-            <a:srgbClr val="F4F6F5"/>
+            <a:srgbClr val="F4F1FC"/>
           </a:solidFill>
           <a:ln w="12700">
             <a:solidFill>
-              <a:srgbClr val="F4F6F5"/>
+              <a:srgbClr val="F4F1FC"/>
             </a:solidFill>
             <a:prstDash val="solid"/>
           </a:ln>
@@ -4810,7 +4810,7 @@
             <a:r>
               <a:rPr lang="en-US" sz="1500" b="1" dirty="0">
                 <a:solidFill>
-                  <a:srgbClr val="16211F"/>
+                  <a:srgbClr val="241F38"/>
                 </a:solidFill>
                 <a:latin typeface="Calibri" pitchFamily="34" charset="0"/>
                 <a:ea typeface="Calibri" pitchFamily="34" charset="-122"/>
@@ -4827,7 +4827,7 @@
             <a:r>
               <a:rPr lang="en-US" sz="1200" dirty="0">
                 <a:solidFill>
-                  <a:srgbClr val="16211F"/>
+                  <a:srgbClr val="241F38"/>
                 </a:solidFill>
                 <a:latin typeface="Calibri" pitchFamily="34" charset="0"/>
                 <a:ea typeface="Calibri" pitchFamily="34" charset="-122"/>
@@ -4856,11 +4856,11 @@
             </a:avLst>
           </a:prstGeom>
           <a:solidFill>
-            <a:srgbClr val="F4F6F5"/>
+            <a:srgbClr val="F4F1FC"/>
           </a:solidFill>
           <a:ln w="12700">
             <a:solidFill>
-              <a:srgbClr val="F4F6F5"/>
+              <a:srgbClr val="F4F1FC"/>
             </a:solidFill>
             <a:prstDash val="solid"/>
           </a:ln>
@@ -4893,7 +4893,7 @@
             <a:r>
               <a:rPr lang="en-US" sz="1500" b="1" dirty="0">
                 <a:solidFill>
-                  <a:srgbClr val="16211F"/>
+                  <a:srgbClr val="241F38"/>
                 </a:solidFill>
                 <a:latin typeface="Calibri" pitchFamily="34" charset="0"/>
                 <a:ea typeface="Calibri" pitchFamily="34" charset="-122"/>
@@ -4910,7 +4910,7 @@
             <a:r>
               <a:rPr lang="en-US" sz="1200" dirty="0">
                 <a:solidFill>
-                  <a:srgbClr val="16211F"/>
+                  <a:srgbClr val="241F38"/>
                 </a:solidFill>
                 <a:latin typeface="Calibri" pitchFamily="34" charset="0"/>
                 <a:ea typeface="Calibri" pitchFamily="34" charset="-122"/>
@@ -4939,11 +4939,11 @@
             </a:avLst>
           </a:prstGeom>
           <a:solidFill>
-            <a:srgbClr val="F4F6F5"/>
+            <a:srgbClr val="F4F1FC"/>
           </a:solidFill>
           <a:ln w="12700">
             <a:solidFill>
-              <a:srgbClr val="F4F6F5"/>
+              <a:srgbClr val="F4F1FC"/>
             </a:solidFill>
             <a:prstDash val="solid"/>
           </a:ln>
@@ -4976,7 +4976,7 @@
             <a:r>
               <a:rPr lang="en-US" sz="1500" b="1" dirty="0">
                 <a:solidFill>
-                  <a:srgbClr val="16211F"/>
+                  <a:srgbClr val="241F38"/>
                 </a:solidFill>
                 <a:latin typeface="Calibri" pitchFamily="34" charset="0"/>
                 <a:ea typeface="Calibri" pitchFamily="34" charset="-122"/>
@@ -4993,7 +4993,7 @@
             <a:r>
               <a:rPr lang="en-US" sz="1200" dirty="0">
                 <a:solidFill>
-                  <a:srgbClr val="16211F"/>
+                  <a:srgbClr val="241F38"/>
                 </a:solidFill>
                 <a:latin typeface="Calibri" pitchFamily="34" charset="0"/>
                 <a:ea typeface="Calibri" pitchFamily="34" charset="-122"/>
@@ -5032,7 +5032,7 @@
             <a:r>
               <a:rPr lang="en-US" sz="2000" b="1" dirty="0">
                 <a:solidFill>
-                  <a:srgbClr val="0B3D3D"/>
+                  <a:srgbClr val="2E2457"/>
                 </a:solidFill>
                 <a:latin typeface="Calibri" pitchFamily="34" charset="0"/>
                 <a:ea typeface="Calibri" pitchFamily="34" charset="-122"/>
@@ -5071,7 +5071,7 @@
             <a:r>
               <a:rPr lang="en-US" sz="2000" b="1" dirty="0">
                 <a:solidFill>
-                  <a:srgbClr val="0B3D3D"/>
+                  <a:srgbClr val="2E2457"/>
                 </a:solidFill>
                 <a:latin typeface="Calibri" pitchFamily="34" charset="0"/>
                 <a:ea typeface="Calibri" pitchFamily="34" charset="-122"/>
@@ -5110,7 +5110,7 @@
             <a:r>
               <a:rPr lang="en-US" sz="1300" dirty="0">
                 <a:solidFill>
-                  <a:srgbClr val="5D6B68"/>
+                  <a:srgbClr val="5F5978"/>
                 </a:solidFill>
                 <a:latin typeface="Calibri" pitchFamily="34" charset="0"/>
                 <a:ea typeface="Calibri" pitchFamily="34" charset="-122"/>
@@ -5181,7 +5181,7 @@
             <a:r>
               <a:rPr lang="en-US" sz="3400" b="1" dirty="0">
                 <a:solidFill>
-                  <a:srgbClr val="0B3D3D"/>
+                  <a:srgbClr val="2E2457"/>
                 </a:solidFill>
                 <a:latin typeface="Cambria" pitchFamily="34" charset="0"/>
                 <a:ea typeface="Cambria" pitchFamily="34" charset="-122"/>
@@ -5210,11 +5210,11 @@
             </a:avLst>
           </a:prstGeom>
           <a:solidFill>
-            <a:srgbClr val="F4F6F5"/>
+            <a:srgbClr val="F4F1FC"/>
           </a:solidFill>
           <a:ln w="12700">
             <a:solidFill>
-              <a:srgbClr val="F4F6F5"/>
+              <a:srgbClr val="F4F1FC"/>
             </a:solidFill>
             <a:prstDash val="solid"/>
           </a:ln>
@@ -5247,7 +5247,7 @@
             <a:r>
               <a:rPr lang="en-US" sz="1800" b="1" dirty="0">
                 <a:solidFill>
-                  <a:srgbClr val="0B6E6E"/>
+                  <a:srgbClr val="6A57B8"/>
                 </a:solidFill>
                 <a:latin typeface="Cambria" pitchFamily="34" charset="0"/>
                 <a:ea typeface="Cambria" pitchFamily="34" charset="-122"/>
@@ -5286,7 +5286,7 @@
             <a:r>
               <a:rPr lang="en-US" sz="1400" dirty="0">
                 <a:solidFill>
-                  <a:srgbClr val="16211F"/>
+                  <a:srgbClr val="241F38"/>
                 </a:solidFill>
                 <a:latin typeface="Calibri" pitchFamily="34" charset="0"/>
                 <a:ea typeface="Calibri" pitchFamily="34" charset="-122"/>
@@ -5315,11 +5315,11 @@
             </a:avLst>
           </a:prstGeom>
           <a:solidFill>
-            <a:srgbClr val="F4F6F5"/>
+            <a:srgbClr val="F4F1FC"/>
           </a:solidFill>
           <a:ln w="12700">
             <a:solidFill>
-              <a:srgbClr val="F4F6F5"/>
+              <a:srgbClr val="F4F1FC"/>
             </a:solidFill>
             <a:prstDash val="solid"/>
           </a:ln>
@@ -5352,7 +5352,7 @@
             <a:r>
               <a:rPr lang="en-US" sz="1800" b="1" dirty="0">
                 <a:solidFill>
-                  <a:srgbClr val="0B6E6E"/>
+                  <a:srgbClr val="6A57B8"/>
                 </a:solidFill>
                 <a:latin typeface="Cambria" pitchFamily="34" charset="0"/>
                 <a:ea typeface="Cambria" pitchFamily="34" charset="-122"/>
@@ -5391,7 +5391,7 @@
             <a:r>
               <a:rPr lang="en-US" sz="1400" dirty="0">
                 <a:solidFill>
-                  <a:srgbClr val="16211F"/>
+                  <a:srgbClr val="241F38"/>
                 </a:solidFill>
                 <a:latin typeface="Calibri" pitchFamily="34" charset="0"/>
                 <a:ea typeface="Calibri" pitchFamily="34" charset="-122"/>
@@ -5420,11 +5420,11 @@
             </a:avLst>
           </a:prstGeom>
           <a:solidFill>
-            <a:srgbClr val="F4F6F5"/>
+            <a:srgbClr val="F4F1FC"/>
           </a:solidFill>
           <a:ln w="12700">
             <a:solidFill>
-              <a:srgbClr val="F4F6F5"/>
+              <a:srgbClr val="F4F1FC"/>
             </a:solidFill>
             <a:prstDash val="solid"/>
           </a:ln>
@@ -5457,7 +5457,7 @@
             <a:r>
               <a:rPr lang="en-US" sz="1800" b="1" dirty="0">
                 <a:solidFill>
-                  <a:srgbClr val="0B6E6E"/>
+                  <a:srgbClr val="6A57B8"/>
                 </a:solidFill>
                 <a:latin typeface="Cambria" pitchFamily="34" charset="0"/>
                 <a:ea typeface="Cambria" pitchFamily="34" charset="-122"/>
@@ -5496,7 +5496,7 @@
             <a:r>
               <a:rPr lang="en-US" sz="1400" dirty="0">
                 <a:solidFill>
-                  <a:srgbClr val="16211F"/>
+                  <a:srgbClr val="241F38"/>
                 </a:solidFill>
                 <a:latin typeface="Calibri" pitchFamily="34" charset="0"/>
                 <a:ea typeface="Calibri" pitchFamily="34" charset="-122"/>
@@ -5525,11 +5525,11 @@
             </a:avLst>
           </a:prstGeom>
           <a:solidFill>
-            <a:srgbClr val="F4F6F5"/>
+            <a:srgbClr val="F4F1FC"/>
           </a:solidFill>
           <a:ln w="12700">
             <a:solidFill>
-              <a:srgbClr val="F4F6F5"/>
+              <a:srgbClr val="F4F1FC"/>
             </a:solidFill>
             <a:prstDash val="solid"/>
           </a:ln>
@@ -5562,7 +5562,7 @@
             <a:r>
               <a:rPr lang="en-US" sz="1800" b="1" dirty="0">
                 <a:solidFill>
-                  <a:srgbClr val="0B6E6E"/>
+                  <a:srgbClr val="6A57B8"/>
                 </a:solidFill>
                 <a:latin typeface="Cambria" pitchFamily="34" charset="0"/>
                 <a:ea typeface="Cambria" pitchFamily="34" charset="-122"/>
@@ -5601,7 +5601,7 @@
             <a:r>
               <a:rPr lang="en-US" sz="1400" dirty="0">
                 <a:solidFill>
-                  <a:srgbClr val="16211F"/>
+                  <a:srgbClr val="241F38"/>
                 </a:solidFill>
                 <a:latin typeface="Calibri" pitchFamily="34" charset="0"/>
                 <a:ea typeface="Calibri" pitchFamily="34" charset="-122"/>
@@ -5627,7 +5627,7 @@
     <p:bg>
       <p:bgPr>
         <a:solidFill>
-          <a:srgbClr val="0B3D3D"/>
+          <a:srgbClr val="2E2457"/>
         </a:solidFill>
       </p:bgPr>
     </p:bg>
@@ -5838,7 +5838,7 @@
             <a:r>
               <a:rPr lang="en-US" sz="4400" b="1" dirty="0">
                 <a:solidFill>
-                  <a:srgbClr val="F2A33A"/>
+                  <a:srgbClr val="9FD3F0"/>
                 </a:solidFill>
                 <a:latin typeface="Cambria" pitchFamily="34" charset="0"/>
                 <a:ea typeface="Cambria" pitchFamily="34" charset="-122"/>
@@ -5877,7 +5877,7 @@
             <a:r>
               <a:rPr lang="en-US" sz="1400" dirty="0">
                 <a:solidFill>
-                  <a:srgbClr val="CFE3E1"/>
+                  <a:srgbClr val="DDD4F6"/>
                 </a:solidFill>
                 <a:latin typeface="Calibri" pitchFamily="34" charset="0"/>
                 <a:ea typeface="Calibri" pitchFamily="34" charset="-122"/>
@@ -5916,7 +5916,7 @@
             <a:r>
               <a:rPr lang="en-US" sz="4400" b="1" dirty="0">
                 <a:solidFill>
-                  <a:srgbClr val="F2A33A"/>
+                  <a:srgbClr val="9FD3F0"/>
                 </a:solidFill>
                 <a:latin typeface="Cambria" pitchFamily="34" charset="0"/>
                 <a:ea typeface="Cambria" pitchFamily="34" charset="-122"/>
@@ -5955,7 +5955,7 @@
             <a:r>
               <a:rPr lang="en-US" sz="1400" dirty="0">
                 <a:solidFill>
-                  <a:srgbClr val="CFE3E1"/>
+                  <a:srgbClr val="DDD4F6"/>
                 </a:solidFill>
                 <a:latin typeface="Calibri" pitchFamily="34" charset="0"/>
                 <a:ea typeface="Calibri" pitchFamily="34" charset="-122"/>
@@ -5994,7 +5994,7 @@
             <a:r>
               <a:rPr lang="en-US" sz="4400" b="1" dirty="0">
                 <a:solidFill>
-                  <a:srgbClr val="F2A33A"/>
+                  <a:srgbClr val="9FD3F0"/>
                 </a:solidFill>
                 <a:latin typeface="Cambria" pitchFamily="34" charset="0"/>
                 <a:ea typeface="Cambria" pitchFamily="34" charset="-122"/>
@@ -6033,7 +6033,7 @@
             <a:r>
               <a:rPr lang="en-US" sz="1400" dirty="0">
                 <a:solidFill>
-                  <a:srgbClr val="CFE3E1"/>
+                  <a:srgbClr val="DDD4F6"/>
                 </a:solidFill>
                 <a:latin typeface="Calibri" pitchFamily="34" charset="0"/>
                 <a:ea typeface="Calibri" pitchFamily="34" charset="-122"/>

--- a/submission/Kasi-Grid-deck.pptx
+++ b/submission/Kasi-Grid-deck.pptx
@@ -15,9 +15,13 @@
     <p:sldId id="263" r:id="rId9"/>
     <p:sldId id="264" r:id="rId10"/>
     <p:sldId id="265" r:id="rId11"/>
+    <p:sldId id="266" r:id="rId12"/>
+    <p:sldId id="267" r:id="rId13"/>
+    <p:sldId id="268" r:id="rId14"/>
+    <p:sldId id="269" r:id="rId15"/>
   </p:sldIdLst>
   <p:notesMasterIdLst>
-    <p:notesMasterId r:id="rId12"/>
+    <p:notesMasterId r:id="rId16"/>
   </p:notesMasterIdLst>
   <p:sldSz cx="9144000" cy="5143500"/>
   <p:notesSz cx="5143500" cy="9144000"/>
@@ -623,6 +627,358 @@
             <a:fld id="{F7021451-1387-4CA6-816F-3879F97B5CBC}" type="slidenum">
               <a:rPr lang="en-US"/>
               <a:t>10</a:t>
+            </a:fld>
+            <a:endParaRPr lang="en-US"/>
+          </a:p>
+        </p:txBody>
+      </p:sp>
+    </p:spTree>
+    <p:extLst>
+      <p:ext uri="{BB962C8B-B14F-4D97-AF65-F5344CB8AC3E}">
+        <p14:creationId xmlns:p14="http://schemas.microsoft.com/office/powerpoint/2010/main" val="1024086991"/>
+      </p:ext>
+    </p:extLst>
+  </p:cSld>
+  <p:clrMapOvr>
+    <a:masterClrMapping/>
+  </p:clrMapOvr>
+</p:notes>
+</file>
+
+<file path=ppt/notesSlides/notesSlide11.xml><?xml version="1.0" encoding="utf-8"?>
+<p:notes xmlns:a="http://schemas.openxmlformats.org/drawingml/2006/main" xmlns:r="http://schemas.openxmlformats.org/officeDocument/2006/relationships" xmlns:p="http://schemas.openxmlformats.org/presentationml/2006/main">
+  <p:cSld>
+    <p:spTree>
+      <p:nvGrpSpPr>
+        <p:cNvPr id="1" name=""/>
+        <p:cNvGrpSpPr/>
+        <p:nvPr/>
+      </p:nvGrpSpPr>
+      <p:grpSpPr>
+        <a:xfrm>
+          <a:off x="0" y="0"/>
+          <a:ext cx="0" cy="0"/>
+          <a:chOff x="0" y="0"/>
+          <a:chExt cx="0" cy="0"/>
+        </a:xfrm>
+      </p:grpSpPr>
+      <p:sp>
+        <p:nvSpPr>
+          <p:cNvPr id="2" name="Slide Image Placeholder 1"/>
+          <p:cNvSpPr>
+            <a:spLocks noGrp="1" noRot="1" noChangeAspect="1"/>
+          </p:cNvSpPr>
+          <p:nvPr>
+            <p:ph type="sldImg"/>
+          </p:nvPr>
+        </p:nvSpPr>
+        <p:spPr/>
+      </p:sp>
+      <p:sp>
+        <p:nvSpPr>
+          <p:cNvPr id="3" name="Notes Placeholder 2"/>
+          <p:cNvSpPr>
+            <a:spLocks noGrp="1"/>
+          </p:cNvSpPr>
+          <p:nvPr>
+            <p:ph type="body" idx="1"/>
+          </p:nvPr>
+        </p:nvSpPr>
+        <p:spPr/>
+        <p:txBody>
+          <a:bodyPr/>
+          <a:lstStyle/>
+          <a:p>
+            <a:r>
+              <a:rPr lang="en-US" dirty="0"/>
+              <a:t/>
+            </a:r>
+            <a:endParaRPr lang="en-US" dirty="0"/>
+          </a:p>
+        </p:txBody>
+      </p:sp>
+      <p:sp>
+        <p:nvSpPr>
+          <p:cNvPr id="4" name="Slide Number Placeholder 3"/>
+          <p:cNvSpPr>
+            <a:spLocks noGrp="1"/>
+          </p:cNvSpPr>
+          <p:nvPr>
+            <p:ph type="sldNum" sz="quarter" idx="10"/>
+          </p:nvPr>
+        </p:nvSpPr>
+        <p:spPr/>
+        <p:txBody>
+          <a:bodyPr/>
+          <a:lstStyle/>
+          <a:p>
+            <a:fld id="{F7021451-1387-4CA6-816F-3879F97B5CBC}" type="slidenum">
+              <a:rPr lang="en-US"/>
+              <a:t>11</a:t>
+            </a:fld>
+            <a:endParaRPr lang="en-US"/>
+          </a:p>
+        </p:txBody>
+      </p:sp>
+    </p:spTree>
+    <p:extLst>
+      <p:ext uri="{BB962C8B-B14F-4D97-AF65-F5344CB8AC3E}">
+        <p14:creationId xmlns:p14="http://schemas.microsoft.com/office/powerpoint/2010/main" val="1024086991"/>
+      </p:ext>
+    </p:extLst>
+  </p:cSld>
+  <p:clrMapOvr>
+    <a:masterClrMapping/>
+  </p:clrMapOvr>
+</p:notes>
+</file>
+
+<file path=ppt/notesSlides/notesSlide12.xml><?xml version="1.0" encoding="utf-8"?>
+<p:notes xmlns:a="http://schemas.openxmlformats.org/drawingml/2006/main" xmlns:r="http://schemas.openxmlformats.org/officeDocument/2006/relationships" xmlns:p="http://schemas.openxmlformats.org/presentationml/2006/main">
+  <p:cSld>
+    <p:spTree>
+      <p:nvGrpSpPr>
+        <p:cNvPr id="1" name=""/>
+        <p:cNvGrpSpPr/>
+        <p:nvPr/>
+      </p:nvGrpSpPr>
+      <p:grpSpPr>
+        <a:xfrm>
+          <a:off x="0" y="0"/>
+          <a:ext cx="0" cy="0"/>
+          <a:chOff x="0" y="0"/>
+          <a:chExt cx="0" cy="0"/>
+        </a:xfrm>
+      </p:grpSpPr>
+      <p:sp>
+        <p:nvSpPr>
+          <p:cNvPr id="2" name="Slide Image Placeholder 1"/>
+          <p:cNvSpPr>
+            <a:spLocks noGrp="1" noRot="1" noChangeAspect="1"/>
+          </p:cNvSpPr>
+          <p:nvPr>
+            <p:ph type="sldImg"/>
+          </p:nvPr>
+        </p:nvSpPr>
+        <p:spPr/>
+      </p:sp>
+      <p:sp>
+        <p:nvSpPr>
+          <p:cNvPr id="3" name="Notes Placeholder 2"/>
+          <p:cNvSpPr>
+            <a:spLocks noGrp="1"/>
+          </p:cNvSpPr>
+          <p:nvPr>
+            <p:ph type="body" idx="1"/>
+          </p:nvPr>
+        </p:nvSpPr>
+        <p:spPr/>
+        <p:txBody>
+          <a:bodyPr/>
+          <a:lstStyle/>
+          <a:p>
+            <a:r>
+              <a:rPr lang="en-US" dirty="0"/>
+              <a:t/>
+            </a:r>
+            <a:endParaRPr lang="en-US" dirty="0"/>
+          </a:p>
+        </p:txBody>
+      </p:sp>
+      <p:sp>
+        <p:nvSpPr>
+          <p:cNvPr id="4" name="Slide Number Placeholder 3"/>
+          <p:cNvSpPr>
+            <a:spLocks noGrp="1"/>
+          </p:cNvSpPr>
+          <p:nvPr>
+            <p:ph type="sldNum" sz="quarter" idx="10"/>
+          </p:nvPr>
+        </p:nvSpPr>
+        <p:spPr/>
+        <p:txBody>
+          <a:bodyPr/>
+          <a:lstStyle/>
+          <a:p>
+            <a:fld id="{F7021451-1387-4CA6-816F-3879F97B5CBC}" type="slidenum">
+              <a:rPr lang="en-US"/>
+              <a:t>12</a:t>
+            </a:fld>
+            <a:endParaRPr lang="en-US"/>
+          </a:p>
+        </p:txBody>
+      </p:sp>
+    </p:spTree>
+    <p:extLst>
+      <p:ext uri="{BB962C8B-B14F-4D97-AF65-F5344CB8AC3E}">
+        <p14:creationId xmlns:p14="http://schemas.microsoft.com/office/powerpoint/2010/main" val="1024086991"/>
+      </p:ext>
+    </p:extLst>
+  </p:cSld>
+  <p:clrMapOvr>
+    <a:masterClrMapping/>
+  </p:clrMapOvr>
+</p:notes>
+</file>
+
+<file path=ppt/notesSlides/notesSlide13.xml><?xml version="1.0" encoding="utf-8"?>
+<p:notes xmlns:a="http://schemas.openxmlformats.org/drawingml/2006/main" xmlns:r="http://schemas.openxmlformats.org/officeDocument/2006/relationships" xmlns:p="http://schemas.openxmlformats.org/presentationml/2006/main">
+  <p:cSld>
+    <p:spTree>
+      <p:nvGrpSpPr>
+        <p:cNvPr id="1" name=""/>
+        <p:cNvGrpSpPr/>
+        <p:nvPr/>
+      </p:nvGrpSpPr>
+      <p:grpSpPr>
+        <a:xfrm>
+          <a:off x="0" y="0"/>
+          <a:ext cx="0" cy="0"/>
+          <a:chOff x="0" y="0"/>
+          <a:chExt cx="0" cy="0"/>
+        </a:xfrm>
+      </p:grpSpPr>
+      <p:sp>
+        <p:nvSpPr>
+          <p:cNvPr id="2" name="Slide Image Placeholder 1"/>
+          <p:cNvSpPr>
+            <a:spLocks noGrp="1" noRot="1" noChangeAspect="1"/>
+          </p:cNvSpPr>
+          <p:nvPr>
+            <p:ph type="sldImg"/>
+          </p:nvPr>
+        </p:nvSpPr>
+        <p:spPr/>
+      </p:sp>
+      <p:sp>
+        <p:nvSpPr>
+          <p:cNvPr id="3" name="Notes Placeholder 2"/>
+          <p:cNvSpPr>
+            <a:spLocks noGrp="1"/>
+          </p:cNvSpPr>
+          <p:nvPr>
+            <p:ph type="body" idx="1"/>
+          </p:nvPr>
+        </p:nvSpPr>
+        <p:spPr/>
+        <p:txBody>
+          <a:bodyPr/>
+          <a:lstStyle/>
+          <a:p>
+            <a:r>
+              <a:rPr lang="en-US" dirty="0"/>
+              <a:t/>
+            </a:r>
+            <a:endParaRPr lang="en-US" dirty="0"/>
+          </a:p>
+        </p:txBody>
+      </p:sp>
+      <p:sp>
+        <p:nvSpPr>
+          <p:cNvPr id="4" name="Slide Number Placeholder 3"/>
+          <p:cNvSpPr>
+            <a:spLocks noGrp="1"/>
+          </p:cNvSpPr>
+          <p:nvPr>
+            <p:ph type="sldNum" sz="quarter" idx="10"/>
+          </p:nvPr>
+        </p:nvSpPr>
+        <p:spPr/>
+        <p:txBody>
+          <a:bodyPr/>
+          <a:lstStyle/>
+          <a:p>
+            <a:fld id="{F7021451-1387-4CA6-816F-3879F97B5CBC}" type="slidenum">
+              <a:rPr lang="en-US"/>
+              <a:t>13</a:t>
+            </a:fld>
+            <a:endParaRPr lang="en-US"/>
+          </a:p>
+        </p:txBody>
+      </p:sp>
+    </p:spTree>
+    <p:extLst>
+      <p:ext uri="{BB962C8B-B14F-4D97-AF65-F5344CB8AC3E}">
+        <p14:creationId xmlns:p14="http://schemas.microsoft.com/office/powerpoint/2010/main" val="1024086991"/>
+      </p:ext>
+    </p:extLst>
+  </p:cSld>
+  <p:clrMapOvr>
+    <a:masterClrMapping/>
+  </p:clrMapOvr>
+</p:notes>
+</file>
+
+<file path=ppt/notesSlides/notesSlide14.xml><?xml version="1.0" encoding="utf-8"?>
+<p:notes xmlns:a="http://schemas.openxmlformats.org/drawingml/2006/main" xmlns:r="http://schemas.openxmlformats.org/officeDocument/2006/relationships" xmlns:p="http://schemas.openxmlformats.org/presentationml/2006/main">
+  <p:cSld>
+    <p:spTree>
+      <p:nvGrpSpPr>
+        <p:cNvPr id="1" name=""/>
+        <p:cNvGrpSpPr/>
+        <p:nvPr/>
+      </p:nvGrpSpPr>
+      <p:grpSpPr>
+        <a:xfrm>
+          <a:off x="0" y="0"/>
+          <a:ext cx="0" cy="0"/>
+          <a:chOff x="0" y="0"/>
+          <a:chExt cx="0" cy="0"/>
+        </a:xfrm>
+      </p:grpSpPr>
+      <p:sp>
+        <p:nvSpPr>
+          <p:cNvPr id="2" name="Slide Image Placeholder 1"/>
+          <p:cNvSpPr>
+            <a:spLocks noGrp="1" noRot="1" noChangeAspect="1"/>
+          </p:cNvSpPr>
+          <p:nvPr>
+            <p:ph type="sldImg"/>
+          </p:nvPr>
+        </p:nvSpPr>
+        <p:spPr/>
+      </p:sp>
+      <p:sp>
+        <p:nvSpPr>
+          <p:cNvPr id="3" name="Notes Placeholder 2"/>
+          <p:cNvSpPr>
+            <a:spLocks noGrp="1"/>
+          </p:cNvSpPr>
+          <p:nvPr>
+            <p:ph type="body" idx="1"/>
+          </p:nvPr>
+        </p:nvSpPr>
+        <p:spPr/>
+        <p:txBody>
+          <a:bodyPr/>
+          <a:lstStyle/>
+          <a:p>
+            <a:r>
+              <a:rPr lang="en-US" dirty="0"/>
+              <a:t/>
+            </a:r>
+            <a:endParaRPr lang="en-US" dirty="0"/>
+          </a:p>
+        </p:txBody>
+      </p:sp>
+      <p:sp>
+        <p:nvSpPr>
+          <p:cNvPr id="4" name="Slide Number Placeholder 3"/>
+          <p:cNvSpPr>
+            <a:spLocks noGrp="1"/>
+          </p:cNvSpPr>
+          <p:nvPr>
+            <p:ph type="sldNum" sz="quarter" idx="10"/>
+          </p:nvPr>
+        </p:nvSpPr>
+        <p:spPr/>
+        <p:txBody>
+          <a:bodyPr/>
+          <a:lstStyle/>
+          <a:p>
+            <a:fld id="{F7021451-1387-4CA6-816F-3879F97B5CBC}" type="slidenum">
+              <a:rPr lang="en-US"/>
+              <a:t>14</a:t>
             </a:fld>
             <a:endParaRPr lang="en-US"/>
           </a:p>
@@ -1684,7 +2040,7 @@
         </p:nvSpPr>
         <p:spPr>
           <a:xfrm>
-            <a:off x="548640" y="1188720"/>
+            <a:off x="548640" y="914400"/>
             <a:ext cx="4937760" cy="914400"/>
           </a:xfrm>
           <a:prstGeom prst="rect">
@@ -1723,8 +2079,8 @@
         </p:nvSpPr>
         <p:spPr>
           <a:xfrm>
-            <a:off x="548640" y="2103120"/>
-            <a:ext cx="4937760" cy="457200"/>
+            <a:off x="548640" y="1874520"/>
+            <a:ext cx="5120640" cy="822960"/>
           </a:xfrm>
           <a:prstGeom prst="rect">
             <a:avLst/>
@@ -1748,7 +2104,7 @@
                 <a:ea typeface="Cambria" pitchFamily="34" charset="-122"/>
                 <a:cs typeface="Cambria" pitchFamily="34" charset="-120"/>
               </a:rPr>
-              <a:t>Prepare. Save. Share.</a:t>
+              <a:t>Loadshedding ended. The outages did not.</a:t>
             </a:r>
             <a:endParaRPr lang="en-US" sz="2400" dirty="0"/>
           </a:p>
@@ -1762,8 +2118,8 @@
         </p:nvSpPr>
         <p:spPr>
           <a:xfrm>
-            <a:off x="548640" y="2743200"/>
-            <a:ext cx="4754880" cy="1005840"/>
+            <a:off x="548640" y="2834640"/>
+            <a:ext cx="4937760" cy="1097280"/>
           </a:xfrm>
           <a:prstGeom prst="rect">
             <a:avLst/>
@@ -1787,7 +2143,7 @@
                 <a:ea typeface="Calibri" pitchFamily="34" charset="-122"/>
                 <a:cs typeface="Calibri" pitchFamily="34" charset="-120"/>
               </a:rPr>
-              <a:t>Community resilience for South African townships: loadshedding, water outages, food prices and neighbours helping neighbours.</a:t>
+              <a:t>Neighbours verify power and water outages, the app learns when and how long they last, and families that depend on power get help.</a:t>
             </a:r>
             <a:endParaRPr lang="en-US" sz="1600" dirty="0"/>
           </a:p>
@@ -1801,8 +2157,8 @@
         </p:nvSpPr>
         <p:spPr>
           <a:xfrm>
-            <a:off x="548640" y="4389120"/>
-            <a:ext cx="5120640" cy="274320"/>
+            <a:off x="548640" y="4206240"/>
+            <a:ext cx="5303520" cy="548640"/>
           </a:xfrm>
           <a:prstGeom prst="rect">
             <a:avLst/>
@@ -1826,7 +2182,24 @@
                 <a:ea typeface="Calibri" pitchFamily="34" charset="-122"/>
                 <a:cs typeface="Calibri" pitchFamily="34" charset="-120"/>
               </a:rPr>
-              <a:t>FNB App of the Year Hackathon 2026  |  Team: [TEAM NAME]</a:t>
+              <a:t>FNB App of the Year Hackathon 2026  |  Climate resilience and essential services</a:t>
+            </a:r>
+            <a:endParaRPr lang="en-US" sz="1200" dirty="0"/>
+          </a:p>
+          <a:p>
+            <a:pPr indent="0" marL="0">
+              <a:buNone/>
+            </a:pPr>
+            <a:r>
+              <a:rPr lang="en-US" sz="1200" dirty="0">
+                <a:solidFill>
+                  <a:srgbClr val="DDD4F6"/>
+                </a:solidFill>
+                <a:latin typeface="Calibri" pitchFamily="34" charset="0"/>
+                <a:ea typeface="Calibri" pitchFamily="34" charset="-122"/>
+                <a:cs typeface="Calibri" pitchFamily="34" charset="-120"/>
+              </a:rPr>
+              <a:t>Tshedza Tshikovhi and Mulanga Munaka  |  Team: [TEAM NAME]</a:t>
             </a:r>
             <a:endParaRPr lang="en-US" sz="1200" dirty="0"/>
           </a:p>
@@ -1848,8 +2221,8 @@
         </p:blipFill>
         <p:spPr>
           <a:xfrm>
-            <a:off x="6309360" y="502920"/>
-            <a:ext cx="2009553" cy="4114800"/>
+            <a:off x="6309360" y="411480"/>
+            <a:ext cx="2054210" cy="4206240"/>
           </a:xfrm>
           <a:prstGeom prst="rect">
             <a:avLst/>
@@ -1903,7 +2276,7 @@
         </p:nvSpPr>
         <p:spPr>
           <a:xfrm>
-            <a:off x="457200" y="320040"/>
+            <a:off x="457200" y="274320"/>
             <a:ext cx="8229600" cy="640080"/>
           </a:xfrm>
           <a:prstGeom prst="rect">
@@ -1920,7 +2293,7 @@
               <a:buNone/>
             </a:pPr>
             <a:r>
-              <a:rPr lang="en-US" sz="3400" b="1" dirty="0">
+              <a:rPr lang="en-US" sz="3000" b="1" dirty="0">
                 <a:solidFill>
                   <a:srgbClr val="2E2457"/>
                 </a:solidFill>
@@ -1928,9 +2301,9 @@
                 <a:ea typeface="Cambria" pitchFamily="34" charset="-122"/>
                 <a:cs typeface="Cambria" pitchFamily="34" charset="-120"/>
               </a:rPr>
-              <a:t>Judges: try it in 2 minutes</a:t>
-            </a:r>
-            <a:endParaRPr lang="en-US" sz="3400" dirty="0"/>
+              <a:t>How it is built, and kept safe</a:t>
+            </a:r>
+            <a:endParaRPr lang="en-US" sz="3000" dirty="0"/>
           </a:p>
         </p:txBody>
       </p:sp>
@@ -1942,12 +2315,261 @@
         </p:nvSpPr>
         <p:spPr>
           <a:xfrm>
-            <a:off x="457200" y="1188720"/>
-            <a:ext cx="4023360" cy="3108960"/>
+            <a:off x="457200" y="1097280"/>
+            <a:ext cx="2194560" cy="1097280"/>
           </a:xfrm>
           <a:prstGeom prst="roundRect">
             <a:avLst>
-              <a:gd name="adj" fmla="val 3529"/>
+              <a:gd name="adj" fmla="val 8333"/>
+            </a:avLst>
+          </a:prstGeom>
+          <a:solidFill>
+            <a:srgbClr val="6A57B8"/>
+          </a:solidFill>
+          <a:ln w="12700">
+            <a:solidFill>
+              <a:srgbClr val="6A57B8"/>
+            </a:solidFill>
+            <a:prstDash val="solid"/>
+          </a:ln>
+        </p:spPr>
+      </p:sp>
+      <p:sp>
+        <p:nvSpPr>
+          <p:cNvPr id="4" name="Text 2"/>
+          <p:cNvSpPr txBox="1"/>
+          <p:nvPr/>
+        </p:nvSpPr>
+        <p:spPr>
+          <a:xfrm>
+            <a:off x="548640" y="1097280"/>
+            <a:ext cx="2011680" cy="1097280"/>
+          </a:xfrm>
+          <a:prstGeom prst="rect">
+            <a:avLst/>
+          </a:prstGeom>
+          <a:noFill/>
+          <a:ln/>
+        </p:spPr>
+        <p:txBody>
+          <a:bodyPr wrap="square" lIns="0" tIns="0" rIns="0" bIns="0" rtlCol="0" anchor="ctr"/>
+          <a:lstStyle/>
+          <a:p>
+            <a:pPr algn="ctr" indent="0" marL="0">
+              <a:buNone/>
+            </a:pPr>
+            <a:r>
+              <a:rPr lang="en-US" sz="1500" b="1" dirty="0">
+                <a:solidFill>
+                  <a:srgbClr val="FFFFFF"/>
+                </a:solidFill>
+                <a:latin typeface="Calibri" pitchFamily="34" charset="0"/>
+                <a:ea typeface="Calibri" pitchFamily="34" charset="-122"/>
+                <a:cs typeface="Calibri" pitchFamily="34" charset="-120"/>
+              </a:rPr>
+              <a:t>PWA client</a:t>
+            </a:r>
+            <a:endParaRPr lang="en-US" sz="1500" dirty="0"/>
+          </a:p>
+          <a:p>
+            <a:pPr algn="ctr" indent="0" marL="0">
+              <a:buNone/>
+            </a:pPr>
+            <a:r>
+              <a:rPr lang="en-US" sz="1200" dirty="0">
+                <a:solidFill>
+                  <a:srgbClr val="FFFFFF"/>
+                </a:solidFill>
+                <a:latin typeface="Calibri" pitchFamily="34" charset="0"/>
+                <a:ea typeface="Calibri" pitchFamily="34" charset="-122"/>
+                <a:cs typeface="Calibri" pitchFamily="34" charset="-120"/>
+              </a:rPr>
+              <a:t>React + Vite, service worker, offline queue</a:t>
+            </a:r>
+            <a:endParaRPr lang="en-US" sz="1500" dirty="0"/>
+          </a:p>
+        </p:txBody>
+      </p:sp>
+      <p:sp>
+        <p:nvSpPr>
+          <p:cNvPr id="5" name="Shape 3"/>
+          <p:cNvSpPr/>
+          <p:nvPr/>
+        </p:nvSpPr>
+        <p:spPr>
+          <a:xfrm>
+            <a:off x="3474720" y="1097280"/>
+            <a:ext cx="2194560" cy="1097280"/>
+          </a:xfrm>
+          <a:prstGeom prst="roundRect">
+            <a:avLst>
+              <a:gd name="adj" fmla="val 8333"/>
+            </a:avLst>
+          </a:prstGeom>
+          <a:solidFill>
+            <a:srgbClr val="2E2457"/>
+          </a:solidFill>
+          <a:ln w="12700">
+            <a:solidFill>
+              <a:srgbClr val="2E2457"/>
+            </a:solidFill>
+            <a:prstDash val="solid"/>
+          </a:ln>
+        </p:spPr>
+      </p:sp>
+      <p:sp>
+        <p:nvSpPr>
+          <p:cNvPr id="6" name="Text 4"/>
+          <p:cNvSpPr txBox="1"/>
+          <p:nvPr/>
+        </p:nvSpPr>
+        <p:spPr>
+          <a:xfrm>
+            <a:off x="3566160" y="1097280"/>
+            <a:ext cx="2011680" cy="1097280"/>
+          </a:xfrm>
+          <a:prstGeom prst="rect">
+            <a:avLst/>
+          </a:prstGeom>
+          <a:noFill/>
+          <a:ln/>
+        </p:spPr>
+        <p:txBody>
+          <a:bodyPr wrap="square" lIns="0" tIns="0" rIns="0" bIns="0" rtlCol="0" anchor="ctr"/>
+          <a:lstStyle/>
+          <a:p>
+            <a:pPr algn="ctr" indent="0" marL="0">
+              <a:buNone/>
+            </a:pPr>
+            <a:r>
+              <a:rPr lang="en-US" sz="1500" b="1" dirty="0">
+                <a:solidFill>
+                  <a:srgbClr val="FFFFFF"/>
+                </a:solidFill>
+                <a:latin typeface="Calibri" pitchFamily="34" charset="0"/>
+                <a:ea typeface="Calibri" pitchFamily="34" charset="-122"/>
+                <a:cs typeface="Calibri" pitchFamily="34" charset="-120"/>
+              </a:rPr>
+              <a:t>API server</a:t>
+            </a:r>
+            <a:endParaRPr lang="en-US" sz="1500" dirty="0"/>
+          </a:p>
+          <a:p>
+            <a:pPr algn="ctr" indent="0" marL="0">
+              <a:buNone/>
+            </a:pPr>
+            <a:r>
+              <a:rPr lang="en-US" sz="1200" dirty="0">
+                <a:solidFill>
+                  <a:srgbClr val="FFFFFF"/>
+                </a:solidFill>
+                <a:latin typeface="Calibri" pitchFamily="34" charset="0"/>
+                <a:ea typeface="Calibri" pitchFamily="34" charset="-122"/>
+                <a:cs typeface="Calibri" pitchFamily="34" charset="-120"/>
+              </a:rPr>
+              <a:t>Node + Express, rate limits, validation</a:t>
+            </a:r>
+            <a:endParaRPr lang="en-US" sz="1500" dirty="0"/>
+          </a:p>
+        </p:txBody>
+      </p:sp>
+      <p:sp>
+        <p:nvSpPr>
+          <p:cNvPr id="7" name="Shape 5"/>
+          <p:cNvSpPr/>
+          <p:nvPr/>
+        </p:nvSpPr>
+        <p:spPr>
+          <a:xfrm>
+            <a:off x="6492240" y="1097280"/>
+            <a:ext cx="2194560" cy="1097280"/>
+          </a:xfrm>
+          <a:prstGeom prst="roundRect">
+            <a:avLst>
+              <a:gd name="adj" fmla="val 8333"/>
+            </a:avLst>
+          </a:prstGeom>
+          <a:solidFill>
+            <a:srgbClr val="6A57B8"/>
+          </a:solidFill>
+          <a:ln w="12700">
+            <a:solidFill>
+              <a:srgbClr val="6A57B8"/>
+            </a:solidFill>
+            <a:prstDash val="solid"/>
+          </a:ln>
+        </p:spPr>
+      </p:sp>
+      <p:sp>
+        <p:nvSpPr>
+          <p:cNvPr id="8" name="Text 6"/>
+          <p:cNvSpPr txBox="1"/>
+          <p:nvPr/>
+        </p:nvSpPr>
+        <p:spPr>
+          <a:xfrm>
+            <a:off x="6583680" y="1097280"/>
+            <a:ext cx="2011680" cy="1097280"/>
+          </a:xfrm>
+          <a:prstGeom prst="rect">
+            <a:avLst/>
+          </a:prstGeom>
+          <a:noFill/>
+          <a:ln/>
+        </p:spPr>
+        <p:txBody>
+          <a:bodyPr wrap="square" lIns="0" tIns="0" rIns="0" bIns="0" rtlCol="0" anchor="ctr"/>
+          <a:lstStyle/>
+          <a:p>
+            <a:pPr algn="ctr" indent="0" marL="0">
+              <a:buNone/>
+            </a:pPr>
+            <a:r>
+              <a:rPr lang="en-US" sz="1500" b="1" dirty="0">
+                <a:solidFill>
+                  <a:srgbClr val="FFFFFF"/>
+                </a:solidFill>
+                <a:latin typeface="Calibri" pitchFamily="34" charset="0"/>
+                <a:ea typeface="Calibri" pitchFamily="34" charset="-122"/>
+                <a:cs typeface="Calibri" pitchFamily="34" charset="-120"/>
+              </a:rPr>
+              <a:t>Database</a:t>
+            </a:r>
+            <a:endParaRPr lang="en-US" sz="1500" dirty="0"/>
+          </a:p>
+          <a:p>
+            <a:pPr algn="ctr" indent="0" marL="0">
+              <a:buNone/>
+            </a:pPr>
+            <a:r>
+              <a:rPr lang="en-US" sz="1200" dirty="0">
+                <a:solidFill>
+                  <a:srgbClr val="FFFFFF"/>
+                </a:solidFill>
+                <a:latin typeface="Calibri" pitchFamily="34" charset="0"/>
+                <a:ea typeface="Calibri" pitchFamily="34" charset="-122"/>
+                <a:cs typeface="Calibri" pitchFamily="34" charset="-120"/>
+              </a:rPr>
+              <a:t>SQLite / libSQL (Turso-ready)</a:t>
+            </a:r>
+            <a:endParaRPr lang="en-US" sz="1500" dirty="0"/>
+          </a:p>
+        </p:txBody>
+      </p:sp>
+      <p:sp>
+        <p:nvSpPr>
+          <p:cNvPr id="9" name="Shape 7"/>
+          <p:cNvSpPr/>
+          <p:nvPr/>
+        </p:nvSpPr>
+        <p:spPr>
+          <a:xfrm>
+            <a:off x="457200" y="2468880"/>
+            <a:ext cx="2194560" cy="914400"/>
+          </a:xfrm>
+          <a:prstGeom prst="roundRect">
+            <a:avLst>
+              <a:gd name="adj" fmla="val 10000"/>
             </a:avLst>
           </a:prstGeom>
           <a:solidFill>
@@ -1963,14 +2585,14 @@
       </p:sp>
       <p:sp>
         <p:nvSpPr>
-          <p:cNvPr id="4" name="Text 2"/>
-          <p:cNvSpPr txBox="1"/>
-          <p:nvPr/>
-        </p:nvSpPr>
-        <p:spPr>
-          <a:xfrm>
-            <a:off x="640080" y="1325880"/>
-            <a:ext cx="3657600" cy="365760"/>
+          <p:cNvPr id="10" name="Text 8"/>
+          <p:cNvSpPr txBox="1"/>
+          <p:nvPr/>
+        </p:nvSpPr>
+        <p:spPr>
+          <a:xfrm>
+            <a:off x="548640" y="2468880"/>
+            <a:ext cx="2011680" cy="914400"/>
           </a:xfrm>
           <a:prstGeom prst="rect">
             <a:avLst/>
@@ -1982,50 +2604,11 @@
           <a:bodyPr wrap="square" lIns="0" tIns="0" rIns="0" bIns="0" rtlCol="0" anchor="ctr"/>
           <a:lstStyle/>
           <a:p>
-            <a:pPr indent="0" marL="0">
-              <a:buNone/>
-            </a:pPr>
-            <a:r>
-              <a:rPr lang="en-US" sz="1800" b="1" dirty="0">
-                <a:solidFill>
-                  <a:srgbClr val="6A57B8"/>
-                </a:solidFill>
-                <a:latin typeface="Cambria" pitchFamily="34" charset="0"/>
-                <a:ea typeface="Cambria" pitchFamily="34" charset="-122"/>
-                <a:cs typeface="Cambria" pitchFamily="34" charset="-120"/>
-              </a:rPr>
-              <a:t>Access</a:t>
-            </a:r>
-            <a:endParaRPr lang="en-US" sz="1800" dirty="0"/>
-          </a:p>
-        </p:txBody>
-      </p:sp>
-      <p:sp>
-        <p:nvSpPr>
-          <p:cNvPr id="5" name="Text 3"/>
-          <p:cNvSpPr txBox="1"/>
-          <p:nvPr/>
-        </p:nvSpPr>
-        <p:spPr>
-          <a:xfrm>
-            <a:off x="640080" y="1737360"/>
-            <a:ext cx="3657600" cy="2423160"/>
-          </a:xfrm>
-          <a:prstGeom prst="rect">
-            <a:avLst/>
-          </a:prstGeom>
-          <a:noFill/>
-          <a:ln/>
-        </p:spPr>
-        <p:txBody>
-          <a:bodyPr wrap="square" lIns="0" tIns="0" rIns="0" bIns="0" rtlCol="0" anchor="t"/>
-          <a:lstStyle/>
-          <a:p>
-            <a:pPr indent="0" marL="0">
-              <a:buNone/>
-            </a:pPr>
-            <a:r>
-              <a:rPr lang="en-US" sz="1400" dirty="0">
+            <a:pPr algn="ctr" indent="0" marL="0">
+              <a:buNone/>
+            </a:pPr>
+            <a:r>
+              <a:rPr lang="en-US" sz="1500" b="1" dirty="0">
                 <a:solidFill>
                   <a:srgbClr val="241F38"/>
                 </a:solidFill>
@@ -2033,16 +2616,16 @@
                 <a:ea typeface="Calibri" pitchFamily="34" charset="-122"/>
                 <a:cs typeface="Calibri" pitchFamily="34" charset="-120"/>
               </a:rPr>
-              <a:t>Live app: [DEPLOYED URL]</a:t>
-            </a:r>
-            <a:endParaRPr lang="en-US" sz="1400" dirty="0"/>
-          </a:p>
-          <a:p>
-            <a:pPr indent="0" marL="0">
-              <a:buNone/>
-            </a:pPr>
-            <a:r>
-              <a:rPr lang="en-US" sz="1400" dirty="0">
+              <a:t>Eskom + EskomSePush</a:t>
+            </a:r>
+            <a:endParaRPr lang="en-US" sz="1500" dirty="0"/>
+          </a:p>
+          <a:p>
+            <a:pPr algn="ctr" indent="0" marL="0">
+              <a:buNone/>
+            </a:pPr>
+            <a:r>
+              <a:rPr lang="en-US" sz="1200" dirty="0">
                 <a:solidFill>
                   <a:srgbClr val="241F38"/>
                 </a:solidFill>
@@ -2050,60 +2633,26 @@
                 <a:ea typeface="Calibri" pitchFamily="34" charset="-122"/>
                 <a:cs typeface="Calibri" pitchFamily="34" charset="-120"/>
               </a:rPr>
-              <a:t>No login needed, it is anonymous. Open on a phone and choose "Add to home screen".</a:t>
-            </a:r>
-            <a:endParaRPr lang="en-US" sz="1400" dirty="0"/>
-          </a:p>
-          <a:p>
-            <a:pPr indent="0" marL="0">
-              <a:buNone/>
-            </a:pPr>
-            <a:r>
-              <a:rPr lang="en-US" sz="1400" dirty="0">
-                <a:solidFill>
-                  <a:srgbClr val="241F38"/>
-                </a:solidFill>
-                <a:latin typeface="Calibri" pitchFamily="34" charset="0"/>
-                <a:ea typeface="Calibri" pitchFamily="34" charset="-122"/>
-                <a:cs typeface="Calibri" pitchFamily="34" charset="-120"/>
-              </a:rPr>
-              <a:t>Moderation page: [URL]/admin</a:t>
-            </a:r>
-            <a:endParaRPr lang="en-US" sz="1400" dirty="0"/>
-          </a:p>
-          <a:p>
-            <a:pPr indent="0" marL="0">
-              <a:buNone/>
-            </a:pPr>
-            <a:r>
-              <a:rPr lang="en-US" sz="1400" dirty="0">
-                <a:solidFill>
-                  <a:srgbClr val="241F38"/>
-                </a:solidFill>
-                <a:latin typeface="Calibri" pitchFamily="34" charset="0"/>
-                <a:ea typeface="Calibri" pitchFamily="34" charset="-122"/>
-                <a:cs typeface="Calibri" pitchFamily="34" charset="-120"/>
-              </a:rPr>
-              <a:t>Admin token: [DEMO ADMIN TOKEN]</a:t>
-            </a:r>
-            <a:endParaRPr lang="en-US" sz="1400" dirty="0"/>
-          </a:p>
-        </p:txBody>
-      </p:sp>
-      <p:sp>
-        <p:nvSpPr>
-          <p:cNvPr id="6" name="Shape 4"/>
+              <a:t>Stage and official slots</a:t>
+            </a:r>
+            <a:endParaRPr lang="en-US" sz="1500" dirty="0"/>
+          </a:p>
+        </p:txBody>
+      </p:sp>
+      <p:sp>
+        <p:nvSpPr>
+          <p:cNvPr id="11" name="Shape 9"/>
           <p:cNvSpPr/>
           <p:nvPr/>
         </p:nvSpPr>
         <p:spPr>
           <a:xfrm>
-            <a:off x="4663440" y="1188720"/>
-            <a:ext cx="4023360" cy="3108960"/>
+            <a:off x="3474720" y="2468880"/>
+            <a:ext cx="2194560" cy="914400"/>
           </a:xfrm>
           <a:prstGeom prst="roundRect">
             <a:avLst>
-              <a:gd name="adj" fmla="val 3529"/>
+              <a:gd name="adj" fmla="val 10000"/>
             </a:avLst>
           </a:prstGeom>
           <a:solidFill>
@@ -2119,13 +2668,179 @@
       </p:sp>
       <p:sp>
         <p:nvSpPr>
-          <p:cNvPr id="7" name="Text 5"/>
-          <p:cNvSpPr txBox="1"/>
-          <p:nvPr/>
-        </p:nvSpPr>
-        <p:spPr>
-          <a:xfrm>
-            <a:off x="4846320" y="1325880"/>
+          <p:cNvPr id="12" name="Text 10"/>
+          <p:cNvSpPr txBox="1"/>
+          <p:nvPr/>
+        </p:nvSpPr>
+        <p:spPr>
+          <a:xfrm>
+            <a:off x="3566160" y="2468880"/>
+            <a:ext cx="2011680" cy="914400"/>
+          </a:xfrm>
+          <a:prstGeom prst="rect">
+            <a:avLst/>
+          </a:prstGeom>
+          <a:noFill/>
+          <a:ln/>
+        </p:spPr>
+        <p:txBody>
+          <a:bodyPr wrap="square" lIns="0" tIns="0" rIns="0" bIns="0" rtlCol="0" anchor="ctr"/>
+          <a:lstStyle/>
+          <a:p>
+            <a:pPr algn="ctr" indent="0" marL="0">
+              <a:buNone/>
+            </a:pPr>
+            <a:r>
+              <a:rPr lang="en-US" sz="1500" b="1" dirty="0">
+                <a:solidFill>
+                  <a:srgbClr val="241F38"/>
+                </a:solidFill>
+                <a:latin typeface="Calibri" pitchFamily="34" charset="0"/>
+                <a:ea typeface="Calibri" pitchFamily="34" charset="-122"/>
+                <a:cs typeface="Calibri" pitchFamily="34" charset="-120"/>
+              </a:rPr>
+              <a:t>OpenStreetMap</a:t>
+            </a:r>
+            <a:endParaRPr lang="en-US" sz="1500" dirty="0"/>
+          </a:p>
+          <a:p>
+            <a:pPr algn="ctr" indent="0" marL="0">
+              <a:buNone/>
+            </a:pPr>
+            <a:r>
+              <a:rPr lang="en-US" sz="1200" dirty="0">
+                <a:solidFill>
+                  <a:srgbClr val="241F38"/>
+                </a:solidFill>
+                <a:latin typeface="Calibri" pitchFamily="34" charset="0"/>
+                <a:ea typeface="Calibri" pitchFamily="34" charset="-122"/>
+                <a:cs typeface="Calibri" pitchFamily="34" charset="-120"/>
+              </a:rPr>
+              <a:t>Shops, clinics, food banks</a:t>
+            </a:r>
+            <a:endParaRPr lang="en-US" sz="1500" dirty="0"/>
+          </a:p>
+        </p:txBody>
+      </p:sp>
+      <p:sp>
+        <p:nvSpPr>
+          <p:cNvPr id="13" name="Shape 11"/>
+          <p:cNvSpPr/>
+          <p:nvPr/>
+        </p:nvSpPr>
+        <p:spPr>
+          <a:xfrm>
+            <a:off x="6492240" y="2468880"/>
+            <a:ext cx="2194560" cy="914400"/>
+          </a:xfrm>
+          <a:prstGeom prst="roundRect">
+            <a:avLst>
+              <a:gd name="adj" fmla="val 10000"/>
+            </a:avLst>
+          </a:prstGeom>
+          <a:solidFill>
+            <a:srgbClr val="F4F1FC"/>
+          </a:solidFill>
+          <a:ln w="12700">
+            <a:solidFill>
+              <a:srgbClr val="F4F1FC"/>
+            </a:solidFill>
+            <a:prstDash val="solid"/>
+          </a:ln>
+        </p:spPr>
+      </p:sp>
+      <p:sp>
+        <p:nvSpPr>
+          <p:cNvPr id="14" name="Text 12"/>
+          <p:cNvSpPr txBox="1"/>
+          <p:nvPr/>
+        </p:nvSpPr>
+        <p:spPr>
+          <a:xfrm>
+            <a:off x="6583680" y="2468880"/>
+            <a:ext cx="2011680" cy="914400"/>
+          </a:xfrm>
+          <a:prstGeom prst="rect">
+            <a:avLst/>
+          </a:prstGeom>
+          <a:noFill/>
+          <a:ln/>
+        </p:spPr>
+        <p:txBody>
+          <a:bodyPr wrap="square" lIns="0" tIns="0" rIns="0" bIns="0" rtlCol="0" anchor="ctr"/>
+          <a:lstStyle/>
+          <a:p>
+            <a:pPr algn="ctr" indent="0" marL="0">
+              <a:buNone/>
+            </a:pPr>
+            <a:r>
+              <a:rPr lang="en-US" sz="1500" b="1" dirty="0">
+                <a:solidFill>
+                  <a:srgbClr val="241F38"/>
+                </a:solidFill>
+                <a:latin typeface="Calibri" pitchFamily="34" charset="0"/>
+                <a:ea typeface="Calibri" pitchFamily="34" charset="-122"/>
+                <a:cs typeface="Calibri" pitchFamily="34" charset="-120"/>
+              </a:rPr>
+              <a:t>Open-Meteo + NAMC</a:t>
+            </a:r>
+            <a:endParaRPr lang="en-US" sz="1500" dirty="0"/>
+          </a:p>
+          <a:p>
+            <a:pPr algn="ctr" indent="0" marL="0">
+              <a:buNone/>
+            </a:pPr>
+            <a:r>
+              <a:rPr lang="en-US" sz="1200" dirty="0">
+                <a:solidFill>
+                  <a:srgbClr val="241F38"/>
+                </a:solidFill>
+                <a:latin typeface="Calibri" pitchFamily="34" charset="0"/>
+                <a:ea typeface="Calibri" pitchFamily="34" charset="-122"/>
+                <a:cs typeface="Calibri" pitchFamily="34" charset="-120"/>
+              </a:rPr>
+              <a:t>Weather, food prices</a:t>
+            </a:r>
+            <a:endParaRPr lang="en-US" sz="1500" dirty="0"/>
+          </a:p>
+        </p:txBody>
+      </p:sp>
+      <p:sp>
+        <p:nvSpPr>
+          <p:cNvPr id="15" name="Shape 13"/>
+          <p:cNvSpPr/>
+          <p:nvPr/>
+        </p:nvSpPr>
+        <p:spPr>
+          <a:xfrm>
+            <a:off x="457200" y="3611880"/>
+            <a:ext cx="4023360" cy="1051560"/>
+          </a:xfrm>
+          <a:prstGeom prst="roundRect">
+            <a:avLst>
+              <a:gd name="adj" fmla="val 10435"/>
+            </a:avLst>
+          </a:prstGeom>
+          <a:solidFill>
+            <a:srgbClr val="F4F1FC"/>
+          </a:solidFill>
+          <a:ln w="12700">
+            <a:solidFill>
+              <a:srgbClr val="F4F1FC"/>
+            </a:solidFill>
+            <a:prstDash val="solid"/>
+          </a:ln>
+        </p:spPr>
+      </p:sp>
+      <p:sp>
+        <p:nvSpPr>
+          <p:cNvPr id="16" name="Text 14"/>
+          <p:cNvSpPr txBox="1"/>
+          <p:nvPr/>
+        </p:nvSpPr>
+        <p:spPr>
+          <a:xfrm>
+            <a:off x="640080" y="3749040"/>
             <a:ext cx="3657600" cy="365760"/>
           </a:xfrm>
           <a:prstGeom prst="rect">
@@ -2150,7 +2865,7 @@
                 <a:ea typeface="Cambria" pitchFamily="34" charset="-122"/>
                 <a:cs typeface="Cambria" pitchFamily="34" charset="-120"/>
               </a:rPr>
-              <a:t>Suggested path</a:t>
+              <a:t>Privacy</a:t>
             </a:r>
             <a:endParaRPr lang="en-US" sz="1800" dirty="0"/>
           </a:p>
@@ -2158,14 +2873,14 @@
       </p:sp>
       <p:sp>
         <p:nvSpPr>
-          <p:cNvPr id="8" name="Text 6"/>
-          <p:cNvSpPr txBox="1"/>
-          <p:nvPr/>
-        </p:nvSpPr>
-        <p:spPr>
-          <a:xfrm>
-            <a:off x="4846320" y="1737360"/>
-            <a:ext cx="3657600" cy="2423160"/>
+          <p:cNvPr id="17" name="Text 15"/>
+          <p:cNvSpPr txBox="1"/>
+          <p:nvPr/>
+        </p:nvSpPr>
+        <p:spPr>
+          <a:xfrm>
+            <a:off x="640080" y="4160520"/>
+            <a:ext cx="3657600" cy="365760"/>
           </a:xfrm>
           <a:prstGeom prst="rect">
             <a:avLst/>
@@ -2189,10 +2904,98 @@
                 <a:ea typeface="Calibri" pitchFamily="34" charset="-122"/>
                 <a:cs typeface="Calibri" pitchFamily="34" charset="-120"/>
               </a:rPr>
-              <a:t>1. Today tab: Alexandra has a Verified outage.</a:t>
+              <a:t>Anonymous device id. No accounts. Medical plan and household data stay on the phone.</a:t>
             </a:r>
             <a:endParaRPr lang="en-US" sz="1400" dirty="0"/>
           </a:p>
+        </p:txBody>
+      </p:sp>
+      <p:sp>
+        <p:nvSpPr>
+          <p:cNvPr id="18" name="Shape 16"/>
+          <p:cNvSpPr/>
+          <p:nvPr/>
+        </p:nvSpPr>
+        <p:spPr>
+          <a:xfrm>
+            <a:off x="4663440" y="3611880"/>
+            <a:ext cx="4023360" cy="1051560"/>
+          </a:xfrm>
+          <a:prstGeom prst="roundRect">
+            <a:avLst>
+              <a:gd name="adj" fmla="val 10435"/>
+            </a:avLst>
+          </a:prstGeom>
+          <a:solidFill>
+            <a:srgbClr val="F4F1FC"/>
+          </a:solidFill>
+          <a:ln w="12700">
+            <a:solidFill>
+              <a:srgbClr val="F4F1FC"/>
+            </a:solidFill>
+            <a:prstDash val="solid"/>
+          </a:ln>
+        </p:spPr>
+      </p:sp>
+      <p:sp>
+        <p:nvSpPr>
+          <p:cNvPr id="19" name="Text 17"/>
+          <p:cNvSpPr txBox="1"/>
+          <p:nvPr/>
+        </p:nvSpPr>
+        <p:spPr>
+          <a:xfrm>
+            <a:off x="4846320" y="3749040"/>
+            <a:ext cx="3657600" cy="365760"/>
+          </a:xfrm>
+          <a:prstGeom prst="rect">
+            <a:avLst/>
+          </a:prstGeom>
+          <a:noFill/>
+          <a:ln/>
+        </p:spPr>
+        <p:txBody>
+          <a:bodyPr wrap="square" lIns="0" tIns="0" rIns="0" bIns="0" rtlCol="0" anchor="ctr"/>
+          <a:lstStyle/>
+          <a:p>
+            <a:pPr indent="0" marL="0">
+              <a:buNone/>
+            </a:pPr>
+            <a:r>
+              <a:rPr lang="en-US" sz="1800" b="1" dirty="0">
+                <a:solidFill>
+                  <a:srgbClr val="6A57B8"/>
+                </a:solidFill>
+                <a:latin typeface="Cambria" pitchFamily="34" charset="0"/>
+                <a:ea typeface="Cambria" pitchFamily="34" charset="-122"/>
+                <a:cs typeface="Cambria" pitchFamily="34" charset="-120"/>
+              </a:rPr>
+              <a:t>Safety</a:t>
+            </a:r>
+            <a:endParaRPr lang="en-US" sz="1800" dirty="0"/>
+          </a:p>
+        </p:txBody>
+      </p:sp>
+      <p:sp>
+        <p:nvSpPr>
+          <p:cNvPr id="20" name="Text 18"/>
+          <p:cNvSpPr txBox="1"/>
+          <p:nvPr/>
+        </p:nvSpPr>
+        <p:spPr>
+          <a:xfrm>
+            <a:off x="4846320" y="4160520"/>
+            <a:ext cx="3657600" cy="365760"/>
+          </a:xfrm>
+          <a:prstGeom prst="rect">
+            <a:avLst/>
+          </a:prstGeom>
+          <a:noFill/>
+          <a:ln/>
+        </p:spPr>
+        <p:txBody>
+          <a:bodyPr wrap="square" lIns="0" tIns="0" rIns="0" bIns="0" rtlCol="0" anchor="t"/>
+          <a:lstStyle/>
           <a:p>
             <a:pPr indent="0" marL="0">
               <a:buNone/>
@@ -2206,81 +3009,1877 @@
                 <a:ea typeface="Calibri" pitchFamily="34" charset="-122"/>
                 <a:cs typeface="Calibri" pitchFamily="34" charset="-120"/>
               </a:rPr>
-              <a:t>2. Tap "It is back on for me".</a:t>
+              <a:t>Input limits, no links or phone numbers, rate limits, 3 flags auto-hide, token-protected admin.</a:t>
             </a:r>
             <a:endParaRPr lang="en-US" sz="1400" dirty="0"/>
           </a:p>
+        </p:txBody>
+      </p:sp>
+    </p:spTree>
+  </p:cSld>
+  <p:clrMapOvr>
+    <a:masterClrMapping/>
+  </p:clrMapOvr>
+</p:sld>
+</file>
+
+<file path=ppt/slides/slide11.xml><?xml version="1.0" encoding="utf-8"?>
+<p:sld xmlns:a="http://schemas.openxmlformats.org/drawingml/2006/main" xmlns:r="http://schemas.openxmlformats.org/officeDocument/2006/relationships" xmlns:p="http://schemas.openxmlformats.org/presentationml/2006/main">
+  <p:cSld name="Slide 11">
+    <p:bg>
+      <p:bgPr>
+        <a:solidFill>
+          <a:srgbClr val="2E2457"/>
+        </a:solidFill>
+      </p:bgPr>
+    </p:bg>
+    <p:spTree>
+      <p:nvGrpSpPr>
+        <p:cNvPr id="1" name=""/>
+        <p:cNvGrpSpPr/>
+        <p:nvPr/>
+      </p:nvGrpSpPr>
+      <p:grpSpPr>
+        <a:xfrm>
+          <a:off x="0" y="0"/>
+          <a:ext cx="0" cy="0"/>
+          <a:chOff x="0" y="0"/>
+          <a:chExt cx="0" cy="0"/>
+        </a:xfrm>
+      </p:grpSpPr>
+      <p:sp>
+        <p:nvSpPr>
+          <p:cNvPr id="2" name="Text 0"/>
+          <p:cNvSpPr txBox="1"/>
+          <p:nvPr/>
+        </p:nvSpPr>
+        <p:spPr>
+          <a:xfrm>
+            <a:off x="457200" y="274320"/>
+            <a:ext cx="8229600" cy="640080"/>
+          </a:xfrm>
+          <a:prstGeom prst="rect">
+            <a:avLst/>
+          </a:prstGeom>
+          <a:noFill/>
+          <a:ln/>
+        </p:spPr>
+        <p:txBody>
+          <a:bodyPr wrap="square" lIns="0" tIns="0" rIns="0" bIns="0" rtlCol="0" anchor="ctr"/>
+          <a:lstStyle/>
           <a:p>
             <a:pPr indent="0" marL="0">
               <a:buNone/>
             </a:pPr>
             <a:r>
-              <a:rPr lang="en-US" sz="1400" dirty="0">
-                <a:solidFill>
-                  <a:srgbClr val="241F38"/>
+              <a:rPr lang="en-US" sz="3000" b="1" dirty="0">
+                <a:solidFill>
+                  <a:srgbClr val="FFFFFF"/>
+                </a:solidFill>
+                <a:latin typeface="Cambria" pitchFamily="34" charset="0"/>
+                <a:ea typeface="Cambria" pitchFamily="34" charset="-122"/>
+                <a:cs typeface="Cambria" pitchFamily="34" charset="-120"/>
+              </a:rPr>
+              <a:t>Who pays, and why</a:t>
+            </a:r>
+            <a:endParaRPr lang="en-US" sz="3000" dirty="0"/>
+          </a:p>
+        </p:txBody>
+      </p:sp>
+      <p:sp>
+        <p:nvSpPr>
+          <p:cNvPr id="3" name="Text 1"/>
+          <p:cNvSpPr txBox="1"/>
+          <p:nvPr/>
+        </p:nvSpPr>
+        <p:spPr>
+          <a:xfrm>
+            <a:off x="457200" y="1097280"/>
+            <a:ext cx="5303520" cy="3291840"/>
+          </a:xfrm>
+          <a:prstGeom prst="rect">
+            <a:avLst/>
+          </a:prstGeom>
+          <a:noFill/>
+          <a:ln/>
+        </p:spPr>
+        <p:txBody>
+          <a:bodyPr wrap="square" lIns="0" tIns="0" rIns="0" bIns="0" rtlCol="0" anchor="t"/>
+          <a:lstStyle/>
+          <a:p>
+            <a:pPr marL="342900" indent="-342900">
+              <a:spcAft>
+                <a:spcPts val="800"/>
+              </a:spcAft>
+              <a:buSzPct val="100000"/>
+              <a:buChar char="•"/>
+            </a:pPr>
+            <a:r>
+              <a:rPr lang="en-US" sz="1500" dirty="0">
+                <a:solidFill>
+                  <a:srgbClr val="FFFFFF"/>
                 </a:solidFill>
                 <a:latin typeface="Calibri" pitchFamily="34" charset="0"/>
                 <a:ea typeface="Calibri" pitchFamily="34" charset="-122"/>
                 <a:cs typeface="Calibri" pitchFamily="34" charset="-120"/>
               </a:rPr>
-              <a:t>3. Alerts: file a report.</a:t>
-            </a:r>
-            <a:endParaRPr lang="en-US" sz="1400" dirty="0"/>
-          </a:p>
-          <a:p>
-            <a:pPr indent="0" marL="0">
-              <a:buNone/>
-            </a:pPr>
-            <a:r>
-              <a:rPr lang="en-US" sz="1400" dirty="0">
-                <a:solidFill>
-                  <a:srgbClr val="241F38"/>
+              <a:t>Carer jobs: a commission on each booking (rate to be agreed with partners)</a:t>
+            </a:r>
+            <a:endParaRPr lang="en-US" sz="1500" dirty="0"/>
+          </a:p>
+          <a:p>
+            <a:pPr marL="342900" indent="-342900">
+              <a:spcAft>
+                <a:spcPts val="800"/>
+              </a:spcAft>
+              <a:buSzPct val="100000"/>
+              <a:buChar char="•"/>
+            </a:pPr>
+            <a:r>
+              <a:rPr lang="en-US" sz="1500" dirty="0">
+                <a:solidFill>
+                  <a:srgbClr val="FFFFFF"/>
                 </a:solidFill>
                 <a:latin typeface="Calibri" pitchFamily="34" charset="0"/>
                 <a:ea typeface="Calibri" pitchFamily="34" charset="-122"/>
                 <a:cs typeface="Calibri" pitchFamily="34" charset="-120"/>
               </a:rPr>
-              <a:t>4. Share: post an offer.</a:t>
-            </a:r>
-            <a:endParaRPr lang="en-US" sz="1400" dirty="0"/>
-          </a:p>
-          <a:p>
-            <a:pPr indent="0" marL="0">
-              <a:buNone/>
-            </a:pPr>
-            <a:r>
-              <a:rPr lang="en-US" sz="1400" dirty="0">
-                <a:solidFill>
-                  <a:srgbClr val="241F38"/>
+              <a:t>Equipment partners: delivery and rental fees from licensed suppliers</a:t>
+            </a:r>
+            <a:endParaRPr lang="en-US" sz="1500" dirty="0"/>
+          </a:p>
+          <a:p>
+            <a:pPr marL="342900" indent="-342900">
+              <a:spcAft>
+                <a:spcPts val="800"/>
+              </a:spcAft>
+              <a:buSzPct val="100000"/>
+              <a:buChar char="•"/>
+            </a:pPr>
+            <a:r>
+              <a:rPr lang="en-US" sz="1500" dirty="0">
+                <a:solidFill>
+                  <a:srgbClr val="FFFFFF"/>
                 </a:solidFill>
                 <a:latin typeface="Calibri" pitchFamily="34" charset="0"/>
                 <a:ea typeface="Calibri" pitchFamily="34" charset="-122"/>
                 <a:cs typeface="Calibri" pitchFamily="34" charset="-120"/>
               </a:rPr>
-              <a:t>5. Nearby: add a food price.</a:t>
-            </a:r>
-            <a:endParaRPr lang="en-US" sz="1400" dirty="0"/>
-          </a:p>
-          <a:p>
-            <a:pPr indent="0" marL="0">
-              <a:buNone/>
-            </a:pPr>
-            <a:endParaRPr lang="en-US" sz="1400" dirty="0"/>
-          </a:p>
-          <a:p>
-            <a:pPr indent="0" marL="0">
-              <a:buNone/>
-            </a:pPr>
-            <a:r>
-              <a:rPr lang="en-US" sz="1400" dirty="0">
-                <a:solidFill>
-                  <a:srgbClr val="241F38"/>
+              <a:t>Small business Pro: outage alerts and the loss planner (about R29 a month, to test)</a:t>
+            </a:r>
+            <a:endParaRPr lang="en-US" sz="1500" dirty="0"/>
+          </a:p>
+          <a:p>
+            <a:pPr marL="342900" indent="-342900">
+              <a:spcAft>
+                <a:spcPts val="800"/>
+              </a:spcAft>
+              <a:buSzPct val="100000"/>
+              <a:buChar char="•"/>
+            </a:pPr>
+            <a:r>
+              <a:rPr lang="en-US" sz="1500" dirty="0">
+                <a:solidFill>
+                  <a:srgbClr val="FFFFFF"/>
                 </a:solidFill>
                 <a:latin typeface="Calibri" pitchFamily="34" charset="0"/>
                 <a:ea typeface="Calibri" pitchFamily="34" charset="-122"/>
                 <a:cs typeface="Calibri" pitchFamily="34" charset="-120"/>
               </a:rPr>
-              <a:t>Demo video (90 s): [VIDEO LINK]</a:t>
+              <a:t>Banks and insurers: sponsored resilience content, outage savings and cover</a:t>
+            </a:r>
+            <a:endParaRPr lang="en-US" sz="1500" dirty="0"/>
+          </a:p>
+          <a:p>
+            <a:pPr marL="342900" indent="-342900">
+              <a:spcAft>
+                <a:spcPts val="800"/>
+              </a:spcAft>
+              <a:buSzPct val="100000"/>
+              <a:buChar char="•"/>
+            </a:pPr>
+            <a:r>
+              <a:rPr lang="en-US" sz="1500" dirty="0">
+                <a:solidFill>
+                  <a:srgbClr val="FFFFFF"/>
+                </a:solidFill>
+                <a:latin typeface="Calibri" pitchFamily="34" charset="0"/>
+                <a:ea typeface="Calibri" pitchFamily="34" charset="-122"/>
+                <a:cs typeface="Calibri" pitchFamily="34" charset="-120"/>
+              </a:rPr>
+              <a:t>Municipalities and utilities: verified suburb-level outage data and a dashboard</a:t>
+            </a:r>
+            <a:endParaRPr lang="en-US" sz="1500" dirty="0"/>
+          </a:p>
+        </p:txBody>
+      </p:sp>
+      <p:sp>
+        <p:nvSpPr>
+          <p:cNvPr id="4" name="Text 2"/>
+          <p:cNvSpPr txBox="1"/>
+          <p:nvPr/>
+        </p:nvSpPr>
+        <p:spPr>
+          <a:xfrm>
+            <a:off x="6217920" y="1097280"/>
+            <a:ext cx="2560320" cy="685800"/>
+          </a:xfrm>
+          <a:prstGeom prst="rect">
+            <a:avLst/>
+          </a:prstGeom>
+          <a:noFill/>
+          <a:ln/>
+        </p:spPr>
+        <p:txBody>
+          <a:bodyPr wrap="square" lIns="0" tIns="0" rIns="0" bIns="0" rtlCol="0" anchor="ctr"/>
+          <a:lstStyle/>
+          <a:p>
+            <a:pPr indent="0" marL="0">
+              <a:buNone/>
+            </a:pPr>
+            <a:r>
+              <a:rPr lang="en-US" sz="4400" b="1" dirty="0">
+                <a:solidFill>
+                  <a:srgbClr val="9FD3F0"/>
+                </a:solidFill>
+                <a:latin typeface="Cambria" pitchFamily="34" charset="0"/>
+                <a:ea typeface="Cambria" pitchFamily="34" charset="-122"/>
+                <a:cs typeface="Cambria" pitchFamily="34" charset="-120"/>
+              </a:rPr>
+              <a:t>R0</a:t>
+            </a:r>
+            <a:endParaRPr lang="en-US" sz="4400" dirty="0"/>
+          </a:p>
+        </p:txBody>
+      </p:sp>
+      <p:sp>
+        <p:nvSpPr>
+          <p:cNvPr id="5" name="Text 3"/>
+          <p:cNvSpPr txBox="1"/>
+          <p:nvPr/>
+        </p:nvSpPr>
+        <p:spPr>
+          <a:xfrm>
+            <a:off x="6217920" y="1783080"/>
+            <a:ext cx="2560320" cy="274320"/>
+          </a:xfrm>
+          <a:prstGeom prst="rect">
+            <a:avLst/>
+          </a:prstGeom>
+          <a:noFill/>
+          <a:ln/>
+        </p:spPr>
+        <p:txBody>
+          <a:bodyPr wrap="square" lIns="0" tIns="0" rIns="0" bIns="0" rtlCol="0" anchor="ctr"/>
+          <a:lstStyle/>
+          <a:p>
+            <a:pPr indent="0" marL="0">
+              <a:buNone/>
+            </a:pPr>
+            <a:r>
+              <a:rPr lang="en-US" sz="1400" dirty="0">
+                <a:solidFill>
+                  <a:srgbClr val="DDD4F6"/>
+                </a:solidFill>
+                <a:latin typeface="Calibri" pitchFamily="34" charset="0"/>
+                <a:ea typeface="Calibri" pitchFamily="34" charset="-122"/>
+                <a:cs typeface="Calibri" pitchFamily="34" charset="-120"/>
+              </a:rPr>
+              <a:t>for residents, always</a:t>
+            </a:r>
+            <a:endParaRPr lang="en-US" sz="1400" dirty="0"/>
+          </a:p>
+        </p:txBody>
+      </p:sp>
+      <p:sp>
+        <p:nvSpPr>
+          <p:cNvPr id="6" name="Text 4"/>
+          <p:cNvSpPr txBox="1"/>
+          <p:nvPr/>
+        </p:nvSpPr>
+        <p:spPr>
+          <a:xfrm>
+            <a:off x="6217920" y="2286000"/>
+            <a:ext cx="2560320" cy="685800"/>
+          </a:xfrm>
+          <a:prstGeom prst="rect">
+            <a:avLst/>
+          </a:prstGeom>
+          <a:noFill/>
+          <a:ln/>
+        </p:spPr>
+        <p:txBody>
+          <a:bodyPr wrap="square" lIns="0" tIns="0" rIns="0" bIns="0" rtlCol="0" anchor="ctr"/>
+          <a:lstStyle/>
+          <a:p>
+            <a:pPr indent="0" marL="0">
+              <a:buNone/>
+            </a:pPr>
+            <a:r>
+              <a:rPr lang="en-US" sz="4400" b="1" dirty="0">
+                <a:solidFill>
+                  <a:srgbClr val="9FD3F0"/>
+                </a:solidFill>
+                <a:latin typeface="Cambria" pitchFamily="34" charset="0"/>
+                <a:ea typeface="Cambria" pitchFamily="34" charset="-122"/>
+                <a:cs typeface="Cambria" pitchFamily="34" charset="-120"/>
+              </a:rPr>
+              <a:t>3+</a:t>
+            </a:r>
+            <a:endParaRPr lang="en-US" sz="4400" dirty="0"/>
+          </a:p>
+        </p:txBody>
+      </p:sp>
+      <p:sp>
+        <p:nvSpPr>
+          <p:cNvPr id="7" name="Text 5"/>
+          <p:cNvSpPr txBox="1"/>
+          <p:nvPr/>
+        </p:nvSpPr>
+        <p:spPr>
+          <a:xfrm>
+            <a:off x="6217920" y="2971800"/>
+            <a:ext cx="2560320" cy="274320"/>
+          </a:xfrm>
+          <a:prstGeom prst="rect">
+            <a:avLst/>
+          </a:prstGeom>
+          <a:noFill/>
+          <a:ln/>
+        </p:spPr>
+        <p:txBody>
+          <a:bodyPr wrap="square" lIns="0" tIns="0" rIns="0" bIns="0" rtlCol="0" anchor="ctr"/>
+          <a:lstStyle/>
+          <a:p>
+            <a:pPr indent="0" marL="0">
+              <a:buNone/>
+            </a:pPr>
+            <a:r>
+              <a:rPr lang="en-US" sz="1400" dirty="0">
+                <a:solidFill>
+                  <a:srgbClr val="DDD4F6"/>
+                </a:solidFill>
+                <a:latin typeface="Calibri" pitchFamily="34" charset="0"/>
+                <a:ea typeface="Calibri" pitchFamily="34" charset="-122"/>
+                <a:cs typeface="Calibri" pitchFamily="34" charset="-120"/>
+              </a:rPr>
+              <a:t>devices verify an outage</a:t>
+            </a:r>
+            <a:endParaRPr lang="en-US" sz="1400" dirty="0"/>
+          </a:p>
+        </p:txBody>
+      </p:sp>
+      <p:sp>
+        <p:nvSpPr>
+          <p:cNvPr id="8" name="Text 6"/>
+          <p:cNvSpPr txBox="1"/>
+          <p:nvPr/>
+        </p:nvSpPr>
+        <p:spPr>
+          <a:xfrm>
+            <a:off x="6217920" y="3474720"/>
+            <a:ext cx="2560320" cy="685800"/>
+          </a:xfrm>
+          <a:prstGeom prst="rect">
+            <a:avLst/>
+          </a:prstGeom>
+          <a:noFill/>
+          <a:ln/>
+        </p:spPr>
+        <p:txBody>
+          <a:bodyPr wrap="square" lIns="0" tIns="0" rIns="0" bIns="0" rtlCol="0" anchor="ctr"/>
+          <a:lstStyle/>
+          <a:p>
+            <a:pPr indent="0" marL="0">
+              <a:buNone/>
+            </a:pPr>
+            <a:r>
+              <a:rPr lang="en-US" sz="4400" b="1" dirty="0">
+                <a:solidFill>
+                  <a:srgbClr val="9FD3F0"/>
+                </a:solidFill>
+                <a:latin typeface="Cambria" pitchFamily="34" charset="0"/>
+                <a:ea typeface="Cambria" pitchFamily="34" charset="-122"/>
+                <a:cs typeface="Cambria" pitchFamily="34" charset="-120"/>
+              </a:rPr>
+              <a:t>4</a:t>
+            </a:r>
+            <a:endParaRPr lang="en-US" sz="4400" dirty="0"/>
+          </a:p>
+        </p:txBody>
+      </p:sp>
+      <p:sp>
+        <p:nvSpPr>
+          <p:cNvPr id="9" name="Text 7"/>
+          <p:cNvSpPr txBox="1"/>
+          <p:nvPr/>
+        </p:nvSpPr>
+        <p:spPr>
+          <a:xfrm>
+            <a:off x="6217920" y="4160520"/>
+            <a:ext cx="2560320" cy="274320"/>
+          </a:xfrm>
+          <a:prstGeom prst="rect">
+            <a:avLst/>
+          </a:prstGeom>
+          <a:noFill/>
+          <a:ln/>
+        </p:spPr>
+        <p:txBody>
+          <a:bodyPr wrap="square" lIns="0" tIns="0" rIns="0" bIns="0" rtlCol="0" anchor="ctr"/>
+          <a:lstStyle/>
+          <a:p>
+            <a:pPr indent="0" marL="0">
+              <a:buNone/>
+            </a:pPr>
+            <a:r>
+              <a:rPr lang="en-US" sz="1400" dirty="0">
+                <a:solidFill>
+                  <a:srgbClr val="DDD4F6"/>
+                </a:solidFill>
+                <a:latin typeface="Calibri" pitchFamily="34" charset="0"/>
+                <a:ea typeface="Calibri" pitchFamily="34" charset="-122"/>
+                <a:cs typeface="Calibri" pitchFamily="34" charset="-120"/>
+              </a:rPr>
+              <a:t>languages</a:t>
+            </a:r>
+            <a:endParaRPr lang="en-US" sz="1400" dirty="0"/>
+          </a:p>
+        </p:txBody>
+      </p:sp>
+      <p:sp>
+        <p:nvSpPr>
+          <p:cNvPr id="10" name="Text 8"/>
+          <p:cNvSpPr txBox="1"/>
+          <p:nvPr/>
+        </p:nvSpPr>
+        <p:spPr>
+          <a:xfrm>
+            <a:off x="457200" y="4480560"/>
+            <a:ext cx="8229600" cy="274320"/>
+          </a:xfrm>
+          <a:prstGeom prst="rect">
+            <a:avLst/>
+          </a:prstGeom>
+          <a:noFill/>
+          <a:ln/>
+        </p:spPr>
+        <p:txBody>
+          <a:bodyPr wrap="square" lIns="0" tIns="0" rIns="0" bIns="0" rtlCol="0" anchor="ctr"/>
+          <a:lstStyle/>
+          <a:p>
+            <a:pPr indent="0" marL="0">
+              <a:buNone/>
+            </a:pPr>
+            <a:r>
+              <a:rPr lang="en-US" sz="1100" i="1" dirty="0">
+                <a:solidFill>
+                  <a:srgbClr val="DDD4F6"/>
+                </a:solidFill>
+                <a:latin typeface="Calibri" pitchFamily="34" charset="0"/>
+                <a:ea typeface="Calibri" pitchFamily="34" charset="-122"/>
+                <a:cs typeface="Calibri" pitchFamily="34" charset="-120"/>
+              </a:rPr>
+              <a:t>These are hypotheses to validate in the pilot, not measured results.</a:t>
+            </a:r>
+            <a:endParaRPr lang="en-US" sz="1100" dirty="0"/>
+          </a:p>
+        </p:txBody>
+      </p:sp>
+    </p:spTree>
+  </p:cSld>
+  <p:clrMapOvr>
+    <a:masterClrMapping/>
+  </p:clrMapOvr>
+</p:sld>
+</file>
+
+<file path=ppt/slides/slide12.xml><?xml version="1.0" encoding="utf-8"?>
+<p:sld xmlns:a="http://schemas.openxmlformats.org/drawingml/2006/main" xmlns:r="http://schemas.openxmlformats.org/officeDocument/2006/relationships" xmlns:p="http://schemas.openxmlformats.org/presentationml/2006/main">
+  <p:cSld name="Slide 12">
+    <p:bg>
+      <p:bgPr>
+        <a:solidFill>
+          <a:srgbClr val="FFFFFF"/>
+        </a:solidFill>
+      </p:bgPr>
+    </p:bg>
+    <p:spTree>
+      <p:nvGrpSpPr>
+        <p:cNvPr id="1" name=""/>
+        <p:cNvGrpSpPr/>
+        <p:nvPr/>
+      </p:nvGrpSpPr>
+      <p:grpSpPr>
+        <a:xfrm>
+          <a:off x="0" y="0"/>
+          <a:ext cx="0" cy="0"/>
+          <a:chOff x="0" y="0"/>
+          <a:chExt cx="0" cy="0"/>
+        </a:xfrm>
+      </p:grpSpPr>
+      <p:sp>
+        <p:nvSpPr>
+          <p:cNvPr id="2" name="Text 0"/>
+          <p:cNvSpPr txBox="1"/>
+          <p:nvPr/>
+        </p:nvSpPr>
+        <p:spPr>
+          <a:xfrm>
+            <a:off x="457200" y="274320"/>
+            <a:ext cx="8229600" cy="640080"/>
+          </a:xfrm>
+          <a:prstGeom prst="rect">
+            <a:avLst/>
+          </a:prstGeom>
+          <a:noFill/>
+          <a:ln/>
+        </p:spPr>
+        <p:txBody>
+          <a:bodyPr wrap="square" lIns="0" tIns="0" rIns="0" bIns="0" rtlCol="0" anchor="ctr"/>
+          <a:lstStyle/>
+          <a:p>
+            <a:pPr indent="0" marL="0">
+              <a:buNone/>
+            </a:pPr>
+            <a:r>
+              <a:rPr lang="en-US" sz="3000" b="1" dirty="0">
+                <a:solidFill>
+                  <a:srgbClr val="2E2457"/>
+                </a:solidFill>
+                <a:latin typeface="Cambria" pitchFamily="34" charset="0"/>
+                <a:ea typeface="Cambria" pitchFamily="34" charset="-122"/>
+                <a:cs typeface="Cambria" pitchFamily="34" charset="-120"/>
+              </a:rPr>
+              <a:t>Built, tested, ready to pilot</a:t>
+            </a:r>
+            <a:endParaRPr lang="en-US" sz="3000" dirty="0"/>
+          </a:p>
+        </p:txBody>
+      </p:sp>
+      <p:sp>
+        <p:nvSpPr>
+          <p:cNvPr id="3" name="Text 1"/>
+          <p:cNvSpPr txBox="1"/>
+          <p:nvPr/>
+        </p:nvSpPr>
+        <p:spPr>
+          <a:xfrm>
+            <a:off x="457200" y="1188720"/>
+            <a:ext cx="1920240" cy="822960"/>
+          </a:xfrm>
+          <a:prstGeom prst="rect">
+            <a:avLst/>
+          </a:prstGeom>
+          <a:noFill/>
+          <a:ln/>
+        </p:spPr>
+        <p:txBody>
+          <a:bodyPr wrap="square" lIns="0" tIns="0" rIns="0" bIns="0" rtlCol="0" anchor="ctr"/>
+          <a:lstStyle/>
+          <a:p>
+            <a:pPr indent="0" marL="0">
+              <a:buNone/>
+            </a:pPr>
+            <a:r>
+              <a:rPr lang="en-US" sz="4000" b="1" dirty="0">
+                <a:solidFill>
+                  <a:srgbClr val="6A57B8"/>
+                </a:solidFill>
+                <a:latin typeface="Cambria" pitchFamily="34" charset="0"/>
+                <a:ea typeface="Cambria" pitchFamily="34" charset="-122"/>
+                <a:cs typeface="Cambria" pitchFamily="34" charset="-120"/>
+              </a:rPr>
+              <a:t>99</a:t>
+            </a:r>
+            <a:endParaRPr lang="en-US" sz="4000" dirty="0"/>
+          </a:p>
+        </p:txBody>
+      </p:sp>
+      <p:sp>
+        <p:nvSpPr>
+          <p:cNvPr id="4" name="Text 2"/>
+          <p:cNvSpPr txBox="1"/>
+          <p:nvPr/>
+        </p:nvSpPr>
+        <p:spPr>
+          <a:xfrm>
+            <a:off x="457200" y="2011680"/>
+            <a:ext cx="1920240" cy="640080"/>
+          </a:xfrm>
+          <a:prstGeom prst="rect">
+            <a:avLst/>
+          </a:prstGeom>
+          <a:noFill/>
+          <a:ln/>
+        </p:spPr>
+        <p:txBody>
+          <a:bodyPr wrap="square" lIns="0" tIns="0" rIns="0" bIns="0" rtlCol="0" anchor="t"/>
+          <a:lstStyle/>
+          <a:p>
+            <a:pPr indent="0" marL="0">
+              <a:buNone/>
+            </a:pPr>
+            <a:r>
+              <a:rPr lang="en-US" sz="1400" dirty="0">
+                <a:solidFill>
+                  <a:srgbClr val="241F38"/>
+                </a:solidFill>
+                <a:latin typeface="Calibri" pitchFamily="34" charset="0"/>
+                <a:ea typeface="Calibri" pitchFamily="34" charset="-122"/>
+                <a:cs typeface="Calibri" pitchFamily="34" charset="-120"/>
+              </a:rPr>
+              <a:t>automated tests passing</a:t>
+            </a:r>
+            <a:endParaRPr lang="en-US" sz="1400" dirty="0"/>
+          </a:p>
+        </p:txBody>
+      </p:sp>
+      <p:sp>
+        <p:nvSpPr>
+          <p:cNvPr id="5" name="Text 3"/>
+          <p:cNvSpPr txBox="1"/>
+          <p:nvPr/>
+        </p:nvSpPr>
+        <p:spPr>
+          <a:xfrm>
+            <a:off x="2560320" y="1188720"/>
+            <a:ext cx="1920240" cy="822960"/>
+          </a:xfrm>
+          <a:prstGeom prst="rect">
+            <a:avLst/>
+          </a:prstGeom>
+          <a:noFill/>
+          <a:ln/>
+        </p:spPr>
+        <p:txBody>
+          <a:bodyPr wrap="square" lIns="0" tIns="0" rIns="0" bIns="0" rtlCol="0" anchor="ctr"/>
+          <a:lstStyle/>
+          <a:p>
+            <a:pPr indent="0" marL="0">
+              <a:buNone/>
+            </a:pPr>
+            <a:r>
+              <a:rPr lang="en-US" sz="4000" b="1" dirty="0">
+                <a:solidFill>
+                  <a:srgbClr val="6A57B8"/>
+                </a:solidFill>
+                <a:latin typeface="Cambria" pitchFamily="34" charset="0"/>
+                <a:ea typeface="Cambria" pitchFamily="34" charset="-122"/>
+                <a:cs typeface="Cambria" pitchFamily="34" charset="-120"/>
+              </a:rPr>
+              <a:t>4</a:t>
+            </a:r>
+            <a:endParaRPr lang="en-US" sz="4000" dirty="0"/>
+          </a:p>
+        </p:txBody>
+      </p:sp>
+      <p:sp>
+        <p:nvSpPr>
+          <p:cNvPr id="6" name="Text 4"/>
+          <p:cNvSpPr txBox="1"/>
+          <p:nvPr/>
+        </p:nvSpPr>
+        <p:spPr>
+          <a:xfrm>
+            <a:off x="2560320" y="2011680"/>
+            <a:ext cx="1920240" cy="640080"/>
+          </a:xfrm>
+          <a:prstGeom prst="rect">
+            <a:avLst/>
+          </a:prstGeom>
+          <a:noFill/>
+          <a:ln/>
+        </p:spPr>
+        <p:txBody>
+          <a:bodyPr wrap="square" lIns="0" tIns="0" rIns="0" bIns="0" rtlCol="0" anchor="t"/>
+          <a:lstStyle/>
+          <a:p>
+            <a:pPr indent="0" marL="0">
+              <a:buNone/>
+            </a:pPr>
+            <a:r>
+              <a:rPr lang="en-US" sz="1400" dirty="0">
+                <a:solidFill>
+                  <a:srgbClr val="241F38"/>
+                </a:solidFill>
+                <a:latin typeface="Calibri" pitchFamily="34" charset="0"/>
+                <a:ea typeface="Calibri" pitchFamily="34" charset="-122"/>
+                <a:cs typeface="Calibri" pitchFamily="34" charset="-120"/>
+              </a:rPr>
+              <a:t>languages, offline-capable</a:t>
+            </a:r>
+            <a:endParaRPr lang="en-US" sz="1400" dirty="0"/>
+          </a:p>
+        </p:txBody>
+      </p:sp>
+      <p:sp>
+        <p:nvSpPr>
+          <p:cNvPr id="7" name="Text 5"/>
+          <p:cNvSpPr txBox="1"/>
+          <p:nvPr/>
+        </p:nvSpPr>
+        <p:spPr>
+          <a:xfrm>
+            <a:off x="4663440" y="1188720"/>
+            <a:ext cx="1920240" cy="822960"/>
+          </a:xfrm>
+          <a:prstGeom prst="rect">
+            <a:avLst/>
+          </a:prstGeom>
+          <a:noFill/>
+          <a:ln/>
+        </p:spPr>
+        <p:txBody>
+          <a:bodyPr wrap="square" lIns="0" tIns="0" rIns="0" bIns="0" rtlCol="0" anchor="ctr"/>
+          <a:lstStyle/>
+          <a:p>
+            <a:pPr indent="0" marL="0">
+              <a:buNone/>
+            </a:pPr>
+            <a:r>
+              <a:rPr lang="en-US" sz="4000" b="1" dirty="0">
+                <a:solidFill>
+                  <a:srgbClr val="6A57B8"/>
+                </a:solidFill>
+                <a:latin typeface="Cambria" pitchFamily="34" charset="0"/>
+                <a:ea typeface="Cambria" pitchFamily="34" charset="-122"/>
+                <a:cs typeface="Cambria" pitchFamily="34" charset="-120"/>
+              </a:rPr>
+              <a:t>0</a:t>
+            </a:r>
+            <a:endParaRPr lang="en-US" sz="4000" dirty="0"/>
+          </a:p>
+        </p:txBody>
+      </p:sp>
+      <p:sp>
+        <p:nvSpPr>
+          <p:cNvPr id="8" name="Text 6"/>
+          <p:cNvSpPr txBox="1"/>
+          <p:nvPr/>
+        </p:nvSpPr>
+        <p:spPr>
+          <a:xfrm>
+            <a:off x="4663440" y="2011680"/>
+            <a:ext cx="1920240" cy="640080"/>
+          </a:xfrm>
+          <a:prstGeom prst="rect">
+            <a:avLst/>
+          </a:prstGeom>
+          <a:noFill/>
+          <a:ln/>
+        </p:spPr>
+        <p:txBody>
+          <a:bodyPr wrap="square" lIns="0" tIns="0" rIns="0" bIns="0" rtlCol="0" anchor="t"/>
+          <a:lstStyle/>
+          <a:p>
+            <a:pPr indent="0" marL="0">
+              <a:buNone/>
+            </a:pPr>
+            <a:r>
+              <a:rPr lang="en-US" sz="1400" dirty="0">
+                <a:solidFill>
+                  <a:srgbClr val="241F38"/>
+                </a:solidFill>
+                <a:latin typeface="Calibri" pitchFamily="34" charset="0"/>
+                <a:ea typeface="Calibri" pitchFamily="34" charset="-122"/>
+                <a:cs typeface="Calibri" pitchFamily="34" charset="-120"/>
+              </a:rPr>
+              <a:t>accounts or phone numbers collected</a:t>
+            </a:r>
+            <a:endParaRPr lang="en-US" sz="1400" dirty="0"/>
+          </a:p>
+        </p:txBody>
+      </p:sp>
+      <p:sp>
+        <p:nvSpPr>
+          <p:cNvPr id="9" name="Text 7"/>
+          <p:cNvSpPr txBox="1"/>
+          <p:nvPr/>
+        </p:nvSpPr>
+        <p:spPr>
+          <a:xfrm>
+            <a:off x="6766560" y="1188720"/>
+            <a:ext cx="1920240" cy="822960"/>
+          </a:xfrm>
+          <a:prstGeom prst="rect">
+            <a:avLst/>
+          </a:prstGeom>
+          <a:noFill/>
+          <a:ln/>
+        </p:spPr>
+        <p:txBody>
+          <a:bodyPr wrap="square" lIns="0" tIns="0" rIns="0" bIns="0" rtlCol="0" anchor="ctr"/>
+          <a:lstStyle/>
+          <a:p>
+            <a:pPr indent="0" marL="0">
+              <a:buNone/>
+            </a:pPr>
+            <a:r>
+              <a:rPr lang="en-US" sz="4000" b="1" dirty="0">
+                <a:solidFill>
+                  <a:srgbClr val="6A57B8"/>
+                </a:solidFill>
+                <a:latin typeface="Cambria" pitchFamily="34" charset="0"/>
+                <a:ea typeface="Cambria" pitchFamily="34" charset="-122"/>
+                <a:cs typeface="Cambria" pitchFamily="34" charset="-120"/>
+              </a:rPr>
+              <a:t>1 week</a:t>
+            </a:r>
+            <a:endParaRPr lang="en-US" sz="4000" dirty="0"/>
+          </a:p>
+        </p:txBody>
+      </p:sp>
+      <p:sp>
+        <p:nvSpPr>
+          <p:cNvPr id="10" name="Text 8"/>
+          <p:cNvSpPr txBox="1"/>
+          <p:nvPr/>
+        </p:nvSpPr>
+        <p:spPr>
+          <a:xfrm>
+            <a:off x="6766560" y="2011680"/>
+            <a:ext cx="1920240" cy="640080"/>
+          </a:xfrm>
+          <a:prstGeom prst="rect">
+            <a:avLst/>
+          </a:prstGeom>
+          <a:noFill/>
+          <a:ln/>
+        </p:spPr>
+        <p:txBody>
+          <a:bodyPr wrap="square" lIns="0" tIns="0" rIns="0" bIns="0" rtlCol="0" anchor="t"/>
+          <a:lstStyle/>
+          <a:p>
+            <a:pPr indent="0" marL="0">
+              <a:buNone/>
+            </a:pPr>
+            <a:r>
+              <a:rPr lang="en-US" sz="1400" dirty="0">
+                <a:solidFill>
+                  <a:srgbClr val="241F38"/>
+                </a:solidFill>
+                <a:latin typeface="Calibri" pitchFamily="34" charset="0"/>
+                <a:ea typeface="Calibri" pitchFamily="34" charset="-122"/>
+                <a:cs typeface="Calibri" pitchFamily="34" charset="-120"/>
+              </a:rPr>
+              <a:t>pilot plan ready</a:t>
+            </a:r>
+            <a:endParaRPr lang="en-US" sz="1400" dirty="0"/>
+          </a:p>
+        </p:txBody>
+      </p:sp>
+      <p:sp>
+        <p:nvSpPr>
+          <p:cNvPr id="11" name="Shape 9"/>
+          <p:cNvSpPr/>
+          <p:nvPr/>
+        </p:nvSpPr>
+        <p:spPr>
+          <a:xfrm>
+            <a:off x="457200" y="2926080"/>
+            <a:ext cx="4023360" cy="1554480"/>
+          </a:xfrm>
+          <a:prstGeom prst="roundRect">
+            <a:avLst>
+              <a:gd name="adj" fmla="val 7059"/>
+            </a:avLst>
+          </a:prstGeom>
+          <a:solidFill>
+            <a:srgbClr val="F4F1FC"/>
+          </a:solidFill>
+          <a:ln w="12700">
+            <a:solidFill>
+              <a:srgbClr val="F4F1FC"/>
+            </a:solidFill>
+            <a:prstDash val="solid"/>
+          </a:ln>
+        </p:spPr>
+      </p:sp>
+      <p:sp>
+        <p:nvSpPr>
+          <p:cNvPr id="12" name="Text 10"/>
+          <p:cNvSpPr txBox="1"/>
+          <p:nvPr/>
+        </p:nvSpPr>
+        <p:spPr>
+          <a:xfrm>
+            <a:off x="640080" y="3063240"/>
+            <a:ext cx="3657600" cy="365760"/>
+          </a:xfrm>
+          <a:prstGeom prst="rect">
+            <a:avLst/>
+          </a:prstGeom>
+          <a:noFill/>
+          <a:ln/>
+        </p:spPr>
+        <p:txBody>
+          <a:bodyPr wrap="square" lIns="0" tIns="0" rIns="0" bIns="0" rtlCol="0" anchor="ctr"/>
+          <a:lstStyle/>
+          <a:p>
+            <a:pPr indent="0" marL="0">
+              <a:buNone/>
+            </a:pPr>
+            <a:r>
+              <a:rPr lang="en-US" sz="1800" b="1" dirty="0">
+                <a:solidFill>
+                  <a:srgbClr val="6A57B8"/>
+                </a:solidFill>
+                <a:latin typeface="Cambria" pitchFamily="34" charset="0"/>
+                <a:ea typeface="Cambria" pitchFamily="34" charset="-122"/>
+                <a:cs typeface="Cambria" pitchFamily="34" charset="-120"/>
+              </a:rPr>
+              <a:t>What is real today</a:t>
+            </a:r>
+            <a:endParaRPr lang="en-US" sz="1800" dirty="0"/>
+          </a:p>
+        </p:txBody>
+      </p:sp>
+      <p:sp>
+        <p:nvSpPr>
+          <p:cNvPr id="13" name="Text 11"/>
+          <p:cNvSpPr txBox="1"/>
+          <p:nvPr/>
+        </p:nvSpPr>
+        <p:spPr>
+          <a:xfrm>
+            <a:off x="640080" y="3474720"/>
+            <a:ext cx="3657600" cy="868680"/>
+          </a:xfrm>
+          <a:prstGeom prst="rect">
+            <a:avLst/>
+          </a:prstGeom>
+          <a:noFill/>
+          <a:ln/>
+        </p:spPr>
+        <p:txBody>
+          <a:bodyPr wrap="square" lIns="0" tIns="0" rIns="0" bIns="0" rtlCol="0" anchor="t"/>
+          <a:lstStyle/>
+          <a:p>
+            <a:pPr indent="0" marL="0">
+              <a:buNone/>
+            </a:pPr>
+            <a:r>
+              <a:rPr lang="en-US" sz="1400" dirty="0">
+                <a:solidFill>
+                  <a:srgbClr val="241F38"/>
+                </a:solidFill>
+                <a:latin typeface="Calibri" pitchFamily="34" charset="0"/>
+                <a:ea typeface="Calibri" pitchFamily="34" charset="-122"/>
+                <a:cs typeface="Calibri" pitchFamily="34" charset="-120"/>
+              </a:rPr>
+              <a:t>A working app on a phone: verified outages, forecast, duration estimate, medical power plan, care booking, outage cost. Live Eskom status and real tariffs. Checked in a browser.</a:t>
+            </a:r>
+            <a:endParaRPr lang="en-US" sz="1400" dirty="0"/>
+          </a:p>
+        </p:txBody>
+      </p:sp>
+      <p:sp>
+        <p:nvSpPr>
+          <p:cNvPr id="14" name="Shape 12"/>
+          <p:cNvSpPr/>
+          <p:nvPr/>
+        </p:nvSpPr>
+        <p:spPr>
+          <a:xfrm>
+            <a:off x="4663440" y="2926080"/>
+            <a:ext cx="4023360" cy="1554480"/>
+          </a:xfrm>
+          <a:prstGeom prst="roundRect">
+            <a:avLst>
+              <a:gd name="adj" fmla="val 7059"/>
+            </a:avLst>
+          </a:prstGeom>
+          <a:solidFill>
+            <a:srgbClr val="F4F1FC"/>
+          </a:solidFill>
+          <a:ln w="12700">
+            <a:solidFill>
+              <a:srgbClr val="F4F1FC"/>
+            </a:solidFill>
+            <a:prstDash val="solid"/>
+          </a:ln>
+        </p:spPr>
+      </p:sp>
+      <p:sp>
+        <p:nvSpPr>
+          <p:cNvPr id="15" name="Text 13"/>
+          <p:cNvSpPr txBox="1"/>
+          <p:nvPr/>
+        </p:nvSpPr>
+        <p:spPr>
+          <a:xfrm>
+            <a:off x="4846320" y="3063240"/>
+            <a:ext cx="3657600" cy="365760"/>
+          </a:xfrm>
+          <a:prstGeom prst="rect">
+            <a:avLst/>
+          </a:prstGeom>
+          <a:noFill/>
+          <a:ln/>
+        </p:spPr>
+        <p:txBody>
+          <a:bodyPr wrap="square" lIns="0" tIns="0" rIns="0" bIns="0" rtlCol="0" anchor="ctr"/>
+          <a:lstStyle/>
+          <a:p>
+            <a:pPr indent="0" marL="0">
+              <a:buNone/>
+            </a:pPr>
+            <a:r>
+              <a:rPr lang="en-US" sz="1800" b="1" dirty="0">
+                <a:solidFill>
+                  <a:srgbClr val="6A57B8"/>
+                </a:solidFill>
+                <a:latin typeface="Cambria" pitchFamily="34" charset="0"/>
+                <a:ea typeface="Cambria" pitchFamily="34" charset="-122"/>
+                <a:cs typeface="Cambria" pitchFamily="34" charset="-120"/>
+              </a:rPr>
+              <a:t>What is demo data, and said so</a:t>
+            </a:r>
+            <a:endParaRPr lang="en-US" sz="1800" dirty="0"/>
+          </a:p>
+        </p:txBody>
+      </p:sp>
+      <p:sp>
+        <p:nvSpPr>
+          <p:cNvPr id="16" name="Text 14"/>
+          <p:cNvSpPr txBox="1"/>
+          <p:nvPr/>
+        </p:nvSpPr>
+        <p:spPr>
+          <a:xfrm>
+            <a:off x="4846320" y="3474720"/>
+            <a:ext cx="3657600" cy="868680"/>
+          </a:xfrm>
+          <a:prstGeom prst="rect">
+            <a:avLst/>
+          </a:prstGeom>
+          <a:noFill/>
+          <a:ln/>
+        </p:spPr>
+        <p:txBody>
+          <a:bodyPr wrap="square" lIns="0" tIns="0" rIns="0" bIns="0" rtlCol="0" anchor="t"/>
+          <a:lstStyle/>
+          <a:p>
+            <a:pPr indent="0" marL="0">
+              <a:buNone/>
+            </a:pPr>
+            <a:r>
+              <a:rPr lang="en-US" sz="1400" dirty="0">
+                <a:solidFill>
+                  <a:srgbClr val="241F38"/>
+                </a:solidFill>
+                <a:latin typeface="Calibri" pitchFamily="34" charset="0"/>
+                <a:ea typeface="Calibri" pitchFamily="34" charset="-122"/>
+                <a:cs typeface="Calibri" pitchFamily="34" charset="-120"/>
+              </a:rPr>
+              <a:t>Outage history, carers, equipment prices and bookings are samples and labelled. Next: a one-week pilot in one suburb, then real suppliers and payments.</a:t>
+            </a:r>
+            <a:endParaRPr lang="en-US" sz="1400" dirty="0"/>
+          </a:p>
+        </p:txBody>
+      </p:sp>
+    </p:spTree>
+  </p:cSld>
+  <p:clrMapOvr>
+    <a:masterClrMapping/>
+  </p:clrMapOvr>
+</p:sld>
+</file>
+
+<file path=ppt/slides/slide13.xml><?xml version="1.0" encoding="utf-8"?>
+<p:sld xmlns:a="http://schemas.openxmlformats.org/drawingml/2006/main" xmlns:r="http://schemas.openxmlformats.org/officeDocument/2006/relationships" xmlns:p="http://schemas.openxmlformats.org/presentationml/2006/main">
+  <p:cSld name="Slide 13">
+    <p:bg>
+      <p:bgPr>
+        <a:solidFill>
+          <a:srgbClr val="FFFFFF"/>
+        </a:solidFill>
+      </p:bgPr>
+    </p:bg>
+    <p:spTree>
+      <p:nvGrpSpPr>
+        <p:cNvPr id="1" name=""/>
+        <p:cNvGrpSpPr/>
+        <p:nvPr/>
+      </p:nvGrpSpPr>
+      <p:grpSpPr>
+        <a:xfrm>
+          <a:off x="0" y="0"/>
+          <a:ext cx="0" cy="0"/>
+          <a:chOff x="0" y="0"/>
+          <a:chExt cx="0" cy="0"/>
+        </a:xfrm>
+      </p:grpSpPr>
+      <p:sp>
+        <p:nvSpPr>
+          <p:cNvPr id="2" name="Text 0"/>
+          <p:cNvSpPr txBox="1"/>
+          <p:nvPr/>
+        </p:nvSpPr>
+        <p:spPr>
+          <a:xfrm>
+            <a:off x="457200" y="274320"/>
+            <a:ext cx="8229600" cy="640080"/>
+          </a:xfrm>
+          <a:prstGeom prst="rect">
+            <a:avLst/>
+          </a:prstGeom>
+          <a:noFill/>
+          <a:ln/>
+        </p:spPr>
+        <p:txBody>
+          <a:bodyPr wrap="square" lIns="0" tIns="0" rIns="0" bIns="0" rtlCol="0" anchor="ctr"/>
+          <a:lstStyle/>
+          <a:p>
+            <a:pPr indent="0" marL="0">
+              <a:buNone/>
+            </a:pPr>
+            <a:r>
+              <a:rPr lang="en-US" sz="3000" b="1" dirty="0">
+                <a:solidFill>
+                  <a:srgbClr val="2E2457"/>
+                </a:solidFill>
+                <a:latin typeface="Cambria" pitchFamily="34" charset="0"/>
+                <a:ea typeface="Cambria" pitchFamily="34" charset="-122"/>
+                <a:cs typeface="Cambria" pitchFamily="34" charset="-120"/>
+              </a:rPr>
+              <a:t>Next six months</a:t>
+            </a:r>
+            <a:endParaRPr lang="en-US" sz="3000" dirty="0"/>
+          </a:p>
+        </p:txBody>
+      </p:sp>
+      <p:sp>
+        <p:nvSpPr>
+          <p:cNvPr id="3" name="Shape 1"/>
+          <p:cNvSpPr/>
+          <p:nvPr/>
+        </p:nvSpPr>
+        <p:spPr>
+          <a:xfrm>
+            <a:off x="457200" y="1097280"/>
+            <a:ext cx="2651760" cy="3200400"/>
+          </a:xfrm>
+          <a:prstGeom prst="roundRect">
+            <a:avLst>
+              <a:gd name="adj" fmla="val 4138"/>
+            </a:avLst>
+          </a:prstGeom>
+          <a:solidFill>
+            <a:srgbClr val="F4F1FC"/>
+          </a:solidFill>
+          <a:ln w="12700">
+            <a:solidFill>
+              <a:srgbClr val="F4F1FC"/>
+            </a:solidFill>
+            <a:prstDash val="solid"/>
+          </a:ln>
+        </p:spPr>
+      </p:sp>
+      <p:sp>
+        <p:nvSpPr>
+          <p:cNvPr id="4" name="Text 2"/>
+          <p:cNvSpPr txBox="1"/>
+          <p:nvPr/>
+        </p:nvSpPr>
+        <p:spPr>
+          <a:xfrm>
+            <a:off x="640080" y="1234440"/>
+            <a:ext cx="2286000" cy="365760"/>
+          </a:xfrm>
+          <a:prstGeom prst="rect">
+            <a:avLst/>
+          </a:prstGeom>
+          <a:noFill/>
+          <a:ln/>
+        </p:spPr>
+        <p:txBody>
+          <a:bodyPr wrap="square" lIns="0" tIns="0" rIns="0" bIns="0" rtlCol="0" anchor="ctr"/>
+          <a:lstStyle/>
+          <a:p>
+            <a:pPr indent="0" marL="0">
+              <a:buNone/>
+            </a:pPr>
+            <a:r>
+              <a:rPr lang="en-US" sz="1800" b="1" dirty="0">
+                <a:solidFill>
+                  <a:srgbClr val="6A57B8"/>
+                </a:solidFill>
+                <a:latin typeface="Cambria" pitchFamily="34" charset="0"/>
+                <a:ea typeface="Cambria" pitchFamily="34" charset="-122"/>
+                <a:cs typeface="Cambria" pitchFamily="34" charset="-120"/>
+              </a:rPr>
+              <a:t>Months 1-2: prove it</a:t>
+            </a:r>
+            <a:endParaRPr lang="en-US" sz="1800" dirty="0"/>
+          </a:p>
+        </p:txBody>
+      </p:sp>
+      <p:sp>
+        <p:nvSpPr>
+          <p:cNvPr id="5" name="Text 3"/>
+          <p:cNvSpPr txBox="1"/>
+          <p:nvPr/>
+        </p:nvSpPr>
+        <p:spPr>
+          <a:xfrm>
+            <a:off x="640080" y="1645920"/>
+            <a:ext cx="2286000" cy="2514600"/>
+          </a:xfrm>
+          <a:prstGeom prst="rect">
+            <a:avLst/>
+          </a:prstGeom>
+          <a:noFill/>
+          <a:ln/>
+        </p:spPr>
+        <p:txBody>
+          <a:bodyPr wrap="square" lIns="0" tIns="0" rIns="0" bIns="0" rtlCol="0" anchor="t"/>
+          <a:lstStyle/>
+          <a:p>
+            <a:pPr indent="0" marL="0">
+              <a:buNone/>
+            </a:pPr>
+            <a:r>
+              <a:rPr lang="en-US" sz="1400" dirty="0">
+                <a:solidFill>
+                  <a:srgbClr val="241F38"/>
+                </a:solidFill>
+                <a:latin typeface="Calibri" pitchFamily="34" charset="0"/>
+                <a:ea typeface="Calibri" pitchFamily="34" charset="-122"/>
+                <a:cs typeface="Calibri" pitchFamily="34" charset="-120"/>
+              </a:rPr>
+              <a:t>Run the pilot in one suburb. Native-speaker review of all four languages. Get real supplier prices for equipment. First conversation with a bank about an outage savings pot.</a:t>
+            </a:r>
+            <a:endParaRPr lang="en-US" sz="1400" dirty="0"/>
+          </a:p>
+        </p:txBody>
+      </p:sp>
+      <p:sp>
+        <p:nvSpPr>
+          <p:cNvPr id="6" name="Shape 4"/>
+          <p:cNvSpPr/>
+          <p:nvPr/>
+        </p:nvSpPr>
+        <p:spPr>
+          <a:xfrm>
+            <a:off x="3246120" y="1097280"/>
+            <a:ext cx="2651760" cy="3200400"/>
+          </a:xfrm>
+          <a:prstGeom prst="roundRect">
+            <a:avLst>
+              <a:gd name="adj" fmla="val 4138"/>
+            </a:avLst>
+          </a:prstGeom>
+          <a:solidFill>
+            <a:srgbClr val="F4F1FC"/>
+          </a:solidFill>
+          <a:ln w="12700">
+            <a:solidFill>
+              <a:srgbClr val="F4F1FC"/>
+            </a:solidFill>
+            <a:prstDash val="solid"/>
+          </a:ln>
+        </p:spPr>
+      </p:sp>
+      <p:sp>
+        <p:nvSpPr>
+          <p:cNvPr id="7" name="Text 5"/>
+          <p:cNvSpPr txBox="1"/>
+          <p:nvPr/>
+        </p:nvSpPr>
+        <p:spPr>
+          <a:xfrm>
+            <a:off x="3429000" y="1234440"/>
+            <a:ext cx="2286000" cy="365760"/>
+          </a:xfrm>
+          <a:prstGeom prst="rect">
+            <a:avLst/>
+          </a:prstGeom>
+          <a:noFill/>
+          <a:ln/>
+        </p:spPr>
+        <p:txBody>
+          <a:bodyPr wrap="square" lIns="0" tIns="0" rIns="0" bIns="0" rtlCol="0" anchor="ctr"/>
+          <a:lstStyle/>
+          <a:p>
+            <a:pPr indent="0" marL="0">
+              <a:buNone/>
+            </a:pPr>
+            <a:r>
+              <a:rPr lang="en-US" sz="1800" b="1" dirty="0">
+                <a:solidFill>
+                  <a:srgbClr val="6A57B8"/>
+                </a:solidFill>
+                <a:latin typeface="Cambria" pitchFamily="34" charset="0"/>
+                <a:ea typeface="Cambria" pitchFamily="34" charset="-122"/>
+                <a:cs typeface="Cambria" pitchFamily="34" charset="-120"/>
+              </a:rPr>
+              <a:t>Months 3-4: make it real</a:t>
+            </a:r>
+            <a:endParaRPr lang="en-US" sz="1800" dirty="0"/>
+          </a:p>
+        </p:txBody>
+      </p:sp>
+      <p:sp>
+        <p:nvSpPr>
+          <p:cNvPr id="8" name="Text 6"/>
+          <p:cNvSpPr txBox="1"/>
+          <p:nvPr/>
+        </p:nvSpPr>
+        <p:spPr>
+          <a:xfrm>
+            <a:off x="3429000" y="1645920"/>
+            <a:ext cx="2286000" cy="2514600"/>
+          </a:xfrm>
+          <a:prstGeom prst="rect">
+            <a:avLst/>
+          </a:prstGeom>
+          <a:noFill/>
+          <a:ln/>
+        </p:spPr>
+        <p:txBody>
+          <a:bodyPr wrap="square" lIns="0" tIns="0" rIns="0" bIns="0" rtlCol="0" anchor="t"/>
+          <a:lstStyle/>
+          <a:p>
+            <a:pPr indent="0" marL="0">
+              <a:buNone/>
+            </a:pPr>
+            <a:r>
+              <a:rPr lang="en-US" sz="1400" dirty="0">
+                <a:solidFill>
+                  <a:srgbClr val="241F38"/>
+                </a:solidFill>
+                <a:latin typeface="Calibri" pitchFamily="34" charset="0"/>
+                <a:ea typeface="Calibri" pitchFamily="34" charset="-122"/>
+                <a:cs typeface="Calibri" pitchFamily="34" charset="-120"/>
+              </a:rPr>
+              <a:t>Payments through a provider. Carer vetting through a background-check partner. Equipment from licensed suppliers. POPIA review before handling health or booking data.</a:t>
+            </a:r>
+            <a:endParaRPr lang="en-US" sz="1400" dirty="0"/>
+          </a:p>
+        </p:txBody>
+      </p:sp>
+      <p:sp>
+        <p:nvSpPr>
+          <p:cNvPr id="9" name="Shape 7"/>
+          <p:cNvSpPr/>
+          <p:nvPr/>
+        </p:nvSpPr>
+        <p:spPr>
+          <a:xfrm>
+            <a:off x="6035040" y="1097280"/>
+            <a:ext cx="2651760" cy="3200400"/>
+          </a:xfrm>
+          <a:prstGeom prst="roundRect">
+            <a:avLst>
+              <a:gd name="adj" fmla="val 4138"/>
+            </a:avLst>
+          </a:prstGeom>
+          <a:solidFill>
+            <a:srgbClr val="F4F1FC"/>
+          </a:solidFill>
+          <a:ln w="12700">
+            <a:solidFill>
+              <a:srgbClr val="F4F1FC"/>
+            </a:solidFill>
+            <a:prstDash val="solid"/>
+          </a:ln>
+        </p:spPr>
+      </p:sp>
+      <p:sp>
+        <p:nvSpPr>
+          <p:cNvPr id="10" name="Text 8"/>
+          <p:cNvSpPr txBox="1"/>
+          <p:nvPr/>
+        </p:nvSpPr>
+        <p:spPr>
+          <a:xfrm>
+            <a:off x="6217920" y="1234440"/>
+            <a:ext cx="2286000" cy="365760"/>
+          </a:xfrm>
+          <a:prstGeom prst="rect">
+            <a:avLst/>
+          </a:prstGeom>
+          <a:noFill/>
+          <a:ln/>
+        </p:spPr>
+        <p:txBody>
+          <a:bodyPr wrap="square" lIns="0" tIns="0" rIns="0" bIns="0" rtlCol="0" anchor="ctr"/>
+          <a:lstStyle/>
+          <a:p>
+            <a:pPr indent="0" marL="0">
+              <a:buNone/>
+            </a:pPr>
+            <a:r>
+              <a:rPr lang="en-US" sz="1800" b="1" dirty="0">
+                <a:solidFill>
+                  <a:srgbClr val="6A57B8"/>
+                </a:solidFill>
+                <a:latin typeface="Cambria" pitchFamily="34" charset="0"/>
+                <a:ea typeface="Cambria" pitchFamily="34" charset="-122"/>
+                <a:cs typeface="Cambria" pitchFamily="34" charset="-120"/>
+              </a:rPr>
+              <a:t>Months 5-6: scale it</a:t>
+            </a:r>
+            <a:endParaRPr lang="en-US" sz="1800" dirty="0"/>
+          </a:p>
+        </p:txBody>
+      </p:sp>
+      <p:sp>
+        <p:nvSpPr>
+          <p:cNvPr id="11" name="Text 9"/>
+          <p:cNvSpPr txBox="1"/>
+          <p:nvPr/>
+        </p:nvSpPr>
+        <p:spPr>
+          <a:xfrm>
+            <a:off x="6217920" y="1645920"/>
+            <a:ext cx="2286000" cy="2514600"/>
+          </a:xfrm>
+          <a:prstGeom prst="rect">
+            <a:avLst/>
+          </a:prstGeom>
+          <a:noFill/>
+          <a:ln/>
+        </p:spPr>
+        <p:txBody>
+          <a:bodyPr wrap="square" lIns="0" tIns="0" rIns="0" bIns="0" rtlCol="0" anchor="t"/>
+          <a:lstStyle/>
+          <a:p>
+            <a:pPr indent="0" marL="0">
+              <a:buNone/>
+            </a:pPr>
+            <a:r>
+              <a:rPr lang="en-US" sz="1400" dirty="0">
+                <a:solidFill>
+                  <a:srgbClr val="241F38"/>
+                </a:solidFill>
+                <a:latin typeface="Calibri" pitchFamily="34" charset="0"/>
+                <a:ea typeface="Calibri" pitchFamily="34" charset="-122"/>
+                <a:cs typeface="Calibri" pitchFamily="34" charset="-120"/>
+              </a:rPr>
+              <a:t>More suburbs from the same code. A dashboard for municipalities and utilities. Pro plan for small businesses. A pilot with a bank or insurer.</a:t>
+            </a:r>
+            <a:endParaRPr lang="en-US" sz="1400" dirty="0"/>
+          </a:p>
+        </p:txBody>
+      </p:sp>
+    </p:spTree>
+  </p:cSld>
+  <p:clrMapOvr>
+    <a:masterClrMapping/>
+  </p:clrMapOvr>
+</p:sld>
+</file>
+
+<file path=ppt/slides/slide14.xml><?xml version="1.0" encoding="utf-8"?>
+<p:sld xmlns:a="http://schemas.openxmlformats.org/drawingml/2006/main" xmlns:r="http://schemas.openxmlformats.org/officeDocument/2006/relationships" xmlns:p="http://schemas.openxmlformats.org/presentationml/2006/main">
+  <p:cSld name="Slide 14">
+    <p:bg>
+      <p:bgPr>
+        <a:solidFill>
+          <a:srgbClr val="2E2457"/>
+        </a:solidFill>
+      </p:bgPr>
+    </p:bg>
+    <p:spTree>
+      <p:nvGrpSpPr>
+        <p:cNvPr id="1" name=""/>
+        <p:cNvGrpSpPr/>
+        <p:nvPr/>
+      </p:nvGrpSpPr>
+      <p:grpSpPr>
+        <a:xfrm>
+          <a:off x="0" y="0"/>
+          <a:ext cx="0" cy="0"/>
+          <a:chOff x="0" y="0"/>
+          <a:chExt cx="0" cy="0"/>
+        </a:xfrm>
+      </p:grpSpPr>
+      <p:sp>
+        <p:nvSpPr>
+          <p:cNvPr id="2" name="Text 0"/>
+          <p:cNvSpPr txBox="1"/>
+          <p:nvPr/>
+        </p:nvSpPr>
+        <p:spPr>
+          <a:xfrm>
+            <a:off x="457200" y="274320"/>
+            <a:ext cx="8229600" cy="640080"/>
+          </a:xfrm>
+          <a:prstGeom prst="rect">
+            <a:avLst/>
+          </a:prstGeom>
+          <a:noFill/>
+          <a:ln/>
+        </p:spPr>
+        <p:txBody>
+          <a:bodyPr wrap="square" lIns="0" tIns="0" rIns="0" bIns="0" rtlCol="0" anchor="ctr"/>
+          <a:lstStyle/>
+          <a:p>
+            <a:pPr indent="0" marL="0">
+              <a:buNone/>
+            </a:pPr>
+            <a:r>
+              <a:rPr lang="en-US" sz="3000" b="1" dirty="0">
+                <a:solidFill>
+                  <a:srgbClr val="FFFFFF"/>
+                </a:solidFill>
+                <a:latin typeface="Cambria" pitchFamily="34" charset="0"/>
+                <a:ea typeface="Cambria" pitchFamily="34" charset="-122"/>
+                <a:cs typeface="Cambria" pitchFamily="34" charset="-120"/>
+              </a:rPr>
+              <a:t>Team and try it</a:t>
+            </a:r>
+            <a:endParaRPr lang="en-US" sz="3000" dirty="0"/>
+          </a:p>
+        </p:txBody>
+      </p:sp>
+      <p:sp>
+        <p:nvSpPr>
+          <p:cNvPr id="3" name="Shape 1"/>
+          <p:cNvSpPr/>
+          <p:nvPr/>
+        </p:nvSpPr>
+        <p:spPr>
+          <a:xfrm>
+            <a:off x="457200" y="1097280"/>
+            <a:ext cx="4023360" cy="1737360"/>
+          </a:xfrm>
+          <a:prstGeom prst="roundRect">
+            <a:avLst>
+              <a:gd name="adj" fmla="val 6316"/>
+            </a:avLst>
+          </a:prstGeom>
+          <a:solidFill>
+            <a:srgbClr val="EAE7F7"/>
+          </a:solidFill>
+          <a:ln w="12700">
+            <a:solidFill>
+              <a:srgbClr val="EAE7F7"/>
+            </a:solidFill>
+            <a:prstDash val="solid"/>
+          </a:ln>
+        </p:spPr>
+      </p:sp>
+      <p:sp>
+        <p:nvSpPr>
+          <p:cNvPr id="4" name="Text 2"/>
+          <p:cNvSpPr txBox="1"/>
+          <p:nvPr/>
+        </p:nvSpPr>
+        <p:spPr>
+          <a:xfrm>
+            <a:off x="640080" y="1234440"/>
+            <a:ext cx="3657600" cy="365760"/>
+          </a:xfrm>
+          <a:prstGeom prst="rect">
+            <a:avLst/>
+          </a:prstGeom>
+          <a:noFill/>
+          <a:ln/>
+        </p:spPr>
+        <p:txBody>
+          <a:bodyPr wrap="square" lIns="0" tIns="0" rIns="0" bIns="0" rtlCol="0" anchor="ctr"/>
+          <a:lstStyle/>
+          <a:p>
+            <a:pPr indent="0" marL="0">
+              <a:buNone/>
+            </a:pPr>
+            <a:r>
+              <a:rPr lang="en-US" sz="1800" b="1" dirty="0">
+                <a:solidFill>
+                  <a:srgbClr val="2E2457"/>
+                </a:solidFill>
+                <a:latin typeface="Cambria" pitchFamily="34" charset="0"/>
+                <a:ea typeface="Cambria" pitchFamily="34" charset="-122"/>
+                <a:cs typeface="Cambria" pitchFamily="34" charset="-120"/>
+              </a:rPr>
+              <a:t>Team</a:t>
+            </a:r>
+            <a:endParaRPr lang="en-US" sz="1800" dirty="0"/>
+          </a:p>
+        </p:txBody>
+      </p:sp>
+      <p:sp>
+        <p:nvSpPr>
+          <p:cNvPr id="5" name="Text 3"/>
+          <p:cNvSpPr txBox="1"/>
+          <p:nvPr/>
+        </p:nvSpPr>
+        <p:spPr>
+          <a:xfrm>
+            <a:off x="640080" y="1645920"/>
+            <a:ext cx="3657600" cy="1051560"/>
+          </a:xfrm>
+          <a:prstGeom prst="rect">
+            <a:avLst/>
+          </a:prstGeom>
+          <a:noFill/>
+          <a:ln/>
+        </p:spPr>
+        <p:txBody>
+          <a:bodyPr wrap="square" lIns="0" tIns="0" rIns="0" bIns="0" rtlCol="0" anchor="t"/>
+          <a:lstStyle/>
+          <a:p>
+            <a:pPr indent="0" marL="0">
+              <a:buNone/>
+            </a:pPr>
+            <a:r>
+              <a:rPr lang="en-US" sz="1400" dirty="0">
+                <a:solidFill>
+                  <a:srgbClr val="241F38"/>
+                </a:solidFill>
+                <a:latin typeface="Calibri" pitchFamily="34" charset="0"/>
+                <a:ea typeface="Calibri" pitchFamily="34" charset="-122"/>
+                <a:cs typeface="Calibri" pitchFamily="34" charset="-120"/>
+              </a:rPr>
+              <a:t>Tshedza Tshikovhi (22): software developer, leads a small team at Shudu Connections (Innovation Hub). Built CashCram, Top-13 NWU 2026 pitch competition.</a:t>
+            </a:r>
+            <a:endParaRPr lang="en-US" sz="1400" dirty="0"/>
+          </a:p>
+          <a:p>
+            <a:pPr indent="0" marL="0">
+              <a:buNone/>
+            </a:pPr>
+            <a:r>
+              <a:rPr lang="en-US" sz="1400" dirty="0">
+                <a:solidFill>
+                  <a:srgbClr val="241F38"/>
+                </a:solidFill>
+                <a:latin typeface="Calibri" pitchFamily="34" charset="0"/>
+                <a:ea typeface="Calibri" pitchFamily="34" charset="-122"/>
+                <a:cs typeface="Calibri" pitchFamily="34" charset="-120"/>
+              </a:rPr>
+              <a:t>Mulanga Munaka (22): biomedical engineering student, Wits. [Her part in the project]</a:t>
+            </a:r>
+            <a:endParaRPr lang="en-US" sz="1400" dirty="0"/>
+          </a:p>
+        </p:txBody>
+      </p:sp>
+      <p:sp>
+        <p:nvSpPr>
+          <p:cNvPr id="6" name="Shape 4"/>
+          <p:cNvSpPr/>
+          <p:nvPr/>
+        </p:nvSpPr>
+        <p:spPr>
+          <a:xfrm>
+            <a:off x="4663440" y="1097280"/>
+            <a:ext cx="4023360" cy="1737360"/>
+          </a:xfrm>
+          <a:prstGeom prst="roundRect">
+            <a:avLst>
+              <a:gd name="adj" fmla="val 6316"/>
+            </a:avLst>
+          </a:prstGeom>
+          <a:solidFill>
+            <a:srgbClr val="EAE7F7"/>
+          </a:solidFill>
+          <a:ln w="12700">
+            <a:solidFill>
+              <a:srgbClr val="EAE7F7"/>
+            </a:solidFill>
+            <a:prstDash val="solid"/>
+          </a:ln>
+        </p:spPr>
+      </p:sp>
+      <p:sp>
+        <p:nvSpPr>
+          <p:cNvPr id="7" name="Text 5"/>
+          <p:cNvSpPr txBox="1"/>
+          <p:nvPr/>
+        </p:nvSpPr>
+        <p:spPr>
+          <a:xfrm>
+            <a:off x="4846320" y="1234440"/>
+            <a:ext cx="3657600" cy="365760"/>
+          </a:xfrm>
+          <a:prstGeom prst="rect">
+            <a:avLst/>
+          </a:prstGeom>
+          <a:noFill/>
+          <a:ln/>
+        </p:spPr>
+        <p:txBody>
+          <a:bodyPr wrap="square" lIns="0" tIns="0" rIns="0" bIns="0" rtlCol="0" anchor="ctr"/>
+          <a:lstStyle/>
+          <a:p>
+            <a:pPr indent="0" marL="0">
+              <a:buNone/>
+            </a:pPr>
+            <a:r>
+              <a:rPr lang="en-US" sz="1800" b="1" dirty="0">
+                <a:solidFill>
+                  <a:srgbClr val="2E2457"/>
+                </a:solidFill>
+                <a:latin typeface="Cambria" pitchFamily="34" charset="0"/>
+                <a:ea typeface="Cambria" pitchFamily="34" charset="-122"/>
+                <a:cs typeface="Cambria" pitchFamily="34" charset="-120"/>
+              </a:rPr>
+              <a:t>Why us</a:t>
+            </a:r>
+            <a:endParaRPr lang="en-US" sz="1800" dirty="0"/>
+          </a:p>
+        </p:txBody>
+      </p:sp>
+      <p:sp>
+        <p:nvSpPr>
+          <p:cNvPr id="8" name="Text 6"/>
+          <p:cNvSpPr txBox="1"/>
+          <p:nvPr/>
+        </p:nvSpPr>
+        <p:spPr>
+          <a:xfrm>
+            <a:off x="4846320" y="1645920"/>
+            <a:ext cx="3657600" cy="1051560"/>
+          </a:xfrm>
+          <a:prstGeom prst="rect">
+            <a:avLst/>
+          </a:prstGeom>
+          <a:noFill/>
+          <a:ln/>
+        </p:spPr>
+        <p:txBody>
+          <a:bodyPr wrap="square" lIns="0" tIns="0" rIns="0" bIns="0" rtlCol="0" anchor="t"/>
+          <a:lstStyle/>
+          <a:p>
+            <a:pPr indent="0" marL="0">
+              <a:buNone/>
+            </a:pPr>
+            <a:r>
+              <a:rPr lang="en-US" sz="1400" dirty="0">
+                <a:solidFill>
+                  <a:srgbClr val="241F38"/>
+                </a:solidFill>
+                <a:latin typeface="Calibri" pitchFamily="34" charset="0"/>
+                <a:ea typeface="Calibri" pitchFamily="34" charset="-122"/>
+                <a:cs typeface="Calibri" pitchFamily="34" charset="-120"/>
+              </a:rPr>
+              <a:t>A developer who ships and a biomedical engineer who knows how people depend on power for health. Built, tested and checked on a phone in a week.</a:t>
+            </a:r>
+            <a:endParaRPr lang="en-US" sz="1400" dirty="0"/>
+          </a:p>
+        </p:txBody>
+      </p:sp>
+      <p:sp>
+        <p:nvSpPr>
+          <p:cNvPr id="9" name="Shape 7"/>
+          <p:cNvSpPr/>
+          <p:nvPr/>
+        </p:nvSpPr>
+        <p:spPr>
+          <a:xfrm>
+            <a:off x="457200" y="3017520"/>
+            <a:ext cx="8229600" cy="1463040"/>
+          </a:xfrm>
+          <a:prstGeom prst="roundRect">
+            <a:avLst>
+              <a:gd name="adj" fmla="val 7500"/>
+            </a:avLst>
+          </a:prstGeom>
+          <a:solidFill>
+            <a:srgbClr val="EAE7F7"/>
+          </a:solidFill>
+          <a:ln w="12700">
+            <a:solidFill>
+              <a:srgbClr val="EAE7F7"/>
+            </a:solidFill>
+            <a:prstDash val="solid"/>
+          </a:ln>
+        </p:spPr>
+      </p:sp>
+      <p:sp>
+        <p:nvSpPr>
+          <p:cNvPr id="10" name="Text 8"/>
+          <p:cNvSpPr txBox="1"/>
+          <p:nvPr/>
+        </p:nvSpPr>
+        <p:spPr>
+          <a:xfrm>
+            <a:off x="640080" y="3154680"/>
+            <a:ext cx="7863840" cy="365760"/>
+          </a:xfrm>
+          <a:prstGeom prst="rect">
+            <a:avLst/>
+          </a:prstGeom>
+          <a:noFill/>
+          <a:ln/>
+        </p:spPr>
+        <p:txBody>
+          <a:bodyPr wrap="square" lIns="0" tIns="0" rIns="0" bIns="0" rtlCol="0" anchor="ctr"/>
+          <a:lstStyle/>
+          <a:p>
+            <a:pPr indent="0" marL="0">
+              <a:buNone/>
+            </a:pPr>
+            <a:r>
+              <a:rPr lang="en-US" sz="1800" b="1" dirty="0">
+                <a:solidFill>
+                  <a:srgbClr val="2E2457"/>
+                </a:solidFill>
+                <a:latin typeface="Cambria" pitchFamily="34" charset="0"/>
+                <a:ea typeface="Cambria" pitchFamily="34" charset="-122"/>
+                <a:cs typeface="Cambria" pitchFamily="34" charset="-120"/>
+              </a:rPr>
+              <a:t>Try it in 2 minutes</a:t>
+            </a:r>
+            <a:endParaRPr lang="en-US" sz="1800" dirty="0"/>
+          </a:p>
+        </p:txBody>
+      </p:sp>
+      <p:sp>
+        <p:nvSpPr>
+          <p:cNvPr id="11" name="Text 9"/>
+          <p:cNvSpPr txBox="1"/>
+          <p:nvPr/>
+        </p:nvSpPr>
+        <p:spPr>
+          <a:xfrm>
+            <a:off x="640080" y="3566160"/>
+            <a:ext cx="7863840" cy="777240"/>
+          </a:xfrm>
+          <a:prstGeom prst="rect">
+            <a:avLst/>
+          </a:prstGeom>
+          <a:noFill/>
+          <a:ln/>
+        </p:spPr>
+        <p:txBody>
+          <a:bodyPr wrap="square" lIns="0" tIns="0" rIns="0" bIns="0" rtlCol="0" anchor="t"/>
+          <a:lstStyle/>
+          <a:p>
+            <a:pPr indent="0" marL="0">
+              <a:buNone/>
+            </a:pPr>
+            <a:r>
+              <a:rPr lang="en-US" sz="1400" dirty="0">
+                <a:solidFill>
+                  <a:srgbClr val="241F38"/>
+                </a:solidFill>
+                <a:latin typeface="Calibri" pitchFamily="34" charset="0"/>
+                <a:ea typeface="Calibri" pitchFamily="34" charset="-122"/>
+                <a:cs typeface="Calibri" pitchFamily="34" charset="-120"/>
+              </a:rPr>
+              <a:t>Live app: [DEPLOYED URL]  |  Demo video (90 s): [VIDEO LINK]</a:t>
+            </a:r>
+            <a:endParaRPr lang="en-US" sz="1400" dirty="0"/>
+          </a:p>
+          <a:p>
+            <a:pPr indent="0" marL="0">
+              <a:buNone/>
+            </a:pPr>
+            <a:r>
+              <a:rPr lang="en-US" sz="1400" dirty="0">
+                <a:solidFill>
+                  <a:srgbClr val="241F38"/>
+                </a:solidFill>
+                <a:latin typeface="Calibri" pitchFamily="34" charset="0"/>
+                <a:ea typeface="Calibri" pitchFamily="34" charset="-122"/>
+                <a:cs typeface="Calibri" pitchFamily="34" charset="-120"/>
+              </a:rPr>
+              <a:t>Today: a verified outage and the map. Care: enter 300 W and 1000 Wh. Book a carer. Moderation: [URL]/admin, token [DEMO ADMIN TOKEN]</a:t>
             </a:r>
             <a:endParaRPr lang="en-US" sz="1400" dirty="0"/>
           </a:p>
@@ -2326,7 +4925,7 @@
         </p:nvSpPr>
         <p:spPr>
           <a:xfrm>
-            <a:off x="457200" y="320040"/>
+            <a:off x="457200" y="274320"/>
             <a:ext cx="8229600" cy="640080"/>
           </a:xfrm>
           <a:prstGeom prst="rect">
@@ -2343,7 +4942,7 @@
               <a:buNone/>
             </a:pPr>
             <a:r>
-              <a:rPr lang="en-US" sz="3400" b="1" dirty="0">
+              <a:rPr lang="en-US" sz="3000" b="1" dirty="0">
                 <a:solidFill>
                   <a:srgbClr val="2E2457"/>
                 </a:solidFill>
@@ -2351,26 +4950,260 @@
                 <a:ea typeface="Cambria" pitchFamily="34" charset="-122"/>
                 <a:cs typeface="Cambria" pitchFamily="34" charset="-120"/>
               </a:rPr>
-              <a:t>When the grid fails, kasi carries the cost</a:t>
-            </a:r>
-            <a:endParaRPr lang="en-US" sz="3400" dirty="0"/>
-          </a:p>
-        </p:txBody>
-      </p:sp>
-      <p:sp>
-        <p:nvSpPr>
-          <p:cNvPr id="3" name="Shape 1"/>
+              <a:t>The grid is better. Kasi still goes dark.</a:t>
+            </a:r>
+            <a:endParaRPr lang="en-US" sz="3000" dirty="0"/>
+          </a:p>
+        </p:txBody>
+      </p:sp>
+      <p:sp>
+        <p:nvSpPr>
+          <p:cNvPr id="3" name="Text 1"/>
+          <p:cNvSpPr txBox="1"/>
+          <p:nvPr/>
+        </p:nvSpPr>
+        <p:spPr>
+          <a:xfrm>
+            <a:off x="457200" y="1097280"/>
+            <a:ext cx="2651760" cy="822960"/>
+          </a:xfrm>
+          <a:prstGeom prst="rect">
+            <a:avLst/>
+          </a:prstGeom>
+          <a:noFill/>
+          <a:ln/>
+        </p:spPr>
+        <p:txBody>
+          <a:bodyPr wrap="square" lIns="0" tIns="0" rIns="0" bIns="0" rtlCol="0" anchor="ctr"/>
+          <a:lstStyle/>
+          <a:p>
+            <a:pPr indent="0" marL="0">
+              <a:buNone/>
+            </a:pPr>
+            <a:r>
+              <a:rPr lang="en-US" sz="4600" b="1" dirty="0">
+                <a:solidFill>
+                  <a:srgbClr val="6A57B8"/>
+                </a:solidFill>
+                <a:latin typeface="Cambria" pitchFamily="34" charset="0"/>
+                <a:ea typeface="Cambria" pitchFamily="34" charset="-122"/>
+                <a:cs typeface="Cambria" pitchFamily="34" charset="-120"/>
+              </a:rPr>
+              <a:t>504 days</a:t>
+            </a:r>
+            <a:endParaRPr lang="en-US" sz="4600" dirty="0"/>
+          </a:p>
+        </p:txBody>
+      </p:sp>
+      <p:sp>
+        <p:nvSpPr>
+          <p:cNvPr id="4" name="Text 2"/>
+          <p:cNvSpPr txBox="1"/>
+          <p:nvPr/>
+        </p:nvSpPr>
+        <p:spPr>
+          <a:xfrm>
+            <a:off x="457200" y="1965960"/>
+            <a:ext cx="2651760" cy="822960"/>
+          </a:xfrm>
+          <a:prstGeom prst="rect">
+            <a:avLst/>
+          </a:prstGeom>
+          <a:noFill/>
+          <a:ln/>
+        </p:spPr>
+        <p:txBody>
+          <a:bodyPr wrap="square" lIns="0" tIns="0" rIns="0" bIns="0" rtlCol="0" anchor="t"/>
+          <a:lstStyle/>
+          <a:p>
+            <a:pPr indent="0" marL="0">
+              <a:buNone/>
+            </a:pPr>
+            <a:r>
+              <a:rPr lang="en-US" sz="1400" dirty="0">
+                <a:solidFill>
+                  <a:srgbClr val="241F38"/>
+                </a:solidFill>
+                <a:latin typeface="Calibri" pitchFamily="34" charset="0"/>
+                <a:ea typeface="Calibri" pitchFamily="34" charset="-122"/>
+                <a:cs typeface="Calibri" pitchFamily="34" charset="-120"/>
+              </a:rPr>
+              <a:t>without loadshedding (Eskom, 2 Oct 2026). There is no stage or schedule left to check.</a:t>
+            </a:r>
+            <a:endParaRPr lang="en-US" sz="1400" dirty="0"/>
+          </a:p>
+        </p:txBody>
+      </p:sp>
+      <p:sp>
+        <p:nvSpPr>
+          <p:cNvPr id="5" name="Text 3"/>
+          <p:cNvSpPr txBox="1"/>
+          <p:nvPr/>
+        </p:nvSpPr>
+        <p:spPr>
+          <a:xfrm>
+            <a:off x="3291840" y="1097280"/>
+            <a:ext cx="2651760" cy="822960"/>
+          </a:xfrm>
+          <a:prstGeom prst="rect">
+            <a:avLst/>
+          </a:prstGeom>
+          <a:noFill/>
+          <a:ln/>
+        </p:spPr>
+        <p:txBody>
+          <a:bodyPr wrap="square" lIns="0" tIns="0" rIns="0" bIns="0" rtlCol="0" anchor="ctr"/>
+          <a:lstStyle/>
+          <a:p>
+            <a:pPr indent="0" marL="0">
+              <a:buNone/>
+            </a:pPr>
+            <a:r>
+              <a:rPr lang="en-US" sz="4600" b="1" dirty="0">
+                <a:solidFill>
+                  <a:srgbClr val="C0392B"/>
+                </a:solidFill>
+                <a:latin typeface="Cambria" pitchFamily="34" charset="0"/>
+                <a:ea typeface="Cambria" pitchFamily="34" charset="-122"/>
+                <a:cs typeface="Cambria" pitchFamily="34" charset="-120"/>
+              </a:rPr>
+              <a:t>202,590</a:t>
+            </a:r>
+            <a:endParaRPr lang="en-US" sz="4600" dirty="0"/>
+          </a:p>
+        </p:txBody>
+      </p:sp>
+      <p:sp>
+        <p:nvSpPr>
+          <p:cNvPr id="6" name="Text 4"/>
+          <p:cNvSpPr txBox="1"/>
+          <p:nvPr/>
+        </p:nvSpPr>
+        <p:spPr>
+          <a:xfrm>
+            <a:off x="3291840" y="1965960"/>
+            <a:ext cx="2651760" cy="822960"/>
+          </a:xfrm>
+          <a:prstGeom prst="rect">
+            <a:avLst/>
+          </a:prstGeom>
+          <a:noFill/>
+          <a:ln/>
+        </p:spPr>
+        <p:txBody>
+          <a:bodyPr wrap="square" lIns="0" tIns="0" rIns="0" bIns="0" rtlCol="0" anchor="t"/>
+          <a:lstStyle/>
+          <a:p>
+            <a:pPr indent="0" marL="0">
+              <a:buNone/>
+            </a:pPr>
+            <a:r>
+              <a:rPr lang="en-US" sz="1400" dirty="0">
+                <a:solidFill>
+                  <a:srgbClr val="241F38"/>
+                </a:solidFill>
+                <a:latin typeface="Calibri" pitchFamily="34" charset="0"/>
+                <a:ea typeface="Calibri" pitchFamily="34" charset="-122"/>
+                <a:cs typeface="Calibri" pitchFamily="34" charset="-120"/>
+              </a:rPr>
+              <a:t>Eskom customers still on local load reduction: illegal connections, overloaded transformers. Cable theft and faults add more.</a:t>
+            </a:r>
+            <a:endParaRPr lang="en-US" sz="1400" dirty="0"/>
+          </a:p>
+        </p:txBody>
+      </p:sp>
+      <p:sp>
+        <p:nvSpPr>
+          <p:cNvPr id="7" name="Text 5"/>
+          <p:cNvSpPr txBox="1"/>
+          <p:nvPr/>
+        </p:nvSpPr>
+        <p:spPr>
+          <a:xfrm>
+            <a:off x="6126480" y="1097280"/>
+            <a:ext cx="2651760" cy="822960"/>
+          </a:xfrm>
+          <a:prstGeom prst="rect">
+            <a:avLst/>
+          </a:prstGeom>
+          <a:noFill/>
+          <a:ln/>
+        </p:spPr>
+        <p:txBody>
+          <a:bodyPr wrap="square" lIns="0" tIns="0" rIns="0" bIns="0" rtlCol="0" anchor="ctr"/>
+          <a:lstStyle/>
+          <a:p>
+            <a:pPr indent="0" marL="0">
+              <a:buNone/>
+            </a:pPr>
+            <a:r>
+              <a:rPr lang="en-US" sz="4600" b="1" dirty="0">
+                <a:solidFill>
+                  <a:srgbClr val="C0392B"/>
+                </a:solidFill>
+                <a:latin typeface="Cambria" pitchFamily="34" charset="0"/>
+                <a:ea typeface="Cambria" pitchFamily="34" charset="-122"/>
+                <a:cs typeface="Cambria" pitchFamily="34" charset="-120"/>
+              </a:rPr>
+              <a:t>22</a:t>
+            </a:r>
+            <a:endParaRPr lang="en-US" sz="4600" dirty="0"/>
+          </a:p>
+        </p:txBody>
+      </p:sp>
+      <p:sp>
+        <p:nvSpPr>
+          <p:cNvPr id="8" name="Text 6"/>
+          <p:cNvSpPr txBox="1"/>
+          <p:nvPr/>
+        </p:nvSpPr>
+        <p:spPr>
+          <a:xfrm>
+            <a:off x="6126480" y="1965960"/>
+            <a:ext cx="2651760" cy="822960"/>
+          </a:xfrm>
+          <a:prstGeom prst="rect">
+            <a:avLst/>
+          </a:prstGeom>
+          <a:noFill/>
+          <a:ln/>
+        </p:spPr>
+        <p:txBody>
+          <a:bodyPr wrap="square" lIns="0" tIns="0" rIns="0" bIns="0" rtlCol="0" anchor="t"/>
+          <a:lstStyle/>
+          <a:p>
+            <a:pPr indent="0" marL="0">
+              <a:buNone/>
+            </a:pPr>
+            <a:r>
+              <a:rPr lang="en-US" sz="1400" dirty="0">
+                <a:solidFill>
+                  <a:srgbClr val="241F38"/>
+                </a:solidFill>
+                <a:latin typeface="Calibri" pitchFamily="34" charset="0"/>
+                <a:ea typeface="Calibri" pitchFamily="34" charset="-122"/>
+                <a:cs typeface="Calibri" pitchFamily="34" charset="-120"/>
+              </a:rPr>
+              <a:t>major water outages in two weeks in Johannesburg, January 2026. 50,536 pipe leaks in a year.</a:t>
+            </a:r>
+            <a:endParaRPr lang="en-US" sz="1400" dirty="0"/>
+          </a:p>
+        </p:txBody>
+      </p:sp>
+      <p:sp>
+        <p:nvSpPr>
+          <p:cNvPr id="9" name="Shape 7"/>
           <p:cNvSpPr/>
           <p:nvPr/>
         </p:nvSpPr>
         <p:spPr>
           <a:xfrm>
-            <a:off x="457200" y="1188720"/>
-            <a:ext cx="2651760" cy="2103120"/>
+            <a:off x="457200" y="3063240"/>
+            <a:ext cx="8229600" cy="1325880"/>
           </a:xfrm>
           <a:prstGeom prst="roundRect">
             <a:avLst>
-              <a:gd name="adj" fmla="val 5217"/>
+              <a:gd name="adj" fmla="val 8276"/>
             </a:avLst>
           </a:prstGeom>
           <a:solidFill>
@@ -2386,14 +5219,14 @@
       </p:sp>
       <p:sp>
         <p:nvSpPr>
-          <p:cNvPr id="4" name="Text 2"/>
-          <p:cNvSpPr txBox="1"/>
-          <p:nvPr/>
-        </p:nvSpPr>
-        <p:spPr>
-          <a:xfrm>
-            <a:off x="640080" y="1325880"/>
-            <a:ext cx="2286000" cy="365760"/>
+          <p:cNvPr id="10" name="Text 8"/>
+          <p:cNvSpPr txBox="1"/>
+          <p:nvPr/>
+        </p:nvSpPr>
+        <p:spPr>
+          <a:xfrm>
+            <a:off x="640080" y="3200400"/>
+            <a:ext cx="7863840" cy="365760"/>
           </a:xfrm>
           <a:prstGeom prst="rect">
             <a:avLst/>
@@ -2417,7 +5250,7 @@
                 <a:ea typeface="Cambria" pitchFamily="34" charset="-122"/>
                 <a:cs typeface="Cambria" pitchFamily="34" charset="-120"/>
               </a:rPr>
-              <a:t>Information gap</a:t>
+              <a:t>What a family sees</a:t>
             </a:r>
             <a:endParaRPr lang="en-US" sz="1800" dirty="0"/>
           </a:p>
@@ -2425,14 +5258,14 @@
       </p:sp>
       <p:sp>
         <p:nvSpPr>
-          <p:cNvPr id="5" name="Text 3"/>
-          <p:cNvSpPr txBox="1"/>
-          <p:nvPr/>
-        </p:nvSpPr>
-        <p:spPr>
-          <a:xfrm>
-            <a:off x="640080" y="1737360"/>
-            <a:ext cx="2286000" cy="1417320"/>
+          <p:cNvPr id="11" name="Text 9"/>
+          <p:cNvSpPr txBox="1"/>
+          <p:nvPr/>
+        </p:nvSpPr>
+        <p:spPr>
+          <a:xfrm>
+            <a:off x="640080" y="3611880"/>
+            <a:ext cx="7863840" cy="640080"/>
           </a:xfrm>
           <a:prstGeom prst="rect">
             <a:avLst/>
@@ -2456,7 +5289,7 @@
                 <a:ea typeface="Calibri" pitchFamily="34" charset="-122"/>
                 <a:cs typeface="Calibri" pitchFamily="34" charset="-120"/>
               </a:rPr>
-              <a:t>Official schedules are generic. Residents learn about a burst pipe or dead transformer from a WhatsApp rumour.</a:t>
+              <a:t>The power or water goes off on one street. Nobody says why or for how long. A WhatsApp rumour decides whether the fridge stays shut, the oxygen concentrator switches to battery, or the spaza closes. Some households cannot wait to find out.</a:t>
             </a:r>
             <a:endParaRPr lang="en-US" sz="1400" dirty="0"/>
           </a:p>
@@ -2464,41 +5297,14 @@
       </p:sp>
       <p:sp>
         <p:nvSpPr>
-          <p:cNvPr id="6" name="Shape 4"/>
-          <p:cNvSpPr/>
-          <p:nvPr/>
-        </p:nvSpPr>
-        <p:spPr>
-          <a:xfrm>
-            <a:off x="3246120" y="1188720"/>
-            <a:ext cx="2651760" cy="2103120"/>
-          </a:xfrm>
-          <a:prstGeom prst="roundRect">
-            <a:avLst>
-              <a:gd name="adj" fmla="val 5217"/>
-            </a:avLst>
-          </a:prstGeom>
-          <a:solidFill>
-            <a:srgbClr val="F4F1FC"/>
-          </a:solidFill>
-          <a:ln w="12700">
-            <a:solidFill>
-              <a:srgbClr val="F4F1FC"/>
-            </a:solidFill>
-            <a:prstDash val="solid"/>
-          </a:ln>
-        </p:spPr>
-      </p:sp>
-      <p:sp>
-        <p:nvSpPr>
-          <p:cNvPr id="7" name="Text 5"/>
-          <p:cNvSpPr txBox="1"/>
-          <p:nvPr/>
-        </p:nvSpPr>
-        <p:spPr>
-          <a:xfrm>
-            <a:off x="3429000" y="1325880"/>
-            <a:ext cx="2286000" cy="365760"/>
+          <p:cNvPr id="12" name="Text 10"/>
+          <p:cNvSpPr txBox="1"/>
+          <p:nvPr/>
+        </p:nvSpPr>
+        <p:spPr>
+          <a:xfrm>
+            <a:off x="457200" y="4663440"/>
+            <a:ext cx="8229600" cy="274320"/>
           </a:xfrm>
           <a:prstGeom prst="rect">
             <a:avLst/>
@@ -2514,200 +5320,17 @@
               <a:buNone/>
             </a:pPr>
             <a:r>
-              <a:rPr lang="en-US" sz="1800" b="1" dirty="0">
-                <a:solidFill>
-                  <a:srgbClr val="6A57B8"/>
-                </a:solidFill>
-                <a:latin typeface="Cambria" pitchFamily="34" charset="0"/>
-                <a:ea typeface="Cambria" pitchFamily="34" charset="-122"/>
-                <a:cs typeface="Cambria" pitchFamily="34" charset="-120"/>
-              </a:rPr>
-              <a:t>Money drain</a:t>
-            </a:r>
-            <a:endParaRPr lang="en-US" sz="1800" dirty="0"/>
-          </a:p>
-        </p:txBody>
-      </p:sp>
-      <p:sp>
-        <p:nvSpPr>
-          <p:cNvPr id="8" name="Text 6"/>
-          <p:cNvSpPr txBox="1"/>
-          <p:nvPr/>
-        </p:nvSpPr>
-        <p:spPr>
-          <a:xfrm>
-            <a:off x="3429000" y="1737360"/>
-            <a:ext cx="2286000" cy="1417320"/>
-          </a:xfrm>
-          <a:prstGeom prst="rect">
-            <a:avLst/>
-          </a:prstGeom>
-          <a:noFill/>
-          <a:ln/>
-        </p:spPr>
-        <p:txBody>
-          <a:bodyPr wrap="square" lIns="0" tIns="0" rIns="0" bIns="0" rtlCol="0" anchor="t"/>
-          <a:lstStyle/>
-          <a:p>
-            <a:pPr indent="0" marL="0">
-              <a:buNone/>
-            </a:pPr>
-            <a:r>
-              <a:rPr lang="en-US" sz="1400" dirty="0">
-                <a:solidFill>
-                  <a:srgbClr val="241F38"/>
+              <a:rPr lang="en-US" sz="1000" dirty="0">
+                <a:solidFill>
+                  <a:srgbClr val="5F5978"/>
                 </a:solidFill>
                 <a:latin typeface="Calibri" pitchFamily="34" charset="0"/>
                 <a:ea typeface="Calibri" pitchFamily="34" charset="-122"/>
                 <a:cs typeface="Calibri" pitchFamily="34" charset="-120"/>
               </a:rPr>
-              <a:t>Spaza owners lose stock to outages. Households pay more for the same food because prices are invisible.</a:t>
-            </a:r>
-            <a:endParaRPr lang="en-US" sz="1400" dirty="0"/>
-          </a:p>
-        </p:txBody>
-      </p:sp>
-      <p:sp>
-        <p:nvSpPr>
-          <p:cNvPr id="9" name="Shape 7"/>
-          <p:cNvSpPr/>
-          <p:nvPr/>
-        </p:nvSpPr>
-        <p:spPr>
-          <a:xfrm>
-            <a:off x="6035040" y="1188720"/>
-            <a:ext cx="2651760" cy="2103120"/>
-          </a:xfrm>
-          <a:prstGeom prst="roundRect">
-            <a:avLst>
-              <a:gd name="adj" fmla="val 5217"/>
-            </a:avLst>
-          </a:prstGeom>
-          <a:solidFill>
-            <a:srgbClr val="F4F1FC"/>
-          </a:solidFill>
-          <a:ln w="12700">
-            <a:solidFill>
-              <a:srgbClr val="F4F1FC"/>
-            </a:solidFill>
-            <a:prstDash val="solid"/>
-          </a:ln>
-        </p:spPr>
-      </p:sp>
-      <p:sp>
-        <p:nvSpPr>
-          <p:cNvPr id="10" name="Text 8"/>
-          <p:cNvSpPr txBox="1"/>
-          <p:nvPr/>
-        </p:nvSpPr>
-        <p:spPr>
-          <a:xfrm>
-            <a:off x="6217920" y="1325880"/>
-            <a:ext cx="2286000" cy="365760"/>
-          </a:xfrm>
-          <a:prstGeom prst="rect">
-            <a:avLst/>
-          </a:prstGeom>
-          <a:noFill/>
-          <a:ln/>
-        </p:spPr>
-        <p:txBody>
-          <a:bodyPr wrap="square" lIns="0" tIns="0" rIns="0" bIns="0" rtlCol="0" anchor="ctr"/>
-          <a:lstStyle/>
-          <a:p>
-            <a:pPr indent="0" marL="0">
-              <a:buNone/>
-            </a:pPr>
-            <a:r>
-              <a:rPr lang="en-US" sz="1800" b="1" dirty="0">
-                <a:solidFill>
-                  <a:srgbClr val="6A57B8"/>
-                </a:solidFill>
-                <a:latin typeface="Cambria" pitchFamily="34" charset="0"/>
-                <a:ea typeface="Cambria" pitchFamily="34" charset="-122"/>
-                <a:cs typeface="Cambria" pitchFamily="34" charset="-120"/>
-              </a:rPr>
-              <a:t>Trust gap</a:t>
-            </a:r>
-            <a:endParaRPr lang="en-US" sz="1800" dirty="0"/>
-          </a:p>
-        </p:txBody>
-      </p:sp>
-      <p:sp>
-        <p:nvSpPr>
-          <p:cNvPr id="11" name="Text 9"/>
-          <p:cNvSpPr txBox="1"/>
-          <p:nvPr/>
-        </p:nvSpPr>
-        <p:spPr>
-          <a:xfrm>
-            <a:off x="6217920" y="1737360"/>
-            <a:ext cx="2286000" cy="1417320"/>
-          </a:xfrm>
-          <a:prstGeom prst="rect">
-            <a:avLst/>
-          </a:prstGeom>
-          <a:noFill/>
-          <a:ln/>
-        </p:spPr>
-        <p:txBody>
-          <a:bodyPr wrap="square" lIns="0" tIns="0" rIns="0" bIns="0" rtlCol="0" anchor="t"/>
-          <a:lstStyle/>
-          <a:p>
-            <a:pPr indent="0" marL="0">
-              <a:buNone/>
-            </a:pPr>
-            <a:r>
-              <a:rPr lang="en-US" sz="1400" dirty="0">
-                <a:solidFill>
-                  <a:srgbClr val="241F38"/>
-                </a:solidFill>
-                <a:latin typeface="Calibri" pitchFamily="34" charset="0"/>
-                <a:ea typeface="Calibri" pitchFamily="34" charset="-122"/>
-                <a:cs typeface="Calibri" pitchFamily="34" charset="-120"/>
-              </a:rPr>
-              <a:t>Nobody knows if a report is real. Help offered by neighbours never reaches those who need it.</a:t>
-            </a:r>
-            <a:endParaRPr lang="en-US" sz="1400" dirty="0"/>
-          </a:p>
-        </p:txBody>
-      </p:sp>
-      <p:sp>
-        <p:nvSpPr>
-          <p:cNvPr id="12" name="Text 10"/>
-          <p:cNvSpPr txBox="1"/>
-          <p:nvPr/>
-        </p:nvSpPr>
-        <p:spPr>
-          <a:xfrm>
-            <a:off x="457200" y="3611880"/>
-            <a:ext cx="8229600" cy="822960"/>
-          </a:xfrm>
-          <a:prstGeom prst="rect">
-            <a:avLst/>
-          </a:prstGeom>
-          <a:noFill/>
-          <a:ln/>
-        </p:spPr>
-        <p:txBody>
-          <a:bodyPr wrap="square" lIns="0" tIns="0" rIns="0" bIns="0" rtlCol="0" anchor="ctr"/>
-          <a:lstStyle/>
-          <a:p>
-            <a:pPr indent="0" marL="0">
-              <a:buNone/>
-            </a:pPr>
-            <a:r>
-              <a:rPr lang="en-US" sz="2000" i="1" dirty="0">
-                <a:solidFill>
-                  <a:srgbClr val="2E2457"/>
-                </a:solidFill>
-                <a:latin typeface="Cambria" pitchFamily="34" charset="0"/>
-                <a:ea typeface="Cambria" pitchFamily="34" charset="-122"/>
-                <a:cs typeface="Cambria" pitchFamily="34" charset="-120"/>
-              </a:rPr>
-              <a:t>Kasi Grid turns what neighbours see into verified, local, actionable information, in four languages, even offline.</a:t>
-            </a:r>
-            <a:endParaRPr lang="en-US" sz="2000" dirty="0"/>
+              <a:t>Sources: Eskom statements and SAnews (Oct 2026); parliamentary reply on load reduction (PMG); Daily Maverick (Jan 2026); allAfrica (Aug 2026).</a:t>
+            </a:r>
+            <a:endParaRPr lang="en-US" sz="1000" dirty="0"/>
           </a:p>
         </p:txBody>
       </p:sp>
@@ -2722,6 +5345,276 @@
 <file path=ppt/slides/slide3.xml><?xml version="1.0" encoding="utf-8"?>
 <p:sld xmlns:a="http://schemas.openxmlformats.org/drawingml/2006/main" xmlns:r="http://schemas.openxmlformats.org/officeDocument/2006/relationships" xmlns:p="http://schemas.openxmlformats.org/presentationml/2006/main">
   <p:cSld name="Slide 3">
+    <p:bg>
+      <p:bgPr>
+        <a:solidFill>
+          <a:srgbClr val="2E2457"/>
+        </a:solidFill>
+      </p:bgPr>
+    </p:bg>
+    <p:spTree>
+      <p:nvGrpSpPr>
+        <p:cNvPr id="1" name=""/>
+        <p:cNvGrpSpPr/>
+        <p:nvPr/>
+      </p:nvGrpSpPr>
+      <p:grpSpPr>
+        <a:xfrm>
+          <a:off x="0" y="0"/>
+          <a:ext cx="0" cy="0"/>
+          <a:chOff x="0" y="0"/>
+          <a:chExt cx="0" cy="0"/>
+        </a:xfrm>
+      </p:grpSpPr>
+      <p:sp>
+        <p:nvSpPr>
+          <p:cNvPr id="2" name="Text 0"/>
+          <p:cNvSpPr txBox="1"/>
+          <p:nvPr/>
+        </p:nvSpPr>
+        <p:spPr>
+          <a:xfrm>
+            <a:off x="457200" y="274320"/>
+            <a:ext cx="8229600" cy="640080"/>
+          </a:xfrm>
+          <a:prstGeom prst="rect">
+            <a:avLst/>
+          </a:prstGeom>
+          <a:noFill/>
+          <a:ln/>
+        </p:spPr>
+        <p:txBody>
+          <a:bodyPr wrap="square" lIns="0" tIns="0" rIns="0" bIns="0" rtlCol="0" anchor="ctr"/>
+          <a:lstStyle/>
+          <a:p>
+            <a:pPr indent="0" marL="0">
+              <a:buNone/>
+            </a:pPr>
+            <a:r>
+              <a:rPr lang="en-US" sz="3000" b="1" dirty="0">
+                <a:solidFill>
+                  <a:srgbClr val="FFFFFF"/>
+                </a:solidFill>
+                <a:latin typeface="Cambria" pitchFamily="34" charset="0"/>
+                <a:ea typeface="Cambria" pitchFamily="34" charset="-122"/>
+                <a:cs typeface="Cambria" pitchFamily="34" charset="-120"/>
+              </a:rPr>
+              <a:t>The street, felt: an outage you can see, hear and scrub through</a:t>
+            </a:r>
+            <a:endParaRPr lang="en-US" sz="3000" dirty="0"/>
+          </a:p>
+        </p:txBody>
+      </p:sp>
+      <p:pic>
+        <p:nvPicPr>
+          <p:cNvPr id="3" name="Image 0" descr="shots/street.png">    </p:cNvPr>
+          <p:cNvPicPr>
+            <a:picLocks noChangeAspect="1"/>
+          </p:cNvPicPr>
+          <p:nvPr/>
+        </p:nvPicPr>
+        <p:blipFill>
+          <a:blip r:embed="rId1"/>
+          <a:stretch>
+            <a:fillRect/>
+          </a:stretch>
+        </p:blipFill>
+        <p:spPr>
+          <a:xfrm>
+            <a:off x="457200" y="1005840"/>
+            <a:ext cx="1741613" cy="3566160"/>
+          </a:xfrm>
+          <a:prstGeom prst="rect">
+            <a:avLst/>
+          </a:prstGeom>
+          <a:effectLst>
+            <a:outerShdw sx="100000" sy="100000" kx="0" ky="0" algn="bl" rotWithShape="0" blurRad="101600" dist="38100" dir="5400000">
+              <a:srgbClr val="000000">
+                <a:alpha val="25000"/>
+              </a:srgbClr>
+            </a:outerShdw>
+          </a:effectLst>
+        </p:spPr>
+      </p:pic>
+      <p:pic>
+        <p:nvPicPr>
+          <p:cNvPr id="4" name="Image 1" descr="shots/street-later.png">    </p:cNvPr>
+          <p:cNvPicPr>
+            <a:picLocks noChangeAspect="1"/>
+          </p:cNvPicPr>
+          <p:nvPr/>
+        </p:nvPicPr>
+        <p:blipFill>
+          <a:blip r:embed="rId2"/>
+          <a:stretch>
+            <a:fillRect/>
+          </a:stretch>
+        </p:blipFill>
+        <p:spPr>
+          <a:xfrm>
+            <a:off x="2514600" y="1005840"/>
+            <a:ext cx="1741613" cy="3566160"/>
+          </a:xfrm>
+          <a:prstGeom prst="rect">
+            <a:avLst/>
+          </a:prstGeom>
+          <a:effectLst>
+            <a:outerShdw sx="100000" sy="100000" kx="0" ky="0" algn="bl" rotWithShape="0" blurRad="101600" dist="38100" dir="5400000">
+              <a:srgbClr val="000000">
+                <a:alpha val="25000"/>
+              </a:srgbClr>
+            </a:outerShdw>
+          </a:effectLst>
+        </p:spPr>
+      </p:pic>
+      <p:pic>
+        <p:nvPicPr>
+          <p:cNvPr id="5" name="Image 2" descr="shots/orb.png">    </p:cNvPr>
+          <p:cNvPicPr>
+            <a:picLocks noChangeAspect="1"/>
+          </p:cNvPicPr>
+          <p:nvPr/>
+        </p:nvPicPr>
+        <p:blipFill>
+          <a:blip r:embed="rId3"/>
+          <a:stretch>
+            <a:fillRect/>
+          </a:stretch>
+        </p:blipFill>
+        <p:spPr>
+          <a:xfrm>
+            <a:off x="4572000" y="1005840"/>
+            <a:ext cx="1741613" cy="3566160"/>
+          </a:xfrm>
+          <a:prstGeom prst="rect">
+            <a:avLst/>
+          </a:prstGeom>
+          <a:effectLst>
+            <a:outerShdw sx="100000" sy="100000" kx="0" ky="0" algn="bl" rotWithShape="0" blurRad="101600" dist="38100" dir="5400000">
+              <a:srgbClr val="000000">
+                <a:alpha val="25000"/>
+              </a:srgbClr>
+            </a:outerShdw>
+          </a:effectLst>
+        </p:spPr>
+      </p:pic>
+      <p:sp>
+        <p:nvSpPr>
+          <p:cNvPr id="6" name="Text 1"/>
+          <p:cNvSpPr txBox="1"/>
+          <p:nvPr/>
+        </p:nvSpPr>
+        <p:spPr>
+          <a:xfrm>
+            <a:off x="6675120" y="1051560"/>
+            <a:ext cx="2194560" cy="3566160"/>
+          </a:xfrm>
+          <a:prstGeom prst="rect">
+            <a:avLst/>
+          </a:prstGeom>
+          <a:noFill/>
+          <a:ln/>
+        </p:spPr>
+        <p:txBody>
+          <a:bodyPr wrap="square" lIns="0" tIns="0" rIns="0" bIns="0" rtlCol="0" anchor="t"/>
+          <a:lstStyle/>
+          <a:p>
+            <a:pPr marL="342900" indent="-342900">
+              <a:spcAft>
+                <a:spcPts val="800"/>
+              </a:spcAft>
+              <a:buSzPct val="100000"/>
+              <a:buChar char="•"/>
+            </a:pPr>
+            <a:r>
+              <a:rPr lang="en-US" sz="1100" dirty="0">
+                <a:solidFill>
+                  <a:srgbClr val="FFFFFF"/>
+                </a:solidFill>
+                <a:latin typeface="Calibri" pitchFamily="34" charset="0"/>
+                <a:ea typeface="Calibri" pitchFamily="34" charset="-122"/>
+                <a:cs typeface="Calibri" pitchFamily="34" charset="-120"/>
+              </a:rPr>
+              <a:t>Every home is a dot. 40% outage risk darkens about 40% of them, so the odds are visible</a:t>
+            </a:r>
+            <a:endParaRPr lang="en-US" sz="1100" dirty="0"/>
+          </a:p>
+          <a:p>
+            <a:pPr marL="342900" indent="-342900">
+              <a:spcAft>
+                <a:spcPts val="800"/>
+              </a:spcAft>
+              <a:buSzPct val="100000"/>
+              <a:buChar char="•"/>
+            </a:pPr>
+            <a:r>
+              <a:rPr lang="en-US" sz="1100" dirty="0">
+                <a:solidFill>
+                  <a:srgbClr val="FFFFFF"/>
+                </a:solidFill>
+                <a:latin typeface="Calibri" pitchFamily="34" charset="0"/>
+                <a:ea typeface="Calibri" pitchFamily="34" charset="-122"/>
+                <a:cs typeface="Calibri" pitchFamily="34" charset="-120"/>
+              </a:rPr>
+              <a:t>Drag through the next 48 hours and watch the street dim and relight</a:t>
+            </a:r>
+            <a:endParaRPr lang="en-US" sz="1100" dirty="0"/>
+          </a:p>
+          <a:p>
+            <a:pPr marL="342900" indent="-342900">
+              <a:spcAft>
+                <a:spcPts val="800"/>
+              </a:spcAft>
+              <a:buSzPct val="100000"/>
+              <a:buChar char="•"/>
+            </a:pPr>
+            <a:r>
+              <a:rPr lang="en-US" sz="1100" dirty="0">
+                <a:solidFill>
+                  <a:srgbClr val="FFFFFF"/>
+                </a:solidFill>
+                <a:latin typeface="Calibri" pitchFamily="34" charset="0"/>
+                <a:ea typeface="Calibri" pitchFamily="34" charset="-122"/>
+                <a:cs typeface="Calibri" pitchFamily="34" charset="-120"/>
+              </a:rPr>
+              <a:t>Hear it and Tell me: a chord that goes out of tune, a spoken summary and a heartbeat vibration, for people who cannot read the screen</a:t>
+            </a:r>
+            <a:endParaRPr lang="en-US" sz="1100" dirty="0"/>
+          </a:p>
+          <a:p>
+            <a:pPr marL="342900" indent="-342900">
+              <a:spcAft>
+                <a:spcPts val="800"/>
+              </a:spcAft>
+              <a:buSzPct val="100000"/>
+              <a:buChar char="•"/>
+            </a:pPr>
+            <a:r>
+              <a:rPr lang="en-US" sz="1100" dirty="0">
+                <a:solidFill>
+                  <a:srgbClr val="FFFFFF"/>
+                </a:solidFill>
+                <a:latin typeface="Calibri" pitchFamily="34" charset="0"/>
+                <a:ea typeface="Calibri" pitchFamily="34" charset="-122"/>
+                <a:cs typeface="Calibri" pitchFamily="34" charset="-120"/>
+              </a:rPr>
+              <a:t>The whole app takes the mood of the street: calm, amber, red</a:t>
+            </a:r>
+            <a:endParaRPr lang="en-US" sz="1100" dirty="0"/>
+          </a:p>
+        </p:txBody>
+      </p:sp>
+    </p:spTree>
+  </p:cSld>
+  <p:clrMapOvr>
+    <a:masterClrMapping/>
+  </p:clrMapOvr>
+</p:sld>
+</file>
+
+<file path=ppt/slides/slide4.xml><?xml version="1.0" encoding="utf-8"?>
+<p:sld xmlns:a="http://schemas.openxmlformats.org/drawingml/2006/main" xmlns:r="http://schemas.openxmlformats.org/officeDocument/2006/relationships" xmlns:p="http://schemas.openxmlformats.org/presentationml/2006/main">
+  <p:cSld name="Slide 4">
     <p:bg>
       <p:bgPr>
         <a:solidFill>
@@ -2751,7 +5644,7 @@
         </p:nvSpPr>
         <p:spPr>
           <a:xfrm>
-            <a:off x="457200" y="320040"/>
+            <a:off x="457200" y="274320"/>
             <a:ext cx="8229600" cy="640080"/>
           </a:xfrm>
           <a:prstGeom prst="rect">
@@ -2768,7 +5661,7 @@
               <a:buNone/>
             </a:pPr>
             <a:r>
-              <a:rPr lang="en-US" sz="3400" b="1" dirty="0">
+              <a:rPr lang="en-US" sz="3000" b="1" dirty="0">
                 <a:solidFill>
                   <a:srgbClr val="2E2457"/>
                 </a:solidFill>
@@ -2776,15 +5669,15 @@
                 <a:ea typeface="Cambria" pitchFamily="34" charset="-122"/>
                 <a:cs typeface="Cambria" pitchFamily="34" charset="-120"/>
               </a:rPr>
-              <a:t>One app for the whole outage day</a:t>
-            </a:r>
-            <a:endParaRPr lang="en-US" sz="3400" dirty="0"/>
+              <a:t>Neighbours make it real: verified, local, on a map</a:t>
+            </a:r>
+            <a:endParaRPr lang="en-US" sz="3000" dirty="0"/>
           </a:p>
         </p:txBody>
       </p:sp>
       <p:pic>
         <p:nvPicPr>
-          <p:cNvPr id="3" name="Image 0" descr="shots/alerts.png">    </p:cNvPr>
+          <p:cNvPr id="3" name="Image 0" descr="shots/today.png">    </p:cNvPr>
           <p:cNvPicPr>
             <a:picLocks noChangeAspect="1"/>
           </p:cNvPicPr>
@@ -2799,7 +5692,7 @@
         <p:spPr>
           <a:xfrm>
             <a:off x="457200" y="1005840"/>
-            <a:ext cx="1920240" cy="3931920"/>
+            <a:ext cx="1830927" cy="3749040"/>
           </a:xfrm>
           <a:prstGeom prst="rect">
             <a:avLst/>
@@ -2813,16 +5706,47 @@
           </a:effectLst>
         </p:spPr>
       </p:pic>
-      <p:sp>
-        <p:nvSpPr>
-          <p:cNvPr id="4" name="Text 1"/>
-          <p:cNvSpPr txBox="1"/>
-          <p:nvPr/>
-        </p:nvSpPr>
-        <p:spPr>
-          <a:xfrm>
-            <a:off x="3017520" y="1005840"/>
-            <a:ext cx="5669280" cy="731520"/>
+      <p:pic>
+        <p:nvPicPr>
+          <p:cNvPr id="4" name="Image 1" descr="shots/map.png">    </p:cNvPr>
+          <p:cNvPicPr>
+            <a:picLocks noChangeAspect="1"/>
+          </p:cNvPicPr>
+          <p:nvPr/>
+        </p:nvPicPr>
+        <p:blipFill>
+          <a:blip r:embed="rId2"/>
+          <a:stretch>
+            <a:fillRect/>
+          </a:stretch>
+        </p:blipFill>
+        <p:spPr>
+          <a:xfrm>
+            <a:off x="2606040" y="1005840"/>
+            <a:ext cx="2743200" cy="4143080"/>
+          </a:xfrm>
+          <a:prstGeom prst="rect">
+            <a:avLst/>
+          </a:prstGeom>
+          <a:effectLst>
+            <a:outerShdw sx="100000" sy="100000" kx="0" ky="0" algn="bl" rotWithShape="0" blurRad="101600" dist="38100" dir="5400000">
+              <a:srgbClr val="000000">
+                <a:alpha val="25000"/>
+              </a:srgbClr>
+            </a:outerShdw>
+          </a:effectLst>
+        </p:spPr>
+      </p:pic>
+      <p:sp>
+        <p:nvSpPr>
+          <p:cNvPr id="5" name="Text 1"/>
+          <p:cNvSpPr txBox="1"/>
+          <p:nvPr/>
+        </p:nvSpPr>
+        <p:spPr>
+          <a:xfrm>
+            <a:off x="5577840" y="1097280"/>
+            <a:ext cx="3200400" cy="3291840"/>
           </a:xfrm>
           <a:prstGeom prst="rect">
             <a:avLst/>
@@ -2834,25 +5758,33 @@
           <a:bodyPr wrap="square" lIns="0" tIns="0" rIns="0" bIns="0" rtlCol="0" anchor="t"/>
           <a:lstStyle/>
           <a:p>
-            <a:pPr indent="0" marL="0">
-              <a:buNone/>
-            </a:pPr>
-            <a:r>
-              <a:rPr lang="en-US" sz="1400" b="1" dirty="0">
-                <a:solidFill>
-                  <a:srgbClr val="6A57B8"/>
+            <a:pPr marL="342900" indent="-342900">
+              <a:spcAft>
+                <a:spcPts val="800"/>
+              </a:spcAft>
+              <a:buSzPct val="100000"/>
+              <a:buChar char="•"/>
+            </a:pPr>
+            <a:r>
+              <a:rPr lang="en-US" sz="1400" dirty="0">
+                <a:solidFill>
+                  <a:srgbClr val="241F38"/>
                 </a:solidFill>
                 <a:latin typeface="Calibri" pitchFamily="34" charset="0"/>
                 <a:ea typeface="Calibri" pitchFamily="34" charset="-122"/>
                 <a:cs typeface="Calibri" pitchFamily="34" charset="-120"/>
               </a:rPr>
-              <a:t>Live status</a:t>
+              <a:t>3 or more different devices report the same problem and it becomes a Verified outage</a:t>
             </a:r>
             <a:endParaRPr lang="en-US" sz="1400" dirty="0"/>
           </a:p>
           <a:p>
-            <a:pPr indent="0" marL="0">
-              <a:buNone/>
+            <a:pPr marL="342900" indent="-342900">
+              <a:spcAft>
+                <a:spcPts val="800"/>
+              </a:spcAft>
+              <a:buSzPct val="100000"/>
+              <a:buChar char="•"/>
             </a:pPr>
             <a:r>
               <a:rPr lang="en-US" sz="1400" dirty="0">
@@ -2863,52 +5795,38 @@
                 <a:ea typeface="Calibri" pitchFamily="34" charset="-122"/>
                 <a:cs typeface="Calibri" pitchFamily="34" charset="-120"/>
               </a:rPr>
-              <a:t>Eskom stage, official time slots by area, weather alerts with advice</a:t>
+              <a:t>The map shows every suburb in the city: red verified, green back on, grey quiet</a:t>
             </a:r>
             <a:endParaRPr lang="en-US" sz="1400" dirty="0"/>
           </a:p>
-        </p:txBody>
-      </p:sp>
-      <p:sp>
-        <p:nvSpPr>
-          <p:cNvPr id="5" name="Text 2"/>
-          <p:cNvSpPr txBox="1"/>
-          <p:nvPr/>
-        </p:nvSpPr>
-        <p:spPr>
-          <a:xfrm>
-            <a:off x="3017520" y="1783080"/>
-            <a:ext cx="5669280" cy="731520"/>
-          </a:xfrm>
-          <a:prstGeom prst="rect">
-            <a:avLst/>
-          </a:prstGeom>
-          <a:noFill/>
-          <a:ln/>
-        </p:spPr>
-        <p:txBody>
-          <a:bodyPr wrap="square" lIns="0" tIns="0" rIns="0" bIns="0" rtlCol="0" anchor="t"/>
-          <a:lstStyle/>
-          <a:p>
-            <a:pPr indent="0" marL="0">
-              <a:buNone/>
-            </a:pPr>
-            <a:r>
-              <a:rPr lang="en-US" sz="1400" b="1" dirty="0">
-                <a:solidFill>
-                  <a:srgbClr val="6A57B8"/>
+          <a:p>
+            <a:pPr marL="342900" indent="-342900">
+              <a:spcAft>
+                <a:spcPts val="800"/>
+              </a:spcAft>
+              <a:buSzPct val="100000"/>
+              <a:buChar char="•"/>
+            </a:pPr>
+            <a:r>
+              <a:rPr lang="en-US" sz="1400" dirty="0">
+                <a:solidFill>
+                  <a:srgbClr val="241F38"/>
                 </a:solidFill>
                 <a:latin typeface="Calibri" pitchFamily="34" charset="0"/>
                 <a:ea typeface="Calibri" pitchFamily="34" charset="-122"/>
                 <a:cs typeface="Calibri" pitchFamily="34" charset="-120"/>
               </a:rPr>
-              <a:t>Neighbour reports</a:t>
+              <a:t>Neighbours vote "back on for me" and the alert closes itself</a:t>
             </a:r>
             <a:endParaRPr lang="en-US" sz="1400" dirty="0"/>
           </a:p>
           <a:p>
-            <a:pPr indent="0" marL="0">
-              <a:buNone/>
+            <a:pPr marL="342900" indent="-342900">
+              <a:spcAft>
+                <a:spcPts val="800"/>
+              </a:spcAft>
+              <a:buSzPct val="100000"/>
+              <a:buChar char="•"/>
             </a:pPr>
             <a:r>
               <a:rPr lang="en-US" sz="1400" dirty="0">
@@ -2919,175 +5837,7 @@
                 <a:ea typeface="Calibri" pitchFamily="34" charset="-122"/>
                 <a:cs typeface="Calibri" pitchFamily="34" charset="-120"/>
               </a:rPr>
-              <a:t>Power, water and road reports, confirmed by other residents</a:t>
-            </a:r>
-            <a:endParaRPr lang="en-US" sz="1400" dirty="0"/>
-          </a:p>
-        </p:txBody>
-      </p:sp>
-      <p:sp>
-        <p:nvSpPr>
-          <p:cNvPr id="6" name="Text 3"/>
-          <p:cNvSpPr txBox="1"/>
-          <p:nvPr/>
-        </p:nvSpPr>
-        <p:spPr>
-          <a:xfrm>
-            <a:off x="3017520" y="2560320"/>
-            <a:ext cx="5669280" cy="731520"/>
-          </a:xfrm>
-          <a:prstGeom prst="rect">
-            <a:avLst/>
-          </a:prstGeom>
-          <a:noFill/>
-          <a:ln/>
-        </p:spPr>
-        <p:txBody>
-          <a:bodyPr wrap="square" lIns="0" tIns="0" rIns="0" bIns="0" rtlCol="0" anchor="t"/>
-          <a:lstStyle/>
-          <a:p>
-            <a:pPr indent="0" marL="0">
-              <a:buNone/>
-            </a:pPr>
-            <a:r>
-              <a:rPr lang="en-US" sz="1400" b="1" dirty="0">
-                <a:solidFill>
-                  <a:srgbClr val="6A57B8"/>
-                </a:solidFill>
-                <a:latin typeface="Calibri" pitchFamily="34" charset="0"/>
-                <a:ea typeface="Calibri" pitchFamily="34" charset="-122"/>
-                <a:cs typeface="Calibri" pitchFamily="34" charset="-120"/>
-              </a:rPr>
-              <a:t>Share board</a:t>
-            </a:r>
-            <a:endParaRPr lang="en-US" sz="1400" dirty="0"/>
-          </a:p>
-          <a:p>
-            <a:pPr indent="0" marL="0">
-              <a:buNone/>
-            </a:pPr>
-            <a:r>
-              <a:rPr lang="en-US" sz="1400" dirty="0">
-                <a:solidFill>
-                  <a:srgbClr val="241F38"/>
-                </a:solidFill>
-                <a:latin typeface="Calibri" pitchFamily="34" charset="0"/>
-                <a:ea typeface="Calibri" pitchFamily="34" charset="-122"/>
-                <a:cs typeface="Calibri" pitchFamily="34" charset="-120"/>
-              </a:rPr>
-              <a:t>Offers and requests: charging, borehole water, lifts, freezer space</a:t>
-            </a:r>
-            <a:endParaRPr lang="en-US" sz="1400" dirty="0"/>
-          </a:p>
-        </p:txBody>
-      </p:sp>
-      <p:sp>
-        <p:nvSpPr>
-          <p:cNvPr id="7" name="Text 4"/>
-          <p:cNvSpPr txBox="1"/>
-          <p:nvPr/>
-        </p:nvSpPr>
-        <p:spPr>
-          <a:xfrm>
-            <a:off x="3017520" y="3337560"/>
-            <a:ext cx="5669280" cy="731520"/>
-          </a:xfrm>
-          <a:prstGeom prst="rect">
-            <a:avLst/>
-          </a:prstGeom>
-          <a:noFill/>
-          <a:ln/>
-        </p:spPr>
-        <p:txBody>
-          <a:bodyPr wrap="square" lIns="0" tIns="0" rIns="0" bIns="0" rtlCol="0" anchor="t"/>
-          <a:lstStyle/>
-          <a:p>
-            <a:pPr indent="0" marL="0">
-              <a:buNone/>
-            </a:pPr>
-            <a:r>
-              <a:rPr lang="en-US" sz="1400" b="1" dirty="0">
-                <a:solidFill>
-                  <a:srgbClr val="6A57B8"/>
-                </a:solidFill>
-                <a:latin typeface="Calibri" pitchFamily="34" charset="0"/>
-                <a:ea typeface="Calibri" pitchFamily="34" charset="-122"/>
-                <a:cs typeface="Calibri" pitchFamily="34" charset="-120"/>
-              </a:rPr>
-              <a:t>Nearby + food prices</a:t>
-            </a:r>
-            <a:endParaRPr lang="en-US" sz="1400" dirty="0"/>
-          </a:p>
-          <a:p>
-            <a:pPr indent="0" marL="0">
-              <a:buNone/>
-            </a:pPr>
-            <a:r>
-              <a:rPr lang="en-US" sz="1400" dirty="0">
-                <a:solidFill>
-                  <a:srgbClr val="241F38"/>
-                </a:solidFill>
-                <a:latin typeface="Calibri" pitchFamily="34" charset="0"/>
-                <a:ea typeface="Calibri" pitchFamily="34" charset="-122"/>
-                <a:cs typeface="Calibri" pitchFamily="34" charset="-120"/>
-              </a:rPr>
-              <a:t>Shops, clinics, food banks from OpenStreetMap, with community-reported staple prices</a:t>
-            </a:r>
-            <a:endParaRPr lang="en-US" sz="1400" dirty="0"/>
-          </a:p>
-        </p:txBody>
-      </p:sp>
-      <p:sp>
-        <p:nvSpPr>
-          <p:cNvPr id="8" name="Text 5"/>
-          <p:cNvSpPr txBox="1"/>
-          <p:nvPr/>
-        </p:nvSpPr>
-        <p:spPr>
-          <a:xfrm>
-            <a:off x="3017520" y="4114800"/>
-            <a:ext cx="5669280" cy="731520"/>
-          </a:xfrm>
-          <a:prstGeom prst="rect">
-            <a:avLst/>
-          </a:prstGeom>
-          <a:noFill/>
-          <a:ln/>
-        </p:spPr>
-        <p:txBody>
-          <a:bodyPr wrap="square" lIns="0" tIns="0" rIns="0" bIns="0" rtlCol="0" anchor="t"/>
-          <a:lstStyle/>
-          <a:p>
-            <a:pPr indent="0" marL="0">
-              <a:buNone/>
-            </a:pPr>
-            <a:r>
-              <a:rPr lang="en-US" sz="1400" b="1" dirty="0">
-                <a:solidFill>
-                  <a:srgbClr val="6A57B8"/>
-                </a:solidFill>
-                <a:latin typeface="Calibri" pitchFamily="34" charset="0"/>
-                <a:ea typeface="Calibri" pitchFamily="34" charset="-122"/>
-                <a:cs typeface="Calibri" pitchFamily="34" charset="-120"/>
-              </a:rPr>
-              <a:t>Savings + business</a:t>
-            </a:r>
-            <a:endParaRPr lang="en-US" sz="1400" dirty="0"/>
-          </a:p>
-          <a:p>
-            <a:pPr indent="0" marL="0">
-              <a:buNone/>
-            </a:pPr>
-            <a:r>
-              <a:rPr lang="en-US" sz="1400" dirty="0">
-                <a:solidFill>
-                  <a:srgbClr val="241F38"/>
-                </a:solidFill>
-                <a:latin typeface="Calibri" pitchFamily="34" charset="0"/>
-                <a:ea typeface="Calibri" pitchFamily="34" charset="-122"/>
-                <a:cs typeface="Calibri" pitchFamily="34" charset="-120"/>
-              </a:rPr>
-              <a:t>Tariff calculators and a spaza outage-loss planner</a:t>
+              <a:t>Anonymous: no accounts, no phone numbers. One vote per device</a:t>
             </a:r>
             <a:endParaRPr lang="en-US" sz="1400" dirty="0"/>
           </a:p>
@@ -3101,9 +5851,9 @@
 </p:sld>
 </file>
 
-<file path=ppt/slides/slide4.xml><?xml version="1.0" encoding="utf-8"?>
+<file path=ppt/slides/slide5.xml><?xml version="1.0" encoding="utf-8"?>
 <p:sld xmlns:a="http://schemas.openxmlformats.org/drawingml/2006/main" xmlns:r="http://schemas.openxmlformats.org/officeDocument/2006/relationships" xmlns:p="http://schemas.openxmlformats.org/presentationml/2006/main">
-  <p:cSld name="Slide 4">
+  <p:cSld name="Slide 5">
     <p:bg>
       <p:bgPr>
         <a:solidFill>
@@ -3133,7 +5883,7 @@
         </p:nvSpPr>
         <p:spPr>
           <a:xfrm>
-            <a:off x="457200" y="320040"/>
+            <a:off x="457200" y="274320"/>
             <a:ext cx="8229600" cy="640080"/>
           </a:xfrm>
           <a:prstGeom prst="rect">
@@ -3150,7 +5900,7 @@
               <a:buNone/>
             </a:pPr>
             <a:r>
-              <a:rPr lang="en-US" sz="3400" b="1" dirty="0">
+              <a:rPr lang="en-US" sz="3000" b="1" dirty="0">
                 <a:solidFill>
                   <a:srgbClr val="FFFFFF"/>
                 </a:solidFill>
@@ -3158,15 +5908,15 @@
                 <a:ea typeface="Cambria" pitchFamily="34" charset="-122"/>
                 <a:cs typeface="Cambria" pitchFamily="34" charset="-120"/>
               </a:rPr>
-              <a:t>New this weekend: Pulse and Forecast</a:t>
-            </a:r>
-            <a:endParaRPr lang="en-US" sz="3400" dirty="0"/>
+              <a:t>It thinks ahead: when, and for how long</a:t>
+            </a:r>
+            <a:endParaRPr lang="en-US" sz="3000" dirty="0"/>
           </a:p>
         </p:txBody>
       </p:sp>
       <p:pic>
         <p:nvPicPr>
-          <p:cNvPr id="3" name="Image 0" descr="shots/today.png">    </p:cNvPr>
+          <p:cNvPr id="3" name="Image 0" descr="shots/forecast.png">    </p:cNvPr>
           <p:cNvPicPr>
             <a:picLocks noChangeAspect="1"/>
           </p:cNvPicPr>
@@ -3180,8 +5930,8 @@
         </p:blipFill>
         <p:spPr>
           <a:xfrm>
-            <a:off x="6903720" y="457200"/>
-            <a:ext cx="2009553" cy="4114800"/>
+            <a:off x="457200" y="1051560"/>
+            <a:ext cx="2926080" cy="2330306"/>
           </a:xfrm>
           <a:prstGeom prst="rect">
             <a:avLst/>
@@ -3203,8 +5953,8 @@
         </p:nvSpPr>
         <p:spPr>
           <a:xfrm>
-            <a:off x="457200" y="1188720"/>
-            <a:ext cx="3566160" cy="3474720"/>
+            <a:off x="3657600" y="1097280"/>
+            <a:ext cx="5029200" cy="2377440"/>
           </a:xfrm>
           <a:prstGeom prst="rect">
             <a:avLst/>
@@ -3224,7 +5974,7 @@
               <a:buChar char="•"/>
             </a:pPr>
             <a:r>
-              <a:rPr lang="en-US" sz="1400" dirty="0">
+              <a:rPr lang="en-US" sz="1500" dirty="0">
                 <a:solidFill>
                   <a:srgbClr val="FFFFFF"/>
                 </a:solidFill>
@@ -3232,9 +5982,9 @@
                 <a:ea typeface="Calibri" pitchFamily="34" charset="-122"/>
                 <a:cs typeface="Calibri" pitchFamily="34" charset="-120"/>
               </a:rPr>
-              <a:t>Outage Pulse: 3+ different neighbours report the same problem and it becomes a Verified outage</a:t>
-            </a:r>
-            <a:endParaRPr lang="en-US" sz="1400" dirty="0"/>
+              <a:t>Learns each suburb's own pattern: the weekday and time of day outages cluster</a:t>
+            </a:r>
+            <a:endParaRPr lang="en-US" sz="1500" dirty="0"/>
           </a:p>
           <a:p>
             <a:pPr marL="342900" indent="-342900">
@@ -3245,7 +5995,7 @@
               <a:buChar char="•"/>
             </a:pPr>
             <a:r>
-              <a:rPr lang="en-US" sz="1400" dirty="0">
+              <a:rPr lang="en-US" sz="1500" dirty="0">
                 <a:solidFill>
                   <a:srgbClr val="FFFFFF"/>
                 </a:solidFill>
@@ -3253,9 +6003,9 @@
                 <a:ea typeface="Calibri" pitchFamily="34" charset="-122"/>
                 <a:cs typeface="Calibri" pitchFamily="34" charset="-120"/>
               </a:rPr>
-              <a:t>Neighbours vote "back on" and the alert closes itself</a:t>
-            </a:r>
-            <a:endParaRPr lang="en-US" sz="1400" dirty="0"/>
+              <a:t>Learns how long they last, from the "back on" votes, and shows "expected back around 16:30"</a:t>
+            </a:r>
+            <a:endParaRPr lang="en-US" sz="1500" dirty="0"/>
           </a:p>
           <a:p>
             <a:pPr marL="342900" indent="-342900">
@@ -3266,7 +6016,7 @@
               <a:buChar char="•"/>
             </a:pPr>
             <a:r>
-              <a:rPr lang="en-US" sz="1400" dirty="0">
+              <a:rPr lang="en-US" sz="1500" dirty="0">
                 <a:solidFill>
                   <a:srgbClr val="FFFFFF"/>
                 </a:solidFill>
@@ -3274,9 +6024,9 @@
                 <a:ea typeface="Calibri" pitchFamily="34" charset="-122"/>
                 <a:cs typeface="Calibri" pitchFamily="34" charset="-120"/>
               </a:rPr>
-              <a:t>Outage Forecast: learns the weekday and time-of-day pattern from its own reports</a:t>
-            </a:r>
-            <a:endParaRPr lang="en-US" sz="1400" dirty="0"/>
+              <a:t>Warns a household with a medical device before its high-risk window</a:t>
+            </a:r>
+            <a:endParaRPr lang="en-US" sz="1500" dirty="0"/>
           </a:p>
           <a:p>
             <a:pPr marL="342900" indent="-342900">
@@ -3287,7 +6037,7 @@
               <a:buChar char="•"/>
             </a:pPr>
             <a:r>
-              <a:rPr lang="en-US" sz="1400" dirty="0">
+              <a:rPr lang="en-US" sz="1500" dirty="0">
                 <a:solidFill>
                   <a:srgbClr val="FFFFFF"/>
                 </a:solidFill>
@@ -3295,874 +6045,48 @@
                 <a:ea typeface="Calibri" pitchFamily="34" charset="-122"/>
                 <a:cs typeface="Calibri" pitchFamily="34" charset="-120"/>
               </a:rPr>
-              <a:t>Early warning at 2 reports, one short of verified</a:t>
-            </a:r>
-            <a:endParaRPr lang="en-US" sz="1400" dirty="0"/>
-          </a:p>
-          <a:p>
-            <a:pPr marL="342900" indent="-342900">
-              <a:spcAft>
-                <a:spcPts val="800"/>
-              </a:spcAft>
-              <a:buSzPct val="100000"/>
-              <a:buChar char="•"/>
-            </a:pPr>
-            <a:r>
-              <a:rPr lang="en-US" sz="1400" dirty="0">
-                <a:solidFill>
-                  <a:srgbClr val="FFFFFF"/>
+              <a:t>Transparent: shows its confidence and says when there is not enough data</a:t>
+            </a:r>
+            <a:endParaRPr lang="en-US" sz="1500" dirty="0"/>
+          </a:p>
+        </p:txBody>
+      </p:sp>
+      <p:sp>
+        <p:nvSpPr>
+          <p:cNvPr id="5" name="Text 2"/>
+          <p:cNvSpPr txBox="1"/>
+          <p:nvPr/>
+        </p:nvSpPr>
+        <p:spPr>
+          <a:xfrm>
+            <a:off x="3657600" y="3566160"/>
+            <a:ext cx="5029200" cy="1097280"/>
+          </a:xfrm>
+          <a:prstGeom prst="rect">
+            <a:avLst/>
+          </a:prstGeom>
+          <a:noFill/>
+          <a:ln/>
+        </p:spPr>
+        <p:txBody>
+          <a:bodyPr wrap="square" lIns="0" tIns="0" rIns="0" bIns="0" rtlCol="0" anchor="t"/>
+          <a:lstStyle/>
+          <a:p>
+            <a:pPr indent="0" marL="0">
+              <a:buNone/>
+            </a:pPr>
+            <a:r>
+              <a:rPr lang="en-US" sz="1300" i="1" dirty="0">
+                <a:solidFill>
+                  <a:srgbClr val="9FD3F0"/>
                 </a:solidFill>
                 <a:latin typeface="Calibri" pitchFamily="34" charset="0"/>
                 <a:ea typeface="Calibri" pitchFamily="34" charset="-122"/>
                 <a:cs typeface="Calibri" pitchFamily="34" charset="-120"/>
               </a:rPr>
-              <a:t>Opt-in phone notifications</a:t>
-            </a:r>
-            <a:endParaRPr lang="en-US" sz="1400" dirty="0"/>
-          </a:p>
-        </p:txBody>
-      </p:sp>
-      <p:pic>
-        <p:nvPicPr>
-          <p:cNvPr id="5" name="Image 1" descr="shots/forecast.png">    </p:cNvPr>
-          <p:cNvPicPr>
-            <a:picLocks noChangeAspect="1"/>
-          </p:cNvPicPr>
-          <p:nvPr/>
-        </p:nvPicPr>
-        <p:blipFill>
-          <a:blip r:embed="rId2"/>
-          <a:stretch>
-            <a:fillRect/>
-          </a:stretch>
-        </p:blipFill>
-        <p:spPr>
-          <a:xfrm>
-            <a:off x="4297680" y="1280160"/>
-            <a:ext cx="2377440" cy="1856609"/>
-          </a:xfrm>
-          <a:prstGeom prst="rect">
-            <a:avLst/>
-          </a:prstGeom>
-        </p:spPr>
-      </p:pic>
-      <p:sp>
-        <p:nvSpPr>
-          <p:cNvPr id="6" name="Text 2"/>
-          <p:cNvSpPr txBox="1"/>
-          <p:nvPr/>
-        </p:nvSpPr>
-        <p:spPr>
-          <a:xfrm>
-            <a:off x="4297680" y="3246120"/>
-            <a:ext cx="2377440" cy="822960"/>
-          </a:xfrm>
-          <a:prstGeom prst="rect">
-            <a:avLst/>
-          </a:prstGeom>
-          <a:noFill/>
-          <a:ln/>
-        </p:spPr>
-        <p:txBody>
-          <a:bodyPr wrap="square" lIns="0" tIns="0" rIns="0" bIns="0" rtlCol="0" anchor="t"/>
-          <a:lstStyle/>
-          <a:p>
-            <a:pPr indent="0" marL="0">
-              <a:buNone/>
-            </a:pPr>
-            <a:r>
-              <a:rPr lang="en-US" sz="1200" i="1" dirty="0">
-                <a:solidFill>
-                  <a:srgbClr val="DDD4F6"/>
-                </a:solidFill>
-                <a:latin typeface="Calibri" pitchFamily="34" charset="0"/>
-                <a:ea typeface="Calibri" pitchFamily="34" charset="-122"/>
-                <a:cs typeface="Calibri" pitchFamily="34" charset="-120"/>
-              </a:rPr>
-              <a:t>Rule-based and transparent: it shows its confidence and says when there is not enough data.</a:t>
-            </a:r>
-            <a:endParaRPr lang="en-US" sz="1200" dirty="0"/>
-          </a:p>
-        </p:txBody>
-      </p:sp>
-    </p:spTree>
-  </p:cSld>
-  <p:clrMapOvr>
-    <a:masterClrMapping/>
-  </p:clrMapOvr>
-</p:sld>
-</file>
-
-<file path=ppt/slides/slide5.xml><?xml version="1.0" encoding="utf-8"?>
-<p:sld xmlns:a="http://schemas.openxmlformats.org/drawingml/2006/main" xmlns:r="http://schemas.openxmlformats.org/officeDocument/2006/relationships" xmlns:p="http://schemas.openxmlformats.org/presentationml/2006/main">
-  <p:cSld name="Slide 5">
-    <p:bg>
-      <p:bgPr>
-        <a:solidFill>
-          <a:srgbClr val="FFFFFF"/>
-        </a:solidFill>
-      </p:bgPr>
-    </p:bg>
-    <p:spTree>
-      <p:nvGrpSpPr>
-        <p:cNvPr id="1" name=""/>
-        <p:cNvGrpSpPr/>
-        <p:nvPr/>
-      </p:nvGrpSpPr>
-      <p:grpSpPr>
-        <a:xfrm>
-          <a:off x="0" y="0"/>
-          <a:ext cx="0" cy="0"/>
-          <a:chOff x="0" y="0"/>
-          <a:chExt cx="0" cy="0"/>
-        </a:xfrm>
-      </p:grpSpPr>
-      <p:sp>
-        <p:nvSpPr>
-          <p:cNvPr id="2" name="Text 0"/>
-          <p:cNvSpPr txBox="1"/>
-          <p:nvPr/>
-        </p:nvSpPr>
-        <p:spPr>
-          <a:xfrm>
-            <a:off x="457200" y="320040"/>
-            <a:ext cx="8229600" cy="640080"/>
-          </a:xfrm>
-          <a:prstGeom prst="rect">
-            <a:avLst/>
-          </a:prstGeom>
-          <a:noFill/>
-          <a:ln/>
-        </p:spPr>
-        <p:txBody>
-          <a:bodyPr wrap="square" lIns="0" tIns="0" rIns="0" bIns="0" rtlCol="0" anchor="ctr"/>
-          <a:lstStyle/>
-          <a:p>
-            <a:pPr indent="0" marL="0">
-              <a:buNone/>
-            </a:pPr>
-            <a:r>
-              <a:rPr lang="en-US" sz="3400" b="1" dirty="0">
-                <a:solidFill>
-                  <a:srgbClr val="2E2457"/>
-                </a:solidFill>
-                <a:latin typeface="Cambria" pitchFamily="34" charset="0"/>
-                <a:ea typeface="Cambria" pitchFamily="34" charset="-122"/>
-                <a:cs typeface="Cambria" pitchFamily="34" charset="-120"/>
-              </a:rPr>
-              <a:t>User journey: Thandi in Alexandra</a:t>
-            </a:r>
-            <a:endParaRPr lang="en-US" sz="3400" dirty="0"/>
-          </a:p>
-        </p:txBody>
-      </p:sp>
-      <p:sp>
-        <p:nvSpPr>
-          <p:cNvPr id="3" name="Shape 1"/>
-          <p:cNvSpPr/>
-          <p:nvPr/>
-        </p:nvSpPr>
-        <p:spPr>
-          <a:xfrm>
-            <a:off x="502920" y="1280160"/>
-            <a:ext cx="548640" cy="548640"/>
-          </a:xfrm>
-          <a:prstGeom prst="ellipse">
-            <a:avLst/>
-          </a:prstGeom>
-          <a:solidFill>
-            <a:srgbClr val="6A57B8"/>
-          </a:solidFill>
-          <a:ln w="12700">
-            <a:solidFill>
-              <a:srgbClr val="6A57B8"/>
-            </a:solidFill>
-            <a:prstDash val="solid"/>
-          </a:ln>
-        </p:spPr>
-      </p:sp>
-      <p:sp>
-        <p:nvSpPr>
-          <p:cNvPr id="4" name="Text 2"/>
-          <p:cNvSpPr txBox="1"/>
-          <p:nvPr/>
-        </p:nvSpPr>
-        <p:spPr>
-          <a:xfrm>
-            <a:off x="502920" y="1280160"/>
-            <a:ext cx="548640" cy="548640"/>
-          </a:xfrm>
-          <a:prstGeom prst="rect">
-            <a:avLst/>
-          </a:prstGeom>
-          <a:noFill/>
-          <a:ln/>
-        </p:spPr>
-        <p:txBody>
-          <a:bodyPr wrap="square" lIns="0" tIns="0" rIns="0" bIns="0" rtlCol="0" anchor="ctr"/>
-          <a:lstStyle/>
-          <a:p>
-            <a:pPr algn="ctr" indent="0" marL="0">
-              <a:buNone/>
-            </a:pPr>
-            <a:r>
-              <a:rPr lang="en-US" sz="2000" b="1" dirty="0">
-                <a:solidFill>
-                  <a:srgbClr val="FFFFFF"/>
-                </a:solidFill>
-                <a:latin typeface="Cambria" pitchFamily="34" charset="0"/>
-                <a:ea typeface="Cambria" pitchFamily="34" charset="-122"/>
-                <a:cs typeface="Cambria" pitchFamily="34" charset="-120"/>
-              </a:rPr>
-              <a:t>1</a:t>
-            </a:r>
-            <a:endParaRPr lang="en-US" sz="2000" dirty="0"/>
-          </a:p>
-        </p:txBody>
-      </p:sp>
-      <p:sp>
-        <p:nvSpPr>
-          <p:cNvPr id="5" name="Text 3"/>
-          <p:cNvSpPr txBox="1"/>
-          <p:nvPr/>
-        </p:nvSpPr>
-        <p:spPr>
-          <a:xfrm>
-            <a:off x="457200" y="2011680"/>
-            <a:ext cx="1554480" cy="365760"/>
-          </a:xfrm>
-          <a:prstGeom prst="rect">
-            <a:avLst/>
-          </a:prstGeom>
-          <a:noFill/>
-          <a:ln/>
-        </p:spPr>
-        <p:txBody>
-          <a:bodyPr wrap="square" lIns="0" tIns="0" rIns="0" bIns="0" rtlCol="0" anchor="ctr"/>
-          <a:lstStyle/>
-          <a:p>
-            <a:pPr indent="0" marL="0">
-              <a:buNone/>
-            </a:pPr>
-            <a:r>
-              <a:rPr lang="en-US" sz="1600" b="1" dirty="0">
-                <a:solidFill>
-                  <a:srgbClr val="2E2457"/>
-                </a:solidFill>
-                <a:latin typeface="Cambria" pitchFamily="34" charset="0"/>
-                <a:ea typeface="Cambria" pitchFamily="34" charset="-122"/>
-                <a:cs typeface="Cambria" pitchFamily="34" charset="-120"/>
-              </a:rPr>
-              <a:t>Opens the app</a:t>
-            </a:r>
-            <a:endParaRPr lang="en-US" sz="1600" dirty="0"/>
-          </a:p>
-        </p:txBody>
-      </p:sp>
-      <p:sp>
-        <p:nvSpPr>
-          <p:cNvPr id="6" name="Text 4"/>
-          <p:cNvSpPr txBox="1"/>
-          <p:nvPr/>
-        </p:nvSpPr>
-        <p:spPr>
-          <a:xfrm>
-            <a:off x="457200" y="2423160"/>
-            <a:ext cx="1554480" cy="1737360"/>
-          </a:xfrm>
-          <a:prstGeom prst="rect">
-            <a:avLst/>
-          </a:prstGeom>
-          <a:noFill/>
-          <a:ln/>
-        </p:spPr>
-        <p:txBody>
-          <a:bodyPr wrap="square" lIns="0" tIns="0" rIns="0" bIns="0" rtlCol="0" anchor="t"/>
-          <a:lstStyle/>
-          <a:p>
-            <a:pPr indent="0" marL="0">
-              <a:buNone/>
-            </a:pPr>
-            <a:r>
-              <a:rPr lang="en-US" sz="1400" dirty="0">
-                <a:solidFill>
-                  <a:srgbClr val="241F38"/>
-                </a:solidFill>
-                <a:latin typeface="Calibri" pitchFamily="34" charset="0"/>
-                <a:ea typeface="Calibri" pitchFamily="34" charset="-122"/>
-                <a:cs typeface="Calibri" pitchFamily="34" charset="-120"/>
-              </a:rPr>
-              <a:t>Today tab shows power, water and confirmed problems for her suburb.</a:t>
-            </a:r>
-            <a:endParaRPr lang="en-US" sz="1400" dirty="0"/>
-          </a:p>
-        </p:txBody>
-      </p:sp>
-      <p:sp>
-        <p:nvSpPr>
-          <p:cNvPr id="7" name="Shape 5"/>
-          <p:cNvSpPr/>
-          <p:nvPr/>
-        </p:nvSpPr>
-        <p:spPr>
-          <a:xfrm>
-            <a:off x="2167128" y="1280160"/>
-            <a:ext cx="548640" cy="548640"/>
-          </a:xfrm>
-          <a:prstGeom prst="ellipse">
-            <a:avLst/>
-          </a:prstGeom>
-          <a:solidFill>
-            <a:srgbClr val="6A57B8"/>
-          </a:solidFill>
-          <a:ln w="12700">
-            <a:solidFill>
-              <a:srgbClr val="6A57B8"/>
-            </a:solidFill>
-            <a:prstDash val="solid"/>
-          </a:ln>
-        </p:spPr>
-      </p:sp>
-      <p:sp>
-        <p:nvSpPr>
-          <p:cNvPr id="8" name="Text 6"/>
-          <p:cNvSpPr txBox="1"/>
-          <p:nvPr/>
-        </p:nvSpPr>
-        <p:spPr>
-          <a:xfrm>
-            <a:off x="2167128" y="1280160"/>
-            <a:ext cx="548640" cy="548640"/>
-          </a:xfrm>
-          <a:prstGeom prst="rect">
-            <a:avLst/>
-          </a:prstGeom>
-          <a:noFill/>
-          <a:ln/>
-        </p:spPr>
-        <p:txBody>
-          <a:bodyPr wrap="square" lIns="0" tIns="0" rIns="0" bIns="0" rtlCol="0" anchor="ctr"/>
-          <a:lstStyle/>
-          <a:p>
-            <a:pPr algn="ctr" indent="0" marL="0">
-              <a:buNone/>
-            </a:pPr>
-            <a:r>
-              <a:rPr lang="en-US" sz="2000" b="1" dirty="0">
-                <a:solidFill>
-                  <a:srgbClr val="FFFFFF"/>
-                </a:solidFill>
-                <a:latin typeface="Cambria" pitchFamily="34" charset="0"/>
-                <a:ea typeface="Cambria" pitchFamily="34" charset="-122"/>
-                <a:cs typeface="Cambria" pitchFamily="34" charset="-120"/>
-              </a:rPr>
-              <a:t>2</a:t>
-            </a:r>
-            <a:endParaRPr lang="en-US" sz="2000" dirty="0"/>
-          </a:p>
-        </p:txBody>
-      </p:sp>
-      <p:sp>
-        <p:nvSpPr>
-          <p:cNvPr id="9" name="Text 7"/>
-          <p:cNvSpPr txBox="1"/>
-          <p:nvPr/>
-        </p:nvSpPr>
-        <p:spPr>
-          <a:xfrm>
-            <a:off x="2121408" y="2011680"/>
-            <a:ext cx="1554480" cy="365760"/>
-          </a:xfrm>
-          <a:prstGeom prst="rect">
-            <a:avLst/>
-          </a:prstGeom>
-          <a:noFill/>
-          <a:ln/>
-        </p:spPr>
-        <p:txBody>
-          <a:bodyPr wrap="square" lIns="0" tIns="0" rIns="0" bIns="0" rtlCol="0" anchor="ctr"/>
-          <a:lstStyle/>
-          <a:p>
-            <a:pPr indent="0" marL="0">
-              <a:buNone/>
-            </a:pPr>
-            <a:r>
-              <a:rPr lang="en-US" sz="1600" b="1" dirty="0">
-                <a:solidFill>
-                  <a:srgbClr val="2E2457"/>
-                </a:solidFill>
-                <a:latin typeface="Cambria" pitchFamily="34" charset="0"/>
-                <a:ea typeface="Cambria" pitchFamily="34" charset="-122"/>
-                <a:cs typeface="Cambria" pitchFamily="34" charset="-120"/>
-              </a:rPr>
-              <a:t>Spots no water</a:t>
-            </a:r>
-            <a:endParaRPr lang="en-US" sz="1600" dirty="0"/>
-          </a:p>
-        </p:txBody>
-      </p:sp>
-      <p:sp>
-        <p:nvSpPr>
-          <p:cNvPr id="10" name="Text 8"/>
-          <p:cNvSpPr txBox="1"/>
-          <p:nvPr/>
-        </p:nvSpPr>
-        <p:spPr>
-          <a:xfrm>
-            <a:off x="2121408" y="2423160"/>
-            <a:ext cx="1554480" cy="1737360"/>
-          </a:xfrm>
-          <a:prstGeom prst="rect">
-            <a:avLst/>
-          </a:prstGeom>
-          <a:noFill/>
-          <a:ln/>
-        </p:spPr>
-        <p:txBody>
-          <a:bodyPr wrap="square" lIns="0" tIns="0" rIns="0" bIns="0" rtlCol="0" anchor="t"/>
-          <a:lstStyle/>
-          <a:p>
-            <a:pPr indent="0" marL="0">
-              <a:buNone/>
-            </a:pPr>
-            <a:r>
-              <a:rPr lang="en-US" sz="1400" dirty="0">
-                <a:solidFill>
-                  <a:srgbClr val="241F38"/>
-                </a:solidFill>
-                <a:latin typeface="Calibri" pitchFamily="34" charset="0"/>
-                <a:ea typeface="Calibri" pitchFamily="34" charset="-122"/>
-                <a:cs typeface="Calibri" pitchFamily="34" charset="-120"/>
-              </a:rPr>
-              <a:t>Reports it in 10 seconds, even with no signal. It syncs later.</a:t>
-            </a:r>
-            <a:endParaRPr lang="en-US" sz="1400" dirty="0"/>
-          </a:p>
-        </p:txBody>
-      </p:sp>
-      <p:sp>
-        <p:nvSpPr>
-          <p:cNvPr id="11" name="Shape 9"/>
-          <p:cNvSpPr/>
-          <p:nvPr/>
-        </p:nvSpPr>
-        <p:spPr>
-          <a:xfrm>
-            <a:off x="3831336" y="1280160"/>
-            <a:ext cx="548640" cy="548640"/>
-          </a:xfrm>
-          <a:prstGeom prst="ellipse">
-            <a:avLst/>
-          </a:prstGeom>
-          <a:solidFill>
-            <a:srgbClr val="6A57B8"/>
-          </a:solidFill>
-          <a:ln w="12700">
-            <a:solidFill>
-              <a:srgbClr val="6A57B8"/>
-            </a:solidFill>
-            <a:prstDash val="solid"/>
-          </a:ln>
-        </p:spPr>
-      </p:sp>
-      <p:sp>
-        <p:nvSpPr>
-          <p:cNvPr id="12" name="Text 10"/>
-          <p:cNvSpPr txBox="1"/>
-          <p:nvPr/>
-        </p:nvSpPr>
-        <p:spPr>
-          <a:xfrm>
-            <a:off x="3831336" y="1280160"/>
-            <a:ext cx="548640" cy="548640"/>
-          </a:xfrm>
-          <a:prstGeom prst="rect">
-            <a:avLst/>
-          </a:prstGeom>
-          <a:noFill/>
-          <a:ln/>
-        </p:spPr>
-        <p:txBody>
-          <a:bodyPr wrap="square" lIns="0" tIns="0" rIns="0" bIns="0" rtlCol="0" anchor="ctr"/>
-          <a:lstStyle/>
-          <a:p>
-            <a:pPr algn="ctr" indent="0" marL="0">
-              <a:buNone/>
-            </a:pPr>
-            <a:r>
-              <a:rPr lang="en-US" sz="2000" b="1" dirty="0">
-                <a:solidFill>
-                  <a:srgbClr val="FFFFFF"/>
-                </a:solidFill>
-                <a:latin typeface="Cambria" pitchFamily="34" charset="0"/>
-                <a:ea typeface="Cambria" pitchFamily="34" charset="-122"/>
-                <a:cs typeface="Cambria" pitchFamily="34" charset="-120"/>
-              </a:rPr>
-              <a:t>3</a:t>
-            </a:r>
-            <a:endParaRPr lang="en-US" sz="2000" dirty="0"/>
-          </a:p>
-        </p:txBody>
-      </p:sp>
-      <p:sp>
-        <p:nvSpPr>
-          <p:cNvPr id="13" name="Text 11"/>
-          <p:cNvSpPr txBox="1"/>
-          <p:nvPr/>
-        </p:nvSpPr>
-        <p:spPr>
-          <a:xfrm>
-            <a:off x="3785616" y="2011680"/>
-            <a:ext cx="1554480" cy="365760"/>
-          </a:xfrm>
-          <a:prstGeom prst="rect">
-            <a:avLst/>
-          </a:prstGeom>
-          <a:noFill/>
-          <a:ln/>
-        </p:spPr>
-        <p:txBody>
-          <a:bodyPr wrap="square" lIns="0" tIns="0" rIns="0" bIns="0" rtlCol="0" anchor="ctr"/>
-          <a:lstStyle/>
-          <a:p>
-            <a:pPr indent="0" marL="0">
-              <a:buNone/>
-            </a:pPr>
-            <a:r>
-              <a:rPr lang="en-US" sz="1600" b="1" dirty="0">
-                <a:solidFill>
-                  <a:srgbClr val="2E2457"/>
-                </a:solidFill>
-                <a:latin typeface="Cambria" pitchFamily="34" charset="0"/>
-                <a:ea typeface="Cambria" pitchFamily="34" charset="-122"/>
-                <a:cs typeface="Cambria" pitchFamily="34" charset="-120"/>
-              </a:rPr>
-              <a:t>Neighbours confirm</a:t>
-            </a:r>
-            <a:endParaRPr lang="en-US" sz="1600" dirty="0"/>
-          </a:p>
-        </p:txBody>
-      </p:sp>
-      <p:sp>
-        <p:nvSpPr>
-          <p:cNvPr id="14" name="Text 12"/>
-          <p:cNvSpPr txBox="1"/>
-          <p:nvPr/>
-        </p:nvSpPr>
-        <p:spPr>
-          <a:xfrm>
-            <a:off x="3785616" y="2423160"/>
-            <a:ext cx="1554480" cy="1737360"/>
-          </a:xfrm>
-          <a:prstGeom prst="rect">
-            <a:avLst/>
-          </a:prstGeom>
-          <a:noFill/>
-          <a:ln/>
-        </p:spPr>
-        <p:txBody>
-          <a:bodyPr wrap="square" lIns="0" tIns="0" rIns="0" bIns="0" rtlCol="0" anchor="t"/>
-          <a:lstStyle/>
-          <a:p>
-            <a:pPr indent="0" marL="0">
-              <a:buNone/>
-            </a:pPr>
-            <a:r>
-              <a:rPr lang="en-US" sz="1400" dirty="0">
-                <a:solidFill>
-                  <a:srgbClr val="241F38"/>
-                </a:solidFill>
-                <a:latin typeface="Calibri" pitchFamily="34" charset="0"/>
-                <a:ea typeface="Calibri" pitchFamily="34" charset="-122"/>
-                <a:cs typeface="Calibri" pitchFamily="34" charset="-120"/>
-              </a:rPr>
-              <a:t>Three devices later it is a Verified outage and everyone is alerted.</a:t>
-            </a:r>
-            <a:endParaRPr lang="en-US" sz="1400" dirty="0"/>
-          </a:p>
-        </p:txBody>
-      </p:sp>
-      <p:sp>
-        <p:nvSpPr>
-          <p:cNvPr id="15" name="Shape 13"/>
-          <p:cNvSpPr/>
-          <p:nvPr/>
-        </p:nvSpPr>
-        <p:spPr>
-          <a:xfrm>
-            <a:off x="5495544" y="1280160"/>
-            <a:ext cx="548640" cy="548640"/>
-          </a:xfrm>
-          <a:prstGeom prst="ellipse">
-            <a:avLst/>
-          </a:prstGeom>
-          <a:solidFill>
-            <a:srgbClr val="6A57B8"/>
-          </a:solidFill>
-          <a:ln w="12700">
-            <a:solidFill>
-              <a:srgbClr val="6A57B8"/>
-            </a:solidFill>
-            <a:prstDash val="solid"/>
-          </a:ln>
-        </p:spPr>
-      </p:sp>
-      <p:sp>
-        <p:nvSpPr>
-          <p:cNvPr id="16" name="Text 14"/>
-          <p:cNvSpPr txBox="1"/>
-          <p:nvPr/>
-        </p:nvSpPr>
-        <p:spPr>
-          <a:xfrm>
-            <a:off x="5495544" y="1280160"/>
-            <a:ext cx="548640" cy="548640"/>
-          </a:xfrm>
-          <a:prstGeom prst="rect">
-            <a:avLst/>
-          </a:prstGeom>
-          <a:noFill/>
-          <a:ln/>
-        </p:spPr>
-        <p:txBody>
-          <a:bodyPr wrap="square" lIns="0" tIns="0" rIns="0" bIns="0" rtlCol="0" anchor="ctr"/>
-          <a:lstStyle/>
-          <a:p>
-            <a:pPr algn="ctr" indent="0" marL="0">
-              <a:buNone/>
-            </a:pPr>
-            <a:r>
-              <a:rPr lang="en-US" sz="2000" b="1" dirty="0">
-                <a:solidFill>
-                  <a:srgbClr val="FFFFFF"/>
-                </a:solidFill>
-                <a:latin typeface="Cambria" pitchFamily="34" charset="0"/>
-                <a:ea typeface="Cambria" pitchFamily="34" charset="-122"/>
-                <a:cs typeface="Cambria" pitchFamily="34" charset="-120"/>
-              </a:rPr>
-              <a:t>4</a:t>
-            </a:r>
-            <a:endParaRPr lang="en-US" sz="2000" dirty="0"/>
-          </a:p>
-        </p:txBody>
-      </p:sp>
-      <p:sp>
-        <p:nvSpPr>
-          <p:cNvPr id="17" name="Text 15"/>
-          <p:cNvSpPr txBox="1"/>
-          <p:nvPr/>
-        </p:nvSpPr>
-        <p:spPr>
-          <a:xfrm>
-            <a:off x="5449824" y="2011680"/>
-            <a:ext cx="1554480" cy="365760"/>
-          </a:xfrm>
-          <a:prstGeom prst="rect">
-            <a:avLst/>
-          </a:prstGeom>
-          <a:noFill/>
-          <a:ln/>
-        </p:spPr>
-        <p:txBody>
-          <a:bodyPr wrap="square" lIns="0" tIns="0" rIns="0" bIns="0" rtlCol="0" anchor="ctr"/>
-          <a:lstStyle/>
-          <a:p>
-            <a:pPr indent="0" marL="0">
-              <a:buNone/>
-            </a:pPr>
-            <a:r>
-              <a:rPr lang="en-US" sz="1600" b="1" dirty="0">
-                <a:solidFill>
-                  <a:srgbClr val="2E2457"/>
-                </a:solidFill>
-                <a:latin typeface="Cambria" pitchFamily="34" charset="0"/>
-                <a:ea typeface="Cambria" pitchFamily="34" charset="-122"/>
-                <a:cs typeface="Cambria" pitchFamily="34" charset="-120"/>
-              </a:rPr>
-              <a:t>Finds help</a:t>
-            </a:r>
-            <a:endParaRPr lang="en-US" sz="1600" dirty="0"/>
-          </a:p>
-        </p:txBody>
-      </p:sp>
-      <p:sp>
-        <p:nvSpPr>
-          <p:cNvPr id="18" name="Text 16"/>
-          <p:cNvSpPr txBox="1"/>
-          <p:nvPr/>
-        </p:nvSpPr>
-        <p:spPr>
-          <a:xfrm>
-            <a:off x="5449824" y="2423160"/>
-            <a:ext cx="1554480" cy="1737360"/>
-          </a:xfrm>
-          <a:prstGeom prst="rect">
-            <a:avLst/>
-          </a:prstGeom>
-          <a:noFill/>
-          <a:ln/>
-        </p:spPr>
-        <p:txBody>
-          <a:bodyPr wrap="square" lIns="0" tIns="0" rIns="0" bIns="0" rtlCol="0" anchor="t"/>
-          <a:lstStyle/>
-          <a:p>
-            <a:pPr indent="0" marL="0">
-              <a:buNone/>
-            </a:pPr>
-            <a:r>
-              <a:rPr lang="en-US" sz="1400" dirty="0">
-                <a:solidFill>
-                  <a:srgbClr val="241F38"/>
-                </a:solidFill>
-                <a:latin typeface="Calibri" pitchFamily="34" charset="0"/>
-                <a:ea typeface="Calibri" pitchFamily="34" charset="-122"/>
-                <a:cs typeface="Calibri" pitchFamily="34" charset="-120"/>
-              </a:rPr>
-              <a:t>Board shows Bra Sipho's free borehole water two streets away.</a:t>
-            </a:r>
-            <a:endParaRPr lang="en-US" sz="1400" dirty="0"/>
-          </a:p>
-        </p:txBody>
-      </p:sp>
-      <p:sp>
-        <p:nvSpPr>
-          <p:cNvPr id="19" name="Shape 17"/>
-          <p:cNvSpPr/>
-          <p:nvPr/>
-        </p:nvSpPr>
-        <p:spPr>
-          <a:xfrm>
-            <a:off x="7159752" y="1280160"/>
-            <a:ext cx="548640" cy="548640"/>
-          </a:xfrm>
-          <a:prstGeom prst="ellipse">
-            <a:avLst/>
-          </a:prstGeom>
-          <a:solidFill>
-            <a:srgbClr val="6A57B8"/>
-          </a:solidFill>
-          <a:ln w="12700">
-            <a:solidFill>
-              <a:srgbClr val="6A57B8"/>
-            </a:solidFill>
-            <a:prstDash val="solid"/>
-          </a:ln>
-        </p:spPr>
-      </p:sp>
-      <p:sp>
-        <p:nvSpPr>
-          <p:cNvPr id="20" name="Text 18"/>
-          <p:cNvSpPr txBox="1"/>
-          <p:nvPr/>
-        </p:nvSpPr>
-        <p:spPr>
-          <a:xfrm>
-            <a:off x="7159752" y="1280160"/>
-            <a:ext cx="548640" cy="548640"/>
-          </a:xfrm>
-          <a:prstGeom prst="rect">
-            <a:avLst/>
-          </a:prstGeom>
-          <a:noFill/>
-          <a:ln/>
-        </p:spPr>
-        <p:txBody>
-          <a:bodyPr wrap="square" lIns="0" tIns="0" rIns="0" bIns="0" rtlCol="0" anchor="ctr"/>
-          <a:lstStyle/>
-          <a:p>
-            <a:pPr algn="ctr" indent="0" marL="0">
-              <a:buNone/>
-            </a:pPr>
-            <a:r>
-              <a:rPr lang="en-US" sz="2000" b="1" dirty="0">
-                <a:solidFill>
-                  <a:srgbClr val="FFFFFF"/>
-                </a:solidFill>
-                <a:latin typeface="Cambria" pitchFamily="34" charset="0"/>
-                <a:ea typeface="Cambria" pitchFamily="34" charset="-122"/>
-                <a:cs typeface="Cambria" pitchFamily="34" charset="-120"/>
-              </a:rPr>
-              <a:t>5</a:t>
-            </a:r>
-            <a:endParaRPr lang="en-US" sz="2000" dirty="0"/>
-          </a:p>
-        </p:txBody>
-      </p:sp>
-      <p:sp>
-        <p:nvSpPr>
-          <p:cNvPr id="21" name="Text 19"/>
-          <p:cNvSpPr txBox="1"/>
-          <p:nvPr/>
-        </p:nvSpPr>
-        <p:spPr>
-          <a:xfrm>
-            <a:off x="7114032" y="2011680"/>
-            <a:ext cx="1554480" cy="365760"/>
-          </a:xfrm>
-          <a:prstGeom prst="rect">
-            <a:avLst/>
-          </a:prstGeom>
-          <a:noFill/>
-          <a:ln/>
-        </p:spPr>
-        <p:txBody>
-          <a:bodyPr wrap="square" lIns="0" tIns="0" rIns="0" bIns="0" rtlCol="0" anchor="ctr"/>
-          <a:lstStyle/>
-          <a:p>
-            <a:pPr indent="0" marL="0">
-              <a:buNone/>
-            </a:pPr>
-            <a:r>
-              <a:rPr lang="en-US" sz="1600" b="1" dirty="0">
-                <a:solidFill>
-                  <a:srgbClr val="2E2457"/>
-                </a:solidFill>
-                <a:latin typeface="Cambria" pitchFamily="34" charset="0"/>
-                <a:ea typeface="Cambria" pitchFamily="34" charset="-122"/>
-                <a:cs typeface="Cambria" pitchFamily="34" charset="-120"/>
-              </a:rPr>
-              <a:t>Water returns</a:t>
-            </a:r>
-            <a:endParaRPr lang="en-US" sz="1600" dirty="0"/>
-          </a:p>
-        </p:txBody>
-      </p:sp>
-      <p:sp>
-        <p:nvSpPr>
-          <p:cNvPr id="22" name="Text 20"/>
-          <p:cNvSpPr txBox="1"/>
-          <p:nvPr/>
-        </p:nvSpPr>
-        <p:spPr>
-          <a:xfrm>
-            <a:off x="7114032" y="2423160"/>
-            <a:ext cx="1554480" cy="1737360"/>
-          </a:xfrm>
-          <a:prstGeom prst="rect">
-            <a:avLst/>
-          </a:prstGeom>
-          <a:noFill/>
-          <a:ln/>
-        </p:spPr>
-        <p:txBody>
-          <a:bodyPr wrap="square" lIns="0" tIns="0" rIns="0" bIns="0" rtlCol="0" anchor="t"/>
-          <a:lstStyle/>
-          <a:p>
-            <a:pPr indent="0" marL="0">
-              <a:buNone/>
-            </a:pPr>
-            <a:r>
-              <a:rPr lang="en-US" sz="1400" dirty="0">
-                <a:solidFill>
-                  <a:srgbClr val="241F38"/>
-                </a:solidFill>
-                <a:latin typeface="Calibri" pitchFamily="34" charset="0"/>
-                <a:ea typeface="Calibri" pitchFamily="34" charset="-122"/>
-                <a:cs typeface="Calibri" pitchFamily="34" charset="-120"/>
-              </a:rPr>
-              <a:t>Neighbours tap "back on". The card turns green and closes.</a:t>
-            </a:r>
-            <a:endParaRPr lang="en-US" sz="1400" dirty="0"/>
+              <a:t>Example from our demo data: "Outages here are most likely Thursday evening. Past outages usually last about 5 hours." Rule-based by design: a small township does not have the data for a black box.</a:t>
+            </a:r>
+            <a:endParaRPr lang="en-US" sz="1300" dirty="0"/>
           </a:p>
         </p:txBody>
       </p:sp>
@@ -4206,7 +6130,7 @@
         </p:nvSpPr>
         <p:spPr>
           <a:xfrm>
-            <a:off x="457200" y="320040"/>
+            <a:off x="457200" y="274320"/>
             <a:ext cx="8229600" cy="640080"/>
           </a:xfrm>
           <a:prstGeom prst="rect">
@@ -4223,7 +6147,7 @@
               <a:buNone/>
             </a:pPr>
             <a:r>
-              <a:rPr lang="en-US" sz="3400" b="1" dirty="0">
+              <a:rPr lang="en-US" sz="3000" b="1" dirty="0">
                 <a:solidFill>
                   <a:srgbClr val="2E2457"/>
                 </a:solidFill>
@@ -4231,15 +6155,15 @@
                 <a:ea typeface="Cambria" pitchFamily="34" charset="-122"/>
                 <a:cs typeface="Cambria" pitchFamily="34" charset="-120"/>
               </a:rPr>
-              <a:t>Built for a phone, a weak signal and four languages</a:t>
-            </a:r>
-            <a:endParaRPr lang="en-US" sz="3400" dirty="0"/>
+              <a:t>When power is a medical need: the care plan</a:t>
+            </a:r>
+            <a:endParaRPr lang="en-US" sz="3000" dirty="0"/>
           </a:p>
         </p:txBody>
       </p:sp>
       <p:pic>
         <p:nvPicPr>
-          <p:cNvPr id="3" name="Image 0" descr="shots/share.png">    </p:cNvPr>
+          <p:cNvPr id="3" name="Image 0" descr="shots/care.png">    </p:cNvPr>
           <p:cNvPicPr>
             <a:picLocks noChangeAspect="1"/>
           </p:cNvPicPr>
@@ -4253,8 +6177,8 @@
         </p:blipFill>
         <p:spPr>
           <a:xfrm>
-            <a:off x="640080" y="1051560"/>
-            <a:ext cx="1786270" cy="3657600"/>
+            <a:off x="457200" y="1005840"/>
+            <a:ext cx="1830927" cy="3749040"/>
           </a:xfrm>
           <a:prstGeom prst="rect">
             <a:avLst/>
@@ -4270,7 +6194,7 @@
       </p:pic>
       <p:pic>
         <p:nvPicPr>
-          <p:cNvPr id="4" name="Image 1" descr="shots/food.png">    </p:cNvPr>
+          <p:cNvPr id="4" name="Image 1" descr="shots/booking.png">    </p:cNvPr>
           <p:cNvPicPr>
             <a:picLocks noChangeAspect="1"/>
           </p:cNvPicPr>
@@ -4284,8 +6208,8 @@
         </p:blipFill>
         <p:spPr>
           <a:xfrm>
-            <a:off x="2651760" y="1051560"/>
-            <a:ext cx="1786270" cy="3657600"/>
+            <a:off x="2606040" y="1005840"/>
+            <a:ext cx="2743200" cy="8031637"/>
           </a:xfrm>
           <a:prstGeom prst="rect">
             <a:avLst/>
@@ -4299,47 +6223,16 @@
           </a:effectLst>
         </p:spPr>
       </p:pic>
-      <p:pic>
-        <p:nvPicPr>
-          <p:cNvPr id="5" name="Image 2" descr="shots/savings.png">    </p:cNvPr>
-          <p:cNvPicPr>
-            <a:picLocks noChangeAspect="1"/>
-          </p:cNvPicPr>
-          <p:nvPr/>
-        </p:nvPicPr>
-        <p:blipFill>
-          <a:blip r:embed="rId3"/>
-          <a:stretch>
-            <a:fillRect/>
-          </a:stretch>
-        </p:blipFill>
-        <p:spPr>
-          <a:xfrm>
-            <a:off x="4663440" y="1051560"/>
-            <a:ext cx="1786270" cy="3657600"/>
-          </a:xfrm>
-          <a:prstGeom prst="rect">
-            <a:avLst/>
-          </a:prstGeom>
-          <a:effectLst>
-            <a:outerShdw sx="100000" sy="100000" kx="0" ky="0" algn="bl" rotWithShape="0" blurRad="101600" dist="38100" dir="5400000">
-              <a:srgbClr val="000000">
-                <a:alpha val="25000"/>
-              </a:srgbClr>
-            </a:outerShdw>
-          </a:effectLst>
-        </p:spPr>
-      </p:pic>
-      <p:sp>
-        <p:nvSpPr>
-          <p:cNvPr id="6" name="Text 1"/>
-          <p:cNvSpPr txBox="1"/>
-          <p:nvPr/>
-        </p:nvSpPr>
-        <p:spPr>
-          <a:xfrm>
-            <a:off x="6766560" y="1188720"/>
-            <a:ext cx="2011680" cy="3200400"/>
+      <p:sp>
+        <p:nvSpPr>
+          <p:cNvPr id="5" name="Text 1"/>
+          <p:cNvSpPr txBox="1"/>
+          <p:nvPr/>
+        </p:nvSpPr>
+        <p:spPr>
+          <a:xfrm>
+            <a:off x="5577840" y="1097280"/>
+            <a:ext cx="3200400" cy="3383280"/>
           </a:xfrm>
           <a:prstGeom prst="rect">
             <a:avLst/>
@@ -4359,7 +6252,7 @@
               <a:buChar char="•"/>
             </a:pPr>
             <a:r>
-              <a:rPr lang="en-US" sz="1400" dirty="0">
+              <a:rPr lang="en-US" sz="1300" dirty="0">
                 <a:solidFill>
                   <a:srgbClr val="241F38"/>
                 </a:solidFill>
@@ -4367,9 +6260,9 @@
                 <a:ea typeface="Calibri" pitchFamily="34" charset="-122"/>
                 <a:cs typeface="Calibri" pitchFamily="34" charset="-120"/>
               </a:rPr>
-              <a:t>English, isiZulu, Sesotho, Afrikaans</a:t>
-            </a:r>
-            <a:endParaRPr lang="en-US" sz="1400" dirty="0"/>
+              <a:t>Medical power plan: device watts and battery watt-hours give the hours it runs, set against the live outage and the typical duration here</a:t>
+            </a:r>
+            <a:endParaRPr lang="en-US" sz="1300" dirty="0"/>
           </a:p>
           <a:p>
             <a:pPr marL="342900" indent="-342900">
@@ -4380,7 +6273,7 @@
               <a:buChar char="•"/>
             </a:pPr>
             <a:r>
-              <a:rPr lang="en-US" sz="1400" dirty="0">
+              <a:rPr lang="en-US" sz="1300" dirty="0">
                 <a:solidFill>
                   <a:srgbClr val="241F38"/>
                 </a:solidFill>
@@ -4388,9 +6281,9 @@
                 <a:ea typeface="Calibri" pitchFamily="34" charset="-122"/>
                 <a:cs typeface="Calibri" pitchFamily="34" charset="-120"/>
               </a:rPr>
-              <a:t>Installable PWA, works offline</a:t>
-            </a:r>
-            <a:endParaRPr lang="en-US" sz="1400" dirty="0"/>
+              <a:t>Battery too short? One tap books a battery backup</a:t>
+            </a:r>
+            <a:endParaRPr lang="en-US" sz="1300" dirty="0"/>
           </a:p>
           <a:p>
             <a:pPr marL="342900" indent="-342900">
@@ -4401,7 +6294,7 @@
               <a:buChar char="•"/>
             </a:pPr>
             <a:r>
-              <a:rPr lang="en-US" sz="1400" dirty="0">
+              <a:rPr lang="en-US" sz="1300" dirty="0">
                 <a:solidFill>
                   <a:srgbClr val="241F38"/>
                 </a:solidFill>
@@ -4409,9 +6302,9 @@
                 <a:ea typeface="Calibri" pitchFamily="34" charset="-122"/>
                 <a:cs typeface="Calibri" pitchFamily="34" charset="-120"/>
               </a:rPr>
-              <a:t>Posts queue on the phone and send when signal returns</a:t>
-            </a:r>
-            <a:endParaRPr lang="en-US" sz="1400" dirty="0"/>
+              <a:t>Book a carer or equipment the SweepSouth way: fixed price, the 3 nearest carers are asked, the first to accept takes it</a:t>
+            </a:r>
+            <a:endParaRPr lang="en-US" sz="1300" dirty="0"/>
           </a:p>
           <a:p>
             <a:pPr marL="342900" indent="-342900">
@@ -4422,7 +6315,7 @@
               <a:buChar char="•"/>
             </a:pPr>
             <a:r>
-              <a:rPr lang="en-US" sz="1400" dirty="0">
+              <a:rPr lang="en-US" sz="1300" dirty="0">
                 <a:solidFill>
                   <a:srgbClr val="241F38"/>
                 </a:solidFill>
@@ -4430,9 +6323,9 @@
                 <a:ea typeface="Calibri" pitchFamily="34" charset="-122"/>
                 <a:cs typeface="Calibri" pitchFamily="34" charset="-120"/>
               </a:rPr>
-              <a:t>Light and dark mode</a:t>
-            </a:r>
-            <a:endParaRPr lang="en-US" sz="1400" dirty="0"/>
+              <a:t>Oxygen needs a prescription approved first</a:t>
+            </a:r>
+            <a:endParaRPr lang="en-US" sz="1300" dirty="0"/>
           </a:p>
         </p:txBody>
       </p:sp>
@@ -4476,7 +6369,7 @@
         </p:nvSpPr>
         <p:spPr>
           <a:xfrm>
-            <a:off x="457200" y="320040"/>
+            <a:off x="457200" y="274320"/>
             <a:ext cx="8229600" cy="640080"/>
           </a:xfrm>
           <a:prstGeom prst="rect">
@@ -4493,7 +6386,7 @@
               <a:buNone/>
             </a:pPr>
             <a:r>
-              <a:rPr lang="en-US" sz="3400" b="1" dirty="0">
+              <a:rPr lang="en-US" sz="3000" b="1" dirty="0">
                 <a:solidFill>
                   <a:srgbClr val="2E2457"/>
                 </a:solidFill>
@@ -4501,624 +6394,146 @@
                 <a:ea typeface="Cambria" pitchFamily="34" charset="-122"/>
                 <a:cs typeface="Cambria" pitchFamily="34" charset="-120"/>
               </a:rPr>
-              <a:t>Technical architecture</a:t>
-            </a:r>
-            <a:endParaRPr lang="en-US" sz="3400" dirty="0"/>
-          </a:p>
-        </p:txBody>
-      </p:sp>
-      <p:sp>
-        <p:nvSpPr>
-          <p:cNvPr id="3" name="Shape 1"/>
-          <p:cNvSpPr/>
-          <p:nvPr/>
-        </p:nvSpPr>
-        <p:spPr>
-          <a:xfrm>
-            <a:off x="457200" y="1280160"/>
-            <a:ext cx="2194560" cy="1188720"/>
-          </a:xfrm>
-          <a:prstGeom prst="roundRect">
-            <a:avLst>
-              <a:gd name="adj" fmla="val 7692"/>
-            </a:avLst>
-          </a:prstGeom>
-          <a:solidFill>
-            <a:srgbClr val="6A57B8"/>
-          </a:solidFill>
-          <a:ln w="12700">
-            <a:solidFill>
-              <a:srgbClr val="6A57B8"/>
-            </a:solidFill>
-            <a:prstDash val="solid"/>
-          </a:ln>
-        </p:spPr>
-      </p:sp>
-      <p:sp>
-        <p:nvSpPr>
-          <p:cNvPr id="4" name="Text 2"/>
-          <p:cNvSpPr txBox="1"/>
-          <p:nvPr/>
-        </p:nvSpPr>
-        <p:spPr>
-          <a:xfrm>
-            <a:off x="548640" y="1280160"/>
-            <a:ext cx="2011680" cy="1188720"/>
-          </a:xfrm>
-          <a:prstGeom prst="rect">
-            <a:avLst/>
-          </a:prstGeom>
-          <a:noFill/>
-          <a:ln/>
-        </p:spPr>
-        <p:txBody>
-          <a:bodyPr wrap="square" lIns="0" tIns="0" rIns="0" bIns="0" rtlCol="0" anchor="ctr"/>
-          <a:lstStyle/>
-          <a:p>
-            <a:pPr algn="ctr" indent="0" marL="0">
-              <a:buNone/>
-            </a:pPr>
-            <a:r>
-              <a:rPr lang="en-US" sz="1500" b="1" dirty="0">
-                <a:solidFill>
-                  <a:srgbClr val="FFFFFF"/>
+              <a:t>Outages cost money: show how much, and how to stop it</a:t>
+            </a:r>
+            <a:endParaRPr lang="en-US" sz="3000" dirty="0"/>
+          </a:p>
+        </p:txBody>
+      </p:sp>
+      <p:pic>
+        <p:nvPicPr>
+          <p:cNvPr id="3" name="Image 0" descr="shots/business.png">    </p:cNvPr>
+          <p:cNvPicPr>
+            <a:picLocks noChangeAspect="1"/>
+          </p:cNvPicPr>
+          <p:nvPr/>
+        </p:nvPicPr>
+        <p:blipFill>
+          <a:blip r:embed="rId1"/>
+          <a:stretch>
+            <a:fillRect/>
+          </a:stretch>
+        </p:blipFill>
+        <p:spPr>
+          <a:xfrm>
+            <a:off x="457200" y="1005840"/>
+            <a:ext cx="1830927" cy="3749040"/>
+          </a:xfrm>
+          <a:prstGeom prst="rect">
+            <a:avLst/>
+          </a:prstGeom>
+          <a:effectLst>
+            <a:outerShdw sx="100000" sy="100000" kx="0" ky="0" algn="bl" rotWithShape="0" blurRad="101600" dist="38100" dir="5400000">
+              <a:srgbClr val="000000">
+                <a:alpha val="25000"/>
+              </a:srgbClr>
+            </a:outerShdw>
+          </a:effectLst>
+        </p:spPr>
+      </p:pic>
+      <p:sp>
+        <p:nvSpPr>
+          <p:cNvPr id="4" name="Text 1"/>
+          <p:cNvSpPr txBox="1"/>
+          <p:nvPr/>
+        </p:nvSpPr>
+        <p:spPr>
+          <a:xfrm>
+            <a:off x="2926080" y="1097280"/>
+            <a:ext cx="5760720" cy="3383280"/>
+          </a:xfrm>
+          <a:prstGeom prst="rect">
+            <a:avLst/>
+          </a:prstGeom>
+          <a:noFill/>
+          <a:ln/>
+        </p:spPr>
+        <p:txBody>
+          <a:bodyPr wrap="square" lIns="0" tIns="0" rIns="0" bIns="0" rtlCol="0" anchor="t"/>
+          <a:lstStyle/>
+          <a:p>
+            <a:pPr marL="342900" indent="-342900">
+              <a:spcAft>
+                <a:spcPts val="800"/>
+              </a:spcAft>
+              <a:buSzPct val="100000"/>
+              <a:buChar char="•"/>
+            </a:pPr>
+            <a:r>
+              <a:rPr lang="en-US" sz="1500" dirty="0">
+                <a:solidFill>
+                  <a:srgbClr val="241F38"/>
                 </a:solidFill>
                 <a:latin typeface="Calibri" pitchFamily="34" charset="0"/>
                 <a:ea typeface="Calibri" pitchFamily="34" charset="-122"/>
                 <a:cs typeface="Calibri" pitchFamily="34" charset="-120"/>
               </a:rPr>
-              <a:t>PWA client</a:t>
+              <a:t>During a verified outage the shop owner sees: "About R___ lost so far", with lost sales and stock at risk</a:t>
             </a:r>
             <a:endParaRPr lang="en-US" sz="1500" dirty="0"/>
           </a:p>
           <a:p>
-            <a:pPr algn="ctr" indent="0" marL="0">
-              <a:buNone/>
-            </a:pPr>
-            <a:r>
-              <a:rPr lang="en-US" sz="1200" dirty="0">
-                <a:solidFill>
-                  <a:srgbClr val="FFFFFF"/>
+            <a:pPr marL="342900" indent="-342900">
+              <a:spcAft>
+                <a:spcPts val="800"/>
+              </a:spcAft>
+              <a:buSzPct val="100000"/>
+              <a:buChar char="•"/>
+            </a:pPr>
+            <a:r>
+              <a:rPr lang="en-US" sz="1500" dirty="0">
+                <a:solidFill>
+                  <a:srgbClr val="241F38"/>
                 </a:solidFill>
                 <a:latin typeface="Calibri" pitchFamily="34" charset="0"/>
                 <a:ea typeface="Calibri" pitchFamily="34" charset="-122"/>
                 <a:cs typeface="Calibri" pitchFamily="34" charset="-120"/>
               </a:rPr>
-              <a:t>React + Vite, service worker, offline queue</a:t>
+              <a:t>Fridges hold cold about 4 hours shut; the app counts stock at risk after that</a:t>
             </a:r>
             <a:endParaRPr lang="en-US" sz="1500" dirty="0"/>
           </a:p>
-        </p:txBody>
-      </p:sp>
-      <p:sp>
-        <p:nvSpPr>
-          <p:cNvPr id="5" name="Shape 3"/>
-          <p:cNvSpPr/>
-          <p:nvPr/>
-        </p:nvSpPr>
-        <p:spPr>
-          <a:xfrm>
-            <a:off x="3474720" y="1280160"/>
-            <a:ext cx="2194560" cy="1188720"/>
-          </a:xfrm>
-          <a:prstGeom prst="roundRect">
-            <a:avLst>
-              <a:gd name="adj" fmla="val 7692"/>
-            </a:avLst>
-          </a:prstGeom>
-          <a:solidFill>
-            <a:srgbClr val="2E2457"/>
-          </a:solidFill>
-          <a:ln w="12700">
-            <a:solidFill>
-              <a:srgbClr val="2E2457"/>
-            </a:solidFill>
-            <a:prstDash val="solid"/>
-          </a:ln>
-        </p:spPr>
-      </p:sp>
-      <p:sp>
-        <p:nvSpPr>
-          <p:cNvPr id="6" name="Text 4"/>
-          <p:cNvSpPr txBox="1"/>
-          <p:nvPr/>
-        </p:nvSpPr>
-        <p:spPr>
-          <a:xfrm>
-            <a:off x="3566160" y="1280160"/>
-            <a:ext cx="2011680" cy="1188720"/>
-          </a:xfrm>
-          <a:prstGeom prst="rect">
-            <a:avLst/>
-          </a:prstGeom>
-          <a:noFill/>
-          <a:ln/>
-        </p:spPr>
-        <p:txBody>
-          <a:bodyPr wrap="square" lIns="0" tIns="0" rIns="0" bIns="0" rtlCol="0" anchor="ctr"/>
-          <a:lstStyle/>
-          <a:p>
-            <a:pPr algn="ctr" indent="0" marL="0">
-              <a:buNone/>
-            </a:pPr>
-            <a:r>
-              <a:rPr lang="en-US" sz="1500" b="1" dirty="0">
-                <a:solidFill>
-                  <a:srgbClr val="FFFFFF"/>
+          <a:p>
+            <a:pPr marL="342900" indent="-342900">
+              <a:spcAft>
+                <a:spcPts val="800"/>
+              </a:spcAft>
+              <a:buSzPct val="100000"/>
+              <a:buChar char="•"/>
+            </a:pPr>
+            <a:r>
+              <a:rPr lang="en-US" sz="1500" dirty="0">
+                <a:solidFill>
+                  <a:srgbClr val="241F38"/>
                 </a:solidFill>
                 <a:latin typeface="Calibri" pitchFamily="34" charset="0"/>
                 <a:ea typeface="Calibri" pitchFamily="34" charset="-122"/>
                 <a:cs typeface="Calibri" pitchFamily="34" charset="-120"/>
               </a:rPr>
-              <a:t>API server</a:t>
+              <a:t>Ranked fixes by payback: inverter, cold box, water tank</a:t>
             </a:r>
             <a:endParaRPr lang="en-US" sz="1500" dirty="0"/>
           </a:p>
           <a:p>
-            <a:pPr algn="ctr" indent="0" marL="0">
-              <a:buNone/>
-            </a:pPr>
-            <a:r>
-              <a:rPr lang="en-US" sz="1200" dirty="0">
-                <a:solidFill>
-                  <a:srgbClr val="FFFFFF"/>
+            <a:pPr marL="342900" indent="-342900">
+              <a:spcAft>
+                <a:spcPts val="800"/>
+              </a:spcAft>
+              <a:buSzPct val="100000"/>
+              <a:buChar char="•"/>
+            </a:pPr>
+            <a:r>
+              <a:rPr lang="en-US" sz="1500" dirty="0">
+                <a:solidFill>
+                  <a:srgbClr val="241F38"/>
                 </a:solidFill>
                 <a:latin typeface="Calibri" pitchFamily="34" charset="0"/>
                 <a:ea typeface="Calibri" pitchFamily="34" charset="-122"/>
                 <a:cs typeface="Calibri" pitchFamily="34" charset="-120"/>
               </a:rPr>
-              <a:t>Node + Express, rate limits, validation</a:t>
+              <a:t>Opportunity for a bank: an outage savings pot, stock insurance or backup-power finance. Not built, a partnership to explore</a:t>
             </a:r>
             <a:endParaRPr lang="en-US" sz="1500" dirty="0"/>
-          </a:p>
-        </p:txBody>
-      </p:sp>
-      <p:sp>
-        <p:nvSpPr>
-          <p:cNvPr id="7" name="Shape 5"/>
-          <p:cNvSpPr/>
-          <p:nvPr/>
-        </p:nvSpPr>
-        <p:spPr>
-          <a:xfrm>
-            <a:off x="6492240" y="1280160"/>
-            <a:ext cx="2194560" cy="1188720"/>
-          </a:xfrm>
-          <a:prstGeom prst="roundRect">
-            <a:avLst>
-              <a:gd name="adj" fmla="val 7692"/>
-            </a:avLst>
-          </a:prstGeom>
-          <a:solidFill>
-            <a:srgbClr val="6A57B8"/>
-          </a:solidFill>
-          <a:ln w="12700">
-            <a:solidFill>
-              <a:srgbClr val="6A57B8"/>
-            </a:solidFill>
-            <a:prstDash val="solid"/>
-          </a:ln>
-        </p:spPr>
-      </p:sp>
-      <p:sp>
-        <p:nvSpPr>
-          <p:cNvPr id="8" name="Text 6"/>
-          <p:cNvSpPr txBox="1"/>
-          <p:nvPr/>
-        </p:nvSpPr>
-        <p:spPr>
-          <a:xfrm>
-            <a:off x="6583680" y="1280160"/>
-            <a:ext cx="2011680" cy="1188720"/>
-          </a:xfrm>
-          <a:prstGeom prst="rect">
-            <a:avLst/>
-          </a:prstGeom>
-          <a:noFill/>
-          <a:ln/>
-        </p:spPr>
-        <p:txBody>
-          <a:bodyPr wrap="square" lIns="0" tIns="0" rIns="0" bIns="0" rtlCol="0" anchor="ctr"/>
-          <a:lstStyle/>
-          <a:p>
-            <a:pPr algn="ctr" indent="0" marL="0">
-              <a:buNone/>
-            </a:pPr>
-            <a:r>
-              <a:rPr lang="en-US" sz="1500" b="1" dirty="0">
-                <a:solidFill>
-                  <a:srgbClr val="FFFFFF"/>
-                </a:solidFill>
-                <a:latin typeface="Calibri" pitchFamily="34" charset="0"/>
-                <a:ea typeface="Calibri" pitchFamily="34" charset="-122"/>
-                <a:cs typeface="Calibri" pitchFamily="34" charset="-120"/>
-              </a:rPr>
-              <a:t>Database</a:t>
-            </a:r>
-            <a:endParaRPr lang="en-US" sz="1500" dirty="0"/>
-          </a:p>
-          <a:p>
-            <a:pPr algn="ctr" indent="0" marL="0">
-              <a:buNone/>
-            </a:pPr>
-            <a:r>
-              <a:rPr lang="en-US" sz="1200" dirty="0">
-                <a:solidFill>
-                  <a:srgbClr val="FFFFFF"/>
-                </a:solidFill>
-                <a:latin typeface="Calibri" pitchFamily="34" charset="0"/>
-                <a:ea typeface="Calibri" pitchFamily="34" charset="-122"/>
-                <a:cs typeface="Calibri" pitchFamily="34" charset="-120"/>
-              </a:rPr>
-              <a:t>SQLite / libSQL (Turso-ready)</a:t>
-            </a:r>
-            <a:endParaRPr lang="en-US" sz="1500" dirty="0"/>
-          </a:p>
-        </p:txBody>
-      </p:sp>
-      <p:sp>
-        <p:nvSpPr>
-          <p:cNvPr id="9" name="Shape 7"/>
-          <p:cNvSpPr/>
-          <p:nvPr/>
-        </p:nvSpPr>
-        <p:spPr>
-          <a:xfrm>
-            <a:off x="457200" y="3108960"/>
-            <a:ext cx="2194560" cy="1097280"/>
-          </a:xfrm>
-          <a:prstGeom prst="roundRect">
-            <a:avLst>
-              <a:gd name="adj" fmla="val 8333"/>
-            </a:avLst>
-          </a:prstGeom>
-          <a:solidFill>
-            <a:srgbClr val="F4F1FC"/>
-          </a:solidFill>
-          <a:ln w="12700">
-            <a:solidFill>
-              <a:srgbClr val="F4F1FC"/>
-            </a:solidFill>
-            <a:prstDash val="solid"/>
-          </a:ln>
-        </p:spPr>
-      </p:sp>
-      <p:sp>
-        <p:nvSpPr>
-          <p:cNvPr id="10" name="Text 8"/>
-          <p:cNvSpPr txBox="1"/>
-          <p:nvPr/>
-        </p:nvSpPr>
-        <p:spPr>
-          <a:xfrm>
-            <a:off x="548640" y="3108960"/>
-            <a:ext cx="2011680" cy="1097280"/>
-          </a:xfrm>
-          <a:prstGeom prst="rect">
-            <a:avLst/>
-          </a:prstGeom>
-          <a:noFill/>
-          <a:ln/>
-        </p:spPr>
-        <p:txBody>
-          <a:bodyPr wrap="square" lIns="0" tIns="0" rIns="0" bIns="0" rtlCol="0" anchor="ctr"/>
-          <a:lstStyle/>
-          <a:p>
-            <a:pPr algn="ctr" indent="0" marL="0">
-              <a:buNone/>
-            </a:pPr>
-            <a:r>
-              <a:rPr lang="en-US" sz="1500" b="1" dirty="0">
-                <a:solidFill>
-                  <a:srgbClr val="241F38"/>
-                </a:solidFill>
-                <a:latin typeface="Calibri" pitchFamily="34" charset="0"/>
-                <a:ea typeface="Calibri" pitchFamily="34" charset="-122"/>
-                <a:cs typeface="Calibri" pitchFamily="34" charset="-120"/>
-              </a:rPr>
-              <a:t>Eskom + EskomSePush</a:t>
-            </a:r>
-            <a:endParaRPr lang="en-US" sz="1500" dirty="0"/>
-          </a:p>
-          <a:p>
-            <a:pPr algn="ctr" indent="0" marL="0">
-              <a:buNone/>
-            </a:pPr>
-            <a:r>
-              <a:rPr lang="en-US" sz="1200" dirty="0">
-                <a:solidFill>
-                  <a:srgbClr val="241F38"/>
-                </a:solidFill>
-                <a:latin typeface="Calibri" pitchFamily="34" charset="0"/>
-                <a:ea typeface="Calibri" pitchFamily="34" charset="-122"/>
-                <a:cs typeface="Calibri" pitchFamily="34" charset="-120"/>
-              </a:rPr>
-              <a:t>Stage and official slots</a:t>
-            </a:r>
-            <a:endParaRPr lang="en-US" sz="1500" dirty="0"/>
-          </a:p>
-        </p:txBody>
-      </p:sp>
-      <p:sp>
-        <p:nvSpPr>
-          <p:cNvPr id="11" name="Shape 9"/>
-          <p:cNvSpPr/>
-          <p:nvPr/>
-        </p:nvSpPr>
-        <p:spPr>
-          <a:xfrm>
-            <a:off x="3474720" y="3108960"/>
-            <a:ext cx="2194560" cy="1097280"/>
-          </a:xfrm>
-          <a:prstGeom prst="roundRect">
-            <a:avLst>
-              <a:gd name="adj" fmla="val 8333"/>
-            </a:avLst>
-          </a:prstGeom>
-          <a:solidFill>
-            <a:srgbClr val="F4F1FC"/>
-          </a:solidFill>
-          <a:ln w="12700">
-            <a:solidFill>
-              <a:srgbClr val="F4F1FC"/>
-            </a:solidFill>
-            <a:prstDash val="solid"/>
-          </a:ln>
-        </p:spPr>
-      </p:sp>
-      <p:sp>
-        <p:nvSpPr>
-          <p:cNvPr id="12" name="Text 10"/>
-          <p:cNvSpPr txBox="1"/>
-          <p:nvPr/>
-        </p:nvSpPr>
-        <p:spPr>
-          <a:xfrm>
-            <a:off x="3566160" y="3108960"/>
-            <a:ext cx="2011680" cy="1097280"/>
-          </a:xfrm>
-          <a:prstGeom prst="rect">
-            <a:avLst/>
-          </a:prstGeom>
-          <a:noFill/>
-          <a:ln/>
-        </p:spPr>
-        <p:txBody>
-          <a:bodyPr wrap="square" lIns="0" tIns="0" rIns="0" bIns="0" rtlCol="0" anchor="ctr"/>
-          <a:lstStyle/>
-          <a:p>
-            <a:pPr algn="ctr" indent="0" marL="0">
-              <a:buNone/>
-            </a:pPr>
-            <a:r>
-              <a:rPr lang="en-US" sz="1500" b="1" dirty="0">
-                <a:solidFill>
-                  <a:srgbClr val="241F38"/>
-                </a:solidFill>
-                <a:latin typeface="Calibri" pitchFamily="34" charset="0"/>
-                <a:ea typeface="Calibri" pitchFamily="34" charset="-122"/>
-                <a:cs typeface="Calibri" pitchFamily="34" charset="-120"/>
-              </a:rPr>
-              <a:t>OpenStreetMap</a:t>
-            </a:r>
-            <a:endParaRPr lang="en-US" sz="1500" dirty="0"/>
-          </a:p>
-          <a:p>
-            <a:pPr algn="ctr" indent="0" marL="0">
-              <a:buNone/>
-            </a:pPr>
-            <a:r>
-              <a:rPr lang="en-US" sz="1200" dirty="0">
-                <a:solidFill>
-                  <a:srgbClr val="241F38"/>
-                </a:solidFill>
-                <a:latin typeface="Calibri" pitchFamily="34" charset="0"/>
-                <a:ea typeface="Calibri" pitchFamily="34" charset="-122"/>
-                <a:cs typeface="Calibri" pitchFamily="34" charset="-120"/>
-              </a:rPr>
-              <a:t>Shops, clinics, food banks</a:t>
-            </a:r>
-            <a:endParaRPr lang="en-US" sz="1500" dirty="0"/>
-          </a:p>
-        </p:txBody>
-      </p:sp>
-      <p:sp>
-        <p:nvSpPr>
-          <p:cNvPr id="13" name="Shape 11"/>
-          <p:cNvSpPr/>
-          <p:nvPr/>
-        </p:nvSpPr>
-        <p:spPr>
-          <a:xfrm>
-            <a:off x="6492240" y="3108960"/>
-            <a:ext cx="2194560" cy="1097280"/>
-          </a:xfrm>
-          <a:prstGeom prst="roundRect">
-            <a:avLst>
-              <a:gd name="adj" fmla="val 8333"/>
-            </a:avLst>
-          </a:prstGeom>
-          <a:solidFill>
-            <a:srgbClr val="F4F1FC"/>
-          </a:solidFill>
-          <a:ln w="12700">
-            <a:solidFill>
-              <a:srgbClr val="F4F1FC"/>
-            </a:solidFill>
-            <a:prstDash val="solid"/>
-          </a:ln>
-        </p:spPr>
-      </p:sp>
-      <p:sp>
-        <p:nvSpPr>
-          <p:cNvPr id="14" name="Text 12"/>
-          <p:cNvSpPr txBox="1"/>
-          <p:nvPr/>
-        </p:nvSpPr>
-        <p:spPr>
-          <a:xfrm>
-            <a:off x="6583680" y="3108960"/>
-            <a:ext cx="2011680" cy="1097280"/>
-          </a:xfrm>
-          <a:prstGeom prst="rect">
-            <a:avLst/>
-          </a:prstGeom>
-          <a:noFill/>
-          <a:ln/>
-        </p:spPr>
-        <p:txBody>
-          <a:bodyPr wrap="square" lIns="0" tIns="0" rIns="0" bIns="0" rtlCol="0" anchor="ctr"/>
-          <a:lstStyle/>
-          <a:p>
-            <a:pPr algn="ctr" indent="0" marL="0">
-              <a:buNone/>
-            </a:pPr>
-            <a:r>
-              <a:rPr lang="en-US" sz="1500" b="1" dirty="0">
-                <a:solidFill>
-                  <a:srgbClr val="241F38"/>
-                </a:solidFill>
-                <a:latin typeface="Calibri" pitchFamily="34" charset="0"/>
-                <a:ea typeface="Calibri" pitchFamily="34" charset="-122"/>
-                <a:cs typeface="Calibri" pitchFamily="34" charset="-120"/>
-              </a:rPr>
-              <a:t>Open-Meteo + NAMC</a:t>
-            </a:r>
-            <a:endParaRPr lang="en-US" sz="1500" dirty="0"/>
-          </a:p>
-          <a:p>
-            <a:pPr algn="ctr" indent="0" marL="0">
-              <a:buNone/>
-            </a:pPr>
-            <a:r>
-              <a:rPr lang="en-US" sz="1200" dirty="0">
-                <a:solidFill>
-                  <a:srgbClr val="241F38"/>
-                </a:solidFill>
-                <a:latin typeface="Calibri" pitchFamily="34" charset="0"/>
-                <a:ea typeface="Calibri" pitchFamily="34" charset="-122"/>
-                <a:cs typeface="Calibri" pitchFamily="34" charset="-120"/>
-              </a:rPr>
-              <a:t>Weather, food price reports</a:t>
-            </a:r>
-            <a:endParaRPr lang="en-US" sz="1500" dirty="0"/>
-          </a:p>
-        </p:txBody>
-      </p:sp>
-      <p:sp>
-        <p:nvSpPr>
-          <p:cNvPr id="15" name="Text 13"/>
-          <p:cNvSpPr txBox="1"/>
-          <p:nvPr/>
-        </p:nvSpPr>
-        <p:spPr>
-          <a:xfrm>
-            <a:off x="2651760" y="1645920"/>
-            <a:ext cx="822960" cy="457200"/>
-          </a:xfrm>
-          <a:prstGeom prst="rect">
-            <a:avLst/>
-          </a:prstGeom>
-          <a:noFill/>
-          <a:ln/>
-        </p:spPr>
-        <p:txBody>
-          <a:bodyPr wrap="square" lIns="0" tIns="0" rIns="0" bIns="0" rtlCol="0" anchor="ctr"/>
-          <a:lstStyle/>
-          <a:p>
-            <a:pPr algn="ctr" indent="0" marL="0">
-              <a:buNone/>
-            </a:pPr>
-            <a:r>
-              <a:rPr lang="en-US" sz="2000" b="1" dirty="0">
-                <a:solidFill>
-                  <a:srgbClr val="2E2457"/>
-                </a:solidFill>
-                <a:latin typeface="Calibri" pitchFamily="34" charset="0"/>
-                <a:ea typeface="Calibri" pitchFamily="34" charset="-122"/>
-                <a:cs typeface="Calibri" pitchFamily="34" charset="-120"/>
-              </a:rPr>
-              <a:t>&lt;&gt;</a:t>
-            </a:r>
-            <a:endParaRPr lang="en-US" sz="2000" dirty="0"/>
-          </a:p>
-        </p:txBody>
-      </p:sp>
-      <p:sp>
-        <p:nvSpPr>
-          <p:cNvPr id="16" name="Text 14"/>
-          <p:cNvSpPr txBox="1"/>
-          <p:nvPr/>
-        </p:nvSpPr>
-        <p:spPr>
-          <a:xfrm>
-            <a:off x="5669280" y="1645920"/>
-            <a:ext cx="822960" cy="457200"/>
-          </a:xfrm>
-          <a:prstGeom prst="rect">
-            <a:avLst/>
-          </a:prstGeom>
-          <a:noFill/>
-          <a:ln/>
-        </p:spPr>
-        <p:txBody>
-          <a:bodyPr wrap="square" lIns="0" tIns="0" rIns="0" bIns="0" rtlCol="0" anchor="ctr"/>
-          <a:lstStyle/>
-          <a:p>
-            <a:pPr algn="ctr" indent="0" marL="0">
-              <a:buNone/>
-            </a:pPr>
-            <a:r>
-              <a:rPr lang="en-US" sz="2000" b="1" dirty="0">
-                <a:solidFill>
-                  <a:srgbClr val="2E2457"/>
-                </a:solidFill>
-                <a:latin typeface="Calibri" pitchFamily="34" charset="0"/>
-                <a:ea typeface="Calibri" pitchFamily="34" charset="-122"/>
-                <a:cs typeface="Calibri" pitchFamily="34" charset="-120"/>
-              </a:rPr>
-              <a:t>&lt;&gt;</a:t>
-            </a:r>
-            <a:endParaRPr lang="en-US" sz="2000" dirty="0"/>
-          </a:p>
-        </p:txBody>
-      </p:sp>
-      <p:sp>
-        <p:nvSpPr>
-          <p:cNvPr id="17" name="Text 15"/>
-          <p:cNvSpPr txBox="1"/>
-          <p:nvPr/>
-        </p:nvSpPr>
-        <p:spPr>
-          <a:xfrm>
-            <a:off x="457200" y="4434840"/>
-            <a:ext cx="8229600" cy="274320"/>
-          </a:xfrm>
-          <a:prstGeom prst="rect">
-            <a:avLst/>
-          </a:prstGeom>
-          <a:noFill/>
-          <a:ln/>
-        </p:spPr>
-        <p:txBody>
-          <a:bodyPr wrap="square" lIns="0" tIns="0" rIns="0" bIns="0" rtlCol="0" anchor="ctr"/>
-          <a:lstStyle/>
-          <a:p>
-            <a:pPr indent="0" marL="0">
-              <a:buNone/>
-            </a:pPr>
-            <a:r>
-              <a:rPr lang="en-US" sz="1300" dirty="0">
-                <a:solidFill>
-                  <a:srgbClr val="5F5978"/>
-                </a:solidFill>
-                <a:latin typeface="Calibri" pitchFamily="34" charset="0"/>
-                <a:ea typeface="Calibri" pitchFamily="34" charset="-122"/>
-                <a:cs typeface="Calibri" pitchFamily="34" charset="-120"/>
-              </a:rPr>
-              <a:t>Server fetches and caches external sources (5 min to 24 h), so phones stay light.</a:t>
-            </a:r>
-            <a:endParaRPr lang="en-US" sz="1300" dirty="0"/>
           </a:p>
         </p:txBody>
       </p:sp>
@@ -5162,7 +6577,7 @@
         </p:nvSpPr>
         <p:spPr>
           <a:xfrm>
-            <a:off x="457200" y="320040"/>
+            <a:off x="457200" y="274320"/>
             <a:ext cx="8229600" cy="640080"/>
           </a:xfrm>
           <a:prstGeom prst="rect">
@@ -5179,7 +6594,7 @@
               <a:buNone/>
             </a:pPr>
             <a:r>
-              <a:rPr lang="en-US" sz="3400" b="1" dirty="0">
+              <a:rPr lang="en-US" sz="3000" b="1" dirty="0">
                 <a:solidFill>
                   <a:srgbClr val="2E2457"/>
                 </a:solidFill>
@@ -5187,9 +6602,9 @@
                 <a:ea typeface="Cambria" pitchFamily="34" charset="-122"/>
                 <a:cs typeface="Cambria" pitchFamily="34" charset="-120"/>
               </a:rPr>
-              <a:t>Security and privacy by design</a:t>
-            </a:r>
-            <a:endParaRPr lang="en-US" sz="3400" dirty="0"/>
+              <a:t>One outage, one household: Gogo's family in Alexandra</a:t>
+            </a:r>
+            <a:endParaRPr lang="en-US" sz="3000" dirty="0"/>
           </a:p>
         </p:txBody>
       </p:sp>
@@ -5201,20 +6616,18 @@
         </p:nvSpPr>
         <p:spPr>
           <a:xfrm>
-            <a:off x="457200" y="1188720"/>
-            <a:ext cx="4023360" cy="1463040"/>
-          </a:xfrm>
-          <a:prstGeom prst="roundRect">
-            <a:avLst>
-              <a:gd name="adj" fmla="val 7500"/>
-            </a:avLst>
+            <a:off x="502920" y="1280160"/>
+            <a:ext cx="548640" cy="548640"/>
+          </a:xfrm>
+          <a:prstGeom prst="ellipse">
+            <a:avLst/>
           </a:prstGeom>
           <a:solidFill>
-            <a:srgbClr val="F4F1FC"/>
+            <a:srgbClr val="6A57B8"/>
           </a:solidFill>
           <a:ln w="12700">
             <a:solidFill>
-              <a:srgbClr val="F4F1FC"/>
+              <a:srgbClr val="6A57B8"/>
             </a:solidFill>
             <a:prstDash val="solid"/>
           </a:ln>
@@ -5228,8 +6641,8 @@
         </p:nvSpPr>
         <p:spPr>
           <a:xfrm>
-            <a:off x="640080" y="1325880"/>
-            <a:ext cx="3657600" cy="365760"/>
+            <a:off x="502920" y="1280160"/>
+            <a:ext cx="548640" cy="548640"/>
           </a:xfrm>
           <a:prstGeom prst="rect">
             <a:avLst/>
@@ -5241,21 +6654,21 @@
           <a:bodyPr wrap="square" lIns="0" tIns="0" rIns="0" bIns="0" rtlCol="0" anchor="ctr"/>
           <a:lstStyle/>
           <a:p>
-            <a:pPr indent="0" marL="0">
-              <a:buNone/>
-            </a:pPr>
-            <a:r>
-              <a:rPr lang="en-US" sz="1800" b="1" dirty="0">
-                <a:solidFill>
-                  <a:srgbClr val="6A57B8"/>
+            <a:pPr algn="ctr" indent="0" marL="0">
+              <a:buNone/>
+            </a:pPr>
+            <a:r>
+              <a:rPr lang="en-US" sz="2000" b="1" dirty="0">
+                <a:solidFill>
+                  <a:srgbClr val="FFFFFF"/>
                 </a:solidFill>
                 <a:latin typeface="Cambria" pitchFamily="34" charset="0"/>
                 <a:ea typeface="Cambria" pitchFamily="34" charset="-122"/>
                 <a:cs typeface="Cambria" pitchFamily="34" charset="-120"/>
               </a:rPr>
-              <a:t>Anonymous by default</a:t>
-            </a:r>
-            <a:endParaRPr lang="en-US" sz="1800" dirty="0"/>
+              <a:t>1</a:t>
+            </a:r>
+            <a:endParaRPr lang="en-US" sz="2000" dirty="0"/>
           </a:p>
         </p:txBody>
       </p:sp>
@@ -5267,8 +6680,47 @@
         </p:nvSpPr>
         <p:spPr>
           <a:xfrm>
-            <a:off x="640080" y="1737360"/>
-            <a:ext cx="3657600" cy="777240"/>
+            <a:off x="457200" y="2011680"/>
+            <a:ext cx="1554480" cy="365760"/>
+          </a:xfrm>
+          <a:prstGeom prst="rect">
+            <a:avLst/>
+          </a:prstGeom>
+          <a:noFill/>
+          <a:ln/>
+        </p:spPr>
+        <p:txBody>
+          <a:bodyPr wrap="square" lIns="0" tIns="0" rIns="0" bIns="0" rtlCol="0" anchor="ctr"/>
+          <a:lstStyle/>
+          <a:p>
+            <a:pPr indent="0" marL="0">
+              <a:buNone/>
+            </a:pPr>
+            <a:r>
+              <a:rPr lang="en-US" sz="1600" b="1" dirty="0">
+                <a:solidFill>
+                  <a:srgbClr val="2E2457"/>
+                </a:solidFill>
+                <a:latin typeface="Cambria" pitchFamily="34" charset="0"/>
+                <a:ea typeface="Cambria" pitchFamily="34" charset="-122"/>
+                <a:cs typeface="Cambria" pitchFamily="34" charset="-120"/>
+              </a:rPr>
+              <a:t>Set up once</a:t>
+            </a:r>
+            <a:endParaRPr lang="en-US" sz="1600" dirty="0"/>
+          </a:p>
+        </p:txBody>
+      </p:sp>
+      <p:sp>
+        <p:nvSpPr>
+          <p:cNvPr id="6" name="Text 4"/>
+          <p:cNvSpPr txBox="1"/>
+          <p:nvPr/>
+        </p:nvSpPr>
+        <p:spPr>
+          <a:xfrm>
+            <a:off x="457200" y="2423160"/>
+            <a:ext cx="1554480" cy="2011680"/>
           </a:xfrm>
           <a:prstGeom prst="rect">
             <a:avLst/>
@@ -5284,7 +6736,7 @@
               <a:buNone/>
             </a:pPr>
             <a:r>
-              <a:rPr lang="en-US" sz="1400" dirty="0">
+              <a:rPr lang="en-US" sz="1300" dirty="0">
                 <a:solidFill>
                   <a:srgbClr val="241F38"/>
                 </a:solidFill>
@@ -5292,34 +6744,32 @@
                 <a:ea typeface="Calibri" pitchFamily="34" charset="-122"/>
                 <a:cs typeface="Calibri" pitchFamily="34" charset="-120"/>
               </a:rPr>
-              <a:t>No accounts, no phone numbers. A random device id limits one vote per device.</a:t>
-            </a:r>
-            <a:endParaRPr lang="en-US" sz="1400" dirty="0"/>
-          </a:p>
-        </p:txBody>
-      </p:sp>
-      <p:sp>
-        <p:nvSpPr>
-          <p:cNvPr id="6" name="Shape 4"/>
+              <a:t>Her grandson enters the concentrator (300 W) and battery (1000 Wh): 2.8 hours.</a:t>
+            </a:r>
+            <a:endParaRPr lang="en-US" sz="1300" dirty="0"/>
+          </a:p>
+        </p:txBody>
+      </p:sp>
+      <p:sp>
+        <p:nvSpPr>
+          <p:cNvPr id="7" name="Shape 5"/>
           <p:cNvSpPr/>
           <p:nvPr/>
         </p:nvSpPr>
         <p:spPr>
           <a:xfrm>
-            <a:off x="4663440" y="1188720"/>
-            <a:ext cx="4023360" cy="1463040"/>
-          </a:xfrm>
-          <a:prstGeom prst="roundRect">
-            <a:avLst>
-              <a:gd name="adj" fmla="val 7500"/>
-            </a:avLst>
+            <a:off x="2167128" y="1280160"/>
+            <a:ext cx="548640" cy="548640"/>
+          </a:xfrm>
+          <a:prstGeom prst="ellipse">
+            <a:avLst/>
           </a:prstGeom>
           <a:solidFill>
-            <a:srgbClr val="F4F1FC"/>
+            <a:srgbClr val="6A57B8"/>
           </a:solidFill>
           <a:ln w="12700">
             <a:solidFill>
-              <a:srgbClr val="F4F1FC"/>
+              <a:srgbClr val="6A57B8"/>
             </a:solidFill>
             <a:prstDash val="solid"/>
           </a:ln>
@@ -5327,14 +6777,14 @@
       </p:sp>
       <p:sp>
         <p:nvSpPr>
-          <p:cNvPr id="7" name="Text 5"/>
-          <p:cNvSpPr txBox="1"/>
-          <p:nvPr/>
-        </p:nvSpPr>
-        <p:spPr>
-          <a:xfrm>
-            <a:off x="4846320" y="1325880"/>
-            <a:ext cx="3657600" cy="365760"/>
+          <p:cNvPr id="8" name="Text 6"/>
+          <p:cNvSpPr txBox="1"/>
+          <p:nvPr/>
+        </p:nvSpPr>
+        <p:spPr>
+          <a:xfrm>
+            <a:off x="2167128" y="1280160"/>
+            <a:ext cx="548640" cy="548640"/>
           </a:xfrm>
           <a:prstGeom prst="rect">
             <a:avLst/>
@@ -5346,34 +6796,73 @@
           <a:bodyPr wrap="square" lIns="0" tIns="0" rIns="0" bIns="0" rtlCol="0" anchor="ctr"/>
           <a:lstStyle/>
           <a:p>
-            <a:pPr indent="0" marL="0">
-              <a:buNone/>
-            </a:pPr>
-            <a:r>
-              <a:rPr lang="en-US" sz="1800" b="1" dirty="0">
-                <a:solidFill>
-                  <a:srgbClr val="6A57B8"/>
+            <a:pPr algn="ctr" indent="0" marL="0">
+              <a:buNone/>
+            </a:pPr>
+            <a:r>
+              <a:rPr lang="en-US" sz="2000" b="1" dirty="0">
+                <a:solidFill>
+                  <a:srgbClr val="FFFFFF"/>
                 </a:solidFill>
                 <a:latin typeface="Cambria" pitchFamily="34" charset="0"/>
                 <a:ea typeface="Cambria" pitchFamily="34" charset="-122"/>
                 <a:cs typeface="Cambria" pitchFamily="34" charset="-120"/>
               </a:rPr>
-              <a:t>Input safety</a:t>
-            </a:r>
-            <a:endParaRPr lang="en-US" sz="1800" dirty="0"/>
-          </a:p>
-        </p:txBody>
-      </p:sp>
-      <p:sp>
-        <p:nvSpPr>
-          <p:cNvPr id="8" name="Text 6"/>
-          <p:cNvSpPr txBox="1"/>
-          <p:nvPr/>
-        </p:nvSpPr>
-        <p:spPr>
-          <a:xfrm>
-            <a:off x="4846320" y="1737360"/>
-            <a:ext cx="3657600" cy="777240"/>
+              <a:t>2</a:t>
+            </a:r>
+            <a:endParaRPr lang="en-US" sz="2000" dirty="0"/>
+          </a:p>
+        </p:txBody>
+      </p:sp>
+      <p:sp>
+        <p:nvSpPr>
+          <p:cNvPr id="9" name="Text 7"/>
+          <p:cNvSpPr txBox="1"/>
+          <p:nvPr/>
+        </p:nvSpPr>
+        <p:spPr>
+          <a:xfrm>
+            <a:off x="2121408" y="2011680"/>
+            <a:ext cx="1554480" cy="365760"/>
+          </a:xfrm>
+          <a:prstGeom prst="rect">
+            <a:avLst/>
+          </a:prstGeom>
+          <a:noFill/>
+          <a:ln/>
+        </p:spPr>
+        <p:txBody>
+          <a:bodyPr wrap="square" lIns="0" tIns="0" rIns="0" bIns="0" rtlCol="0" anchor="ctr"/>
+          <a:lstStyle/>
+          <a:p>
+            <a:pPr indent="0" marL="0">
+              <a:buNone/>
+            </a:pPr>
+            <a:r>
+              <a:rPr lang="en-US" sz="1600" b="1" dirty="0">
+                <a:solidFill>
+                  <a:srgbClr val="2E2457"/>
+                </a:solidFill>
+                <a:latin typeface="Cambria" pitchFamily="34" charset="0"/>
+                <a:ea typeface="Cambria" pitchFamily="34" charset="-122"/>
+                <a:cs typeface="Cambria" pitchFamily="34" charset="-120"/>
+              </a:rPr>
+              <a:t>Power fails</a:t>
+            </a:r>
+            <a:endParaRPr lang="en-US" sz="1600" dirty="0"/>
+          </a:p>
+        </p:txBody>
+      </p:sp>
+      <p:sp>
+        <p:nvSpPr>
+          <p:cNvPr id="10" name="Text 8"/>
+          <p:cNvSpPr txBox="1"/>
+          <p:nvPr/>
+        </p:nvSpPr>
+        <p:spPr>
+          <a:xfrm>
+            <a:off x="2121408" y="2423160"/>
+            <a:ext cx="1554480" cy="2011680"/>
           </a:xfrm>
           <a:prstGeom prst="rect">
             <a:avLst/>
@@ -5389,7 +6878,7 @@
               <a:buNone/>
             </a:pPr>
             <a:r>
-              <a:rPr lang="en-US" sz="1400" dirty="0">
+              <a:rPr lang="en-US" sz="1300" dirty="0">
                 <a:solidFill>
                   <a:srgbClr val="241F38"/>
                 </a:solidFill>
@@ -5397,34 +6886,32 @@
                 <a:ea typeface="Calibri" pitchFamily="34" charset="-122"/>
                 <a:cs typeface="Calibri" pitchFamily="34" charset="-120"/>
               </a:rPr>
-              <a:t>Length limits, no links, phone or ID numbers in posts. Parameterised SQL only.</a:t>
-            </a:r>
-            <a:endParaRPr lang="en-US" sz="1400" dirty="0"/>
-          </a:p>
-        </p:txBody>
-      </p:sp>
-      <p:sp>
-        <p:nvSpPr>
-          <p:cNvPr id="9" name="Shape 7"/>
+              <a:t>Three neighbours report it. It is verified in minutes, on the map.</a:t>
+            </a:r>
+            <a:endParaRPr lang="en-US" sz="1300" dirty="0"/>
+          </a:p>
+        </p:txBody>
+      </p:sp>
+      <p:sp>
+        <p:nvSpPr>
+          <p:cNvPr id="11" name="Shape 9"/>
           <p:cNvSpPr/>
           <p:nvPr/>
         </p:nvSpPr>
         <p:spPr>
           <a:xfrm>
-            <a:off x="457200" y="2834640"/>
-            <a:ext cx="4023360" cy="1463040"/>
-          </a:xfrm>
-          <a:prstGeom prst="roundRect">
-            <a:avLst>
-              <a:gd name="adj" fmla="val 7500"/>
-            </a:avLst>
+            <a:off x="3831336" y="1280160"/>
+            <a:ext cx="548640" cy="548640"/>
+          </a:xfrm>
+          <a:prstGeom prst="ellipse">
+            <a:avLst/>
           </a:prstGeom>
           <a:solidFill>
-            <a:srgbClr val="F4F1FC"/>
+            <a:srgbClr val="6A57B8"/>
           </a:solidFill>
           <a:ln w="12700">
             <a:solidFill>
-              <a:srgbClr val="F4F1FC"/>
+              <a:srgbClr val="6A57B8"/>
             </a:solidFill>
             <a:prstDash val="solid"/>
           </a:ln>
@@ -5432,14 +6919,14 @@
       </p:sp>
       <p:sp>
         <p:nvSpPr>
-          <p:cNvPr id="10" name="Text 8"/>
-          <p:cNvSpPr txBox="1"/>
-          <p:nvPr/>
-        </p:nvSpPr>
-        <p:spPr>
-          <a:xfrm>
-            <a:off x="640080" y="2971800"/>
-            <a:ext cx="3657600" cy="365760"/>
+          <p:cNvPr id="12" name="Text 10"/>
+          <p:cNvSpPr txBox="1"/>
+          <p:nvPr/>
+        </p:nvSpPr>
+        <p:spPr>
+          <a:xfrm>
+            <a:off x="3831336" y="1280160"/>
+            <a:ext cx="548640" cy="548640"/>
           </a:xfrm>
           <a:prstGeom prst="rect">
             <a:avLst/>
@@ -5451,34 +6938,73 @@
           <a:bodyPr wrap="square" lIns="0" tIns="0" rIns="0" bIns="0" rtlCol="0" anchor="ctr"/>
           <a:lstStyle/>
           <a:p>
-            <a:pPr indent="0" marL="0">
-              <a:buNone/>
-            </a:pPr>
-            <a:r>
-              <a:rPr lang="en-US" sz="1800" b="1" dirty="0">
-                <a:solidFill>
-                  <a:srgbClr val="6A57B8"/>
+            <a:pPr algn="ctr" indent="0" marL="0">
+              <a:buNone/>
+            </a:pPr>
+            <a:r>
+              <a:rPr lang="en-US" sz="2000" b="1" dirty="0">
+                <a:solidFill>
+                  <a:srgbClr val="FFFFFF"/>
                 </a:solidFill>
                 <a:latin typeface="Cambria" pitchFamily="34" charset="0"/>
                 <a:ea typeface="Cambria" pitchFamily="34" charset="-122"/>
                 <a:cs typeface="Cambria" pitchFamily="34" charset="-120"/>
               </a:rPr>
-              <a:t>Abuse control</a:t>
-            </a:r>
-            <a:endParaRPr lang="en-US" sz="1800" dirty="0"/>
-          </a:p>
-        </p:txBody>
-      </p:sp>
-      <p:sp>
-        <p:nvSpPr>
-          <p:cNvPr id="11" name="Text 9"/>
-          <p:cNvSpPr txBox="1"/>
-          <p:nvPr/>
-        </p:nvSpPr>
-        <p:spPr>
-          <a:xfrm>
-            <a:off x="640080" y="3383280"/>
-            <a:ext cx="3657600" cy="777240"/>
+              <a:t>3</a:t>
+            </a:r>
+            <a:endParaRPr lang="en-US" sz="2000" dirty="0"/>
+          </a:p>
+        </p:txBody>
+      </p:sp>
+      <p:sp>
+        <p:nvSpPr>
+          <p:cNvPr id="13" name="Text 11"/>
+          <p:cNvSpPr txBox="1"/>
+          <p:nvPr/>
+        </p:nvSpPr>
+        <p:spPr>
+          <a:xfrm>
+            <a:off x="3785616" y="2011680"/>
+            <a:ext cx="1554480" cy="365760"/>
+          </a:xfrm>
+          <a:prstGeom prst="rect">
+            <a:avLst/>
+          </a:prstGeom>
+          <a:noFill/>
+          <a:ln/>
+        </p:spPr>
+        <p:txBody>
+          <a:bodyPr wrap="square" lIns="0" tIns="0" rIns="0" bIns="0" rtlCol="0" anchor="ctr"/>
+          <a:lstStyle/>
+          <a:p>
+            <a:pPr indent="0" marL="0">
+              <a:buNone/>
+            </a:pPr>
+            <a:r>
+              <a:rPr lang="en-US" sz="1600" b="1" dirty="0">
+                <a:solidFill>
+                  <a:srgbClr val="2E2457"/>
+                </a:solidFill>
+                <a:latin typeface="Cambria" pitchFamily="34" charset="0"/>
+                <a:ea typeface="Cambria" pitchFamily="34" charset="-122"/>
+                <a:cs typeface="Cambria" pitchFamily="34" charset="-120"/>
+              </a:rPr>
+              <a:t>Knows what to do</a:t>
+            </a:r>
+            <a:endParaRPr lang="en-US" sz="1600" dirty="0"/>
+          </a:p>
+        </p:txBody>
+      </p:sp>
+      <p:sp>
+        <p:nvSpPr>
+          <p:cNvPr id="14" name="Text 12"/>
+          <p:cNvSpPr txBox="1"/>
+          <p:nvPr/>
+        </p:nvSpPr>
+        <p:spPr>
+          <a:xfrm>
+            <a:off x="3785616" y="2423160"/>
+            <a:ext cx="1554480" cy="2011680"/>
           </a:xfrm>
           <a:prstGeom prst="rect">
             <a:avLst/>
@@ -5494,7 +7020,7 @@
               <a:buNone/>
             </a:pPr>
             <a:r>
-              <a:rPr lang="en-US" sz="1400" dirty="0">
+              <a:rPr lang="en-US" sz="1300" dirty="0">
                 <a:solidFill>
                   <a:srgbClr val="241F38"/>
                 </a:solidFill>
@@ -5502,34 +7028,32 @@
                 <a:ea typeface="Calibri" pitchFamily="34" charset="-122"/>
                 <a:cs typeface="Calibri" pitchFamily="34" charset="-120"/>
               </a:rPr>
-              <a:t>Per-IP rate limits. 3 flags from different devices auto-hide content.</a:t>
-            </a:r>
-            <a:endParaRPr lang="en-US" sz="1400" dirty="0"/>
-          </a:p>
-        </p:txBody>
-      </p:sp>
-      <p:sp>
-        <p:nvSpPr>
-          <p:cNvPr id="12" name="Shape 10"/>
+              <a:t>"Past outages here last about 5 hours. Your battery is shorter. Get a backup."</a:t>
+            </a:r>
+            <a:endParaRPr lang="en-US" sz="1300" dirty="0"/>
+          </a:p>
+        </p:txBody>
+      </p:sp>
+      <p:sp>
+        <p:nvSpPr>
+          <p:cNvPr id="15" name="Shape 13"/>
           <p:cNvSpPr/>
           <p:nvPr/>
         </p:nvSpPr>
         <p:spPr>
           <a:xfrm>
-            <a:off x="4663440" y="2834640"/>
-            <a:ext cx="4023360" cy="1463040"/>
-          </a:xfrm>
-          <a:prstGeom prst="roundRect">
-            <a:avLst>
-              <a:gd name="adj" fmla="val 7500"/>
-            </a:avLst>
+            <a:off x="5495544" y="1280160"/>
+            <a:ext cx="548640" cy="548640"/>
+          </a:xfrm>
+          <a:prstGeom prst="ellipse">
+            <a:avLst/>
           </a:prstGeom>
           <a:solidFill>
-            <a:srgbClr val="F4F1FC"/>
+            <a:srgbClr val="6A57B8"/>
           </a:solidFill>
           <a:ln w="12700">
             <a:solidFill>
-              <a:srgbClr val="F4F1FC"/>
+              <a:srgbClr val="6A57B8"/>
             </a:solidFill>
             <a:prstDash val="solid"/>
           </a:ln>
@@ -5537,14 +7061,14 @@
       </p:sp>
       <p:sp>
         <p:nvSpPr>
-          <p:cNvPr id="13" name="Text 11"/>
-          <p:cNvSpPr txBox="1"/>
-          <p:nvPr/>
-        </p:nvSpPr>
-        <p:spPr>
-          <a:xfrm>
-            <a:off x="4846320" y="2971800"/>
-            <a:ext cx="3657600" cy="365760"/>
+          <p:cNvPr id="16" name="Text 14"/>
+          <p:cNvSpPr txBox="1"/>
+          <p:nvPr/>
+        </p:nvSpPr>
+        <p:spPr>
+          <a:xfrm>
+            <a:off x="5495544" y="1280160"/>
+            <a:ext cx="548640" cy="548640"/>
           </a:xfrm>
           <a:prstGeom prst="rect">
             <a:avLst/>
@@ -5556,34 +7080,73 @@
           <a:bodyPr wrap="square" lIns="0" tIns="0" rIns="0" bIns="0" rtlCol="0" anchor="ctr"/>
           <a:lstStyle/>
           <a:p>
-            <a:pPr indent="0" marL="0">
-              <a:buNone/>
-            </a:pPr>
-            <a:r>
-              <a:rPr lang="en-US" sz="1800" b="1" dirty="0">
-                <a:solidFill>
-                  <a:srgbClr val="6A57B8"/>
+            <a:pPr algn="ctr" indent="0" marL="0">
+              <a:buNone/>
+            </a:pPr>
+            <a:r>
+              <a:rPr lang="en-US" sz="2000" b="1" dirty="0">
+                <a:solidFill>
+                  <a:srgbClr val="FFFFFF"/>
                 </a:solidFill>
                 <a:latin typeface="Cambria" pitchFamily="34" charset="0"/>
                 <a:ea typeface="Cambria" pitchFamily="34" charset="-122"/>
                 <a:cs typeface="Cambria" pitchFamily="34" charset="-120"/>
               </a:rPr>
-              <a:t>Admin and transport</a:t>
-            </a:r>
-            <a:endParaRPr lang="en-US" sz="1800" dirty="0"/>
-          </a:p>
-        </p:txBody>
-      </p:sp>
-      <p:sp>
-        <p:nvSpPr>
-          <p:cNvPr id="14" name="Text 12"/>
-          <p:cNvSpPr txBox="1"/>
-          <p:nvPr/>
-        </p:nvSpPr>
-        <p:spPr>
-          <a:xfrm>
-            <a:off x="4846320" y="3383280"/>
-            <a:ext cx="3657600" cy="777240"/>
+              <a:t>4</a:t>
+            </a:r>
+            <a:endParaRPr lang="en-US" sz="2000" dirty="0"/>
+          </a:p>
+        </p:txBody>
+      </p:sp>
+      <p:sp>
+        <p:nvSpPr>
+          <p:cNvPr id="17" name="Text 15"/>
+          <p:cNvSpPr txBox="1"/>
+          <p:nvPr/>
+        </p:nvSpPr>
+        <p:spPr>
+          <a:xfrm>
+            <a:off x="5449824" y="2011680"/>
+            <a:ext cx="1554480" cy="365760"/>
+          </a:xfrm>
+          <a:prstGeom prst="rect">
+            <a:avLst/>
+          </a:prstGeom>
+          <a:noFill/>
+          <a:ln/>
+        </p:spPr>
+        <p:txBody>
+          <a:bodyPr wrap="square" lIns="0" tIns="0" rIns="0" bIns="0" rtlCol="0" anchor="ctr"/>
+          <a:lstStyle/>
+          <a:p>
+            <a:pPr indent="0" marL="0">
+              <a:buNone/>
+            </a:pPr>
+            <a:r>
+              <a:rPr lang="en-US" sz="1600" b="1" dirty="0">
+                <a:solidFill>
+                  <a:srgbClr val="2E2457"/>
+                </a:solidFill>
+                <a:latin typeface="Cambria" pitchFamily="34" charset="0"/>
+                <a:ea typeface="Cambria" pitchFamily="34" charset="-122"/>
+                <a:cs typeface="Cambria" pitchFamily="34" charset="-120"/>
+              </a:rPr>
+              <a:t>Gets help</a:t>
+            </a:r>
+            <a:endParaRPr lang="en-US" sz="1600" dirty="0"/>
+          </a:p>
+        </p:txBody>
+      </p:sp>
+      <p:sp>
+        <p:nvSpPr>
+          <p:cNvPr id="18" name="Text 16"/>
+          <p:cNvSpPr txBox="1"/>
+          <p:nvPr/>
+        </p:nvSpPr>
+        <p:spPr>
+          <a:xfrm>
+            <a:off x="5449824" y="2423160"/>
+            <a:ext cx="1554480" cy="2011680"/>
           </a:xfrm>
           <a:prstGeom prst="rect">
             <a:avLst/>
@@ -5599,7 +7162,7 @@
               <a:buNone/>
             </a:pPr>
             <a:r>
-              <a:rPr lang="en-US" sz="1400" dirty="0">
+              <a:rPr lang="en-US" sz="1300" dirty="0">
                 <a:solidFill>
                   <a:srgbClr val="241F38"/>
                 </a:solidFill>
@@ -5607,9 +7170,151 @@
                 <a:ea typeface="Calibri" pitchFamily="34" charset="-122"/>
                 <a:cs typeface="Calibri" pitchFamily="34" charset="-120"/>
               </a:rPr>
-              <a:t>Token-protected moderation, constant-time compare, no-store cache. Security headers set.</a:t>
-            </a:r>
-            <a:endParaRPr lang="en-US" sz="1400" dirty="0"/>
+              <a:t>Books a battery backup. The nearest carers are asked.</a:t>
+            </a:r>
+            <a:endParaRPr lang="en-US" sz="1300" dirty="0"/>
+          </a:p>
+        </p:txBody>
+      </p:sp>
+      <p:sp>
+        <p:nvSpPr>
+          <p:cNvPr id="19" name="Shape 17"/>
+          <p:cNvSpPr/>
+          <p:nvPr/>
+        </p:nvSpPr>
+        <p:spPr>
+          <a:xfrm>
+            <a:off x="7159752" y="1280160"/>
+            <a:ext cx="548640" cy="548640"/>
+          </a:xfrm>
+          <a:prstGeom prst="ellipse">
+            <a:avLst/>
+          </a:prstGeom>
+          <a:solidFill>
+            <a:srgbClr val="6A57B8"/>
+          </a:solidFill>
+          <a:ln w="12700">
+            <a:solidFill>
+              <a:srgbClr val="6A57B8"/>
+            </a:solidFill>
+            <a:prstDash val="solid"/>
+          </a:ln>
+        </p:spPr>
+      </p:sp>
+      <p:sp>
+        <p:nvSpPr>
+          <p:cNvPr id="20" name="Text 18"/>
+          <p:cNvSpPr txBox="1"/>
+          <p:nvPr/>
+        </p:nvSpPr>
+        <p:spPr>
+          <a:xfrm>
+            <a:off x="7159752" y="1280160"/>
+            <a:ext cx="548640" cy="548640"/>
+          </a:xfrm>
+          <a:prstGeom prst="rect">
+            <a:avLst/>
+          </a:prstGeom>
+          <a:noFill/>
+          <a:ln/>
+        </p:spPr>
+        <p:txBody>
+          <a:bodyPr wrap="square" lIns="0" tIns="0" rIns="0" bIns="0" rtlCol="0" anchor="ctr"/>
+          <a:lstStyle/>
+          <a:p>
+            <a:pPr algn="ctr" indent="0" marL="0">
+              <a:buNone/>
+            </a:pPr>
+            <a:r>
+              <a:rPr lang="en-US" sz="2000" b="1" dirty="0">
+                <a:solidFill>
+                  <a:srgbClr val="FFFFFF"/>
+                </a:solidFill>
+                <a:latin typeface="Cambria" pitchFamily="34" charset="0"/>
+                <a:ea typeface="Cambria" pitchFamily="34" charset="-122"/>
+                <a:cs typeface="Cambria" pitchFamily="34" charset="-120"/>
+              </a:rPr>
+              <a:t>5</a:t>
+            </a:r>
+            <a:endParaRPr lang="en-US" sz="2000" dirty="0"/>
+          </a:p>
+        </p:txBody>
+      </p:sp>
+      <p:sp>
+        <p:nvSpPr>
+          <p:cNvPr id="21" name="Text 19"/>
+          <p:cNvSpPr txBox="1"/>
+          <p:nvPr/>
+        </p:nvSpPr>
+        <p:spPr>
+          <a:xfrm>
+            <a:off x="7114032" y="2011680"/>
+            <a:ext cx="1554480" cy="365760"/>
+          </a:xfrm>
+          <a:prstGeom prst="rect">
+            <a:avLst/>
+          </a:prstGeom>
+          <a:noFill/>
+          <a:ln/>
+        </p:spPr>
+        <p:txBody>
+          <a:bodyPr wrap="square" lIns="0" tIns="0" rIns="0" bIns="0" rtlCol="0" anchor="ctr"/>
+          <a:lstStyle/>
+          <a:p>
+            <a:pPr indent="0" marL="0">
+              <a:buNone/>
+            </a:pPr>
+            <a:r>
+              <a:rPr lang="en-US" sz="1600" b="1" dirty="0">
+                <a:solidFill>
+                  <a:srgbClr val="2E2457"/>
+                </a:solidFill>
+                <a:latin typeface="Cambria" pitchFamily="34" charset="0"/>
+                <a:ea typeface="Cambria" pitchFamily="34" charset="-122"/>
+                <a:cs typeface="Cambria" pitchFamily="34" charset="-120"/>
+              </a:rPr>
+              <a:t>It is back</a:t>
+            </a:r>
+            <a:endParaRPr lang="en-US" sz="1600" dirty="0"/>
+          </a:p>
+        </p:txBody>
+      </p:sp>
+      <p:sp>
+        <p:nvSpPr>
+          <p:cNvPr id="22" name="Text 20"/>
+          <p:cNvSpPr txBox="1"/>
+          <p:nvPr/>
+        </p:nvSpPr>
+        <p:spPr>
+          <a:xfrm>
+            <a:off x="7114032" y="2423160"/>
+            <a:ext cx="1554480" cy="2011680"/>
+          </a:xfrm>
+          <a:prstGeom prst="rect">
+            <a:avLst/>
+          </a:prstGeom>
+          <a:noFill/>
+          <a:ln/>
+        </p:spPr>
+        <p:txBody>
+          <a:bodyPr wrap="square" lIns="0" tIns="0" rIns="0" bIns="0" rtlCol="0" anchor="t"/>
+          <a:lstStyle/>
+          <a:p>
+            <a:pPr indent="0" marL="0">
+              <a:buNone/>
+            </a:pPr>
+            <a:r>
+              <a:rPr lang="en-US" sz="1300" dirty="0">
+                <a:solidFill>
+                  <a:srgbClr val="241F38"/>
+                </a:solidFill>
+                <a:latin typeface="Calibri" pitchFamily="34" charset="0"/>
+                <a:ea typeface="Calibri" pitchFamily="34" charset="-122"/>
+                <a:cs typeface="Calibri" pitchFamily="34" charset="-120"/>
+              </a:rPr>
+              <a:t>Neighbours vote it back on. The outage and its length feed the forecast.</a:t>
+            </a:r>
+            <a:endParaRPr lang="en-US" sz="1300" dirty="0"/>
           </a:p>
         </p:txBody>
       </p:sp>
@@ -5627,7 +7332,7 @@
     <p:bg>
       <p:bgPr>
         <a:solidFill>
-          <a:srgbClr val="2E2457"/>
+          <a:srgbClr val="FFFFFF"/>
         </a:solidFill>
       </p:bgPr>
     </p:bg>
@@ -5653,7 +7358,7 @@
         </p:nvSpPr>
         <p:spPr>
           <a:xfrm>
-            <a:off x="457200" y="320040"/>
+            <a:off x="457200" y="274320"/>
             <a:ext cx="8229600" cy="640080"/>
           </a:xfrm>
           <a:prstGeom prst="rect">
@@ -5670,30 +7375,92 @@
               <a:buNone/>
             </a:pPr>
             <a:r>
-              <a:rPr lang="en-US" sz="3400" b="1" dirty="0">
-                <a:solidFill>
-                  <a:srgbClr val="FFFFFF"/>
+              <a:rPr lang="en-US" sz="3000" b="1" dirty="0">
+                <a:solidFill>
+                  <a:srgbClr val="2E2457"/>
                 </a:solidFill>
                 <a:latin typeface="Cambria" pitchFamily="34" charset="0"/>
                 <a:ea typeface="Cambria" pitchFamily="34" charset="-122"/>
                 <a:cs typeface="Cambria" pitchFamily="34" charset="-120"/>
               </a:rPr>
-              <a:t>Who pays, and why they will</a:t>
-            </a:r>
-            <a:endParaRPr lang="en-US" sz="3400" dirty="0"/>
-          </a:p>
-        </p:txBody>
-      </p:sp>
-      <p:sp>
-        <p:nvSpPr>
-          <p:cNvPr id="3" name="Text 1"/>
-          <p:cNvSpPr txBox="1"/>
-          <p:nvPr/>
-        </p:nvSpPr>
-        <p:spPr>
-          <a:xfrm>
-            <a:off x="457200" y="1188720"/>
-            <a:ext cx="4937760" cy="3291840"/>
+              <a:t>Built for a phone, a weak signal and four languages</a:t>
+            </a:r>
+            <a:endParaRPr lang="en-US" sz="3000" dirty="0"/>
+          </a:p>
+        </p:txBody>
+      </p:sp>
+      <p:pic>
+        <p:nvPicPr>
+          <p:cNvPr id="3" name="Image 0" descr="shots/alerts.png">    </p:cNvPr>
+          <p:cNvPicPr>
+            <a:picLocks noChangeAspect="1"/>
+          </p:cNvPicPr>
+          <p:nvPr/>
+        </p:nvPicPr>
+        <p:blipFill>
+          <a:blip r:embed="rId1"/>
+          <a:stretch>
+            <a:fillRect/>
+          </a:stretch>
+        </p:blipFill>
+        <p:spPr>
+          <a:xfrm>
+            <a:off x="548640" y="1005840"/>
+            <a:ext cx="1786270" cy="3657600"/>
+          </a:xfrm>
+          <a:prstGeom prst="rect">
+            <a:avLst/>
+          </a:prstGeom>
+          <a:effectLst>
+            <a:outerShdw sx="100000" sy="100000" kx="0" ky="0" algn="bl" rotWithShape="0" blurRad="101600" dist="38100" dir="5400000">
+              <a:srgbClr val="000000">
+                <a:alpha val="25000"/>
+              </a:srgbClr>
+            </a:outerShdw>
+          </a:effectLst>
+        </p:spPr>
+      </p:pic>
+      <p:pic>
+        <p:nvPicPr>
+          <p:cNvPr id="4" name="Image 1" descr="shots/share.png">    </p:cNvPr>
+          <p:cNvPicPr>
+            <a:picLocks noChangeAspect="1"/>
+          </p:cNvPicPr>
+          <p:nvPr/>
+        </p:nvPicPr>
+        <p:blipFill>
+          <a:blip r:embed="rId2"/>
+          <a:stretch>
+            <a:fillRect/>
+          </a:stretch>
+        </p:blipFill>
+        <p:spPr>
+          <a:xfrm>
+            <a:off x="2743200" y="1005840"/>
+            <a:ext cx="1786270" cy="3657600"/>
+          </a:xfrm>
+          <a:prstGeom prst="rect">
+            <a:avLst/>
+          </a:prstGeom>
+          <a:effectLst>
+            <a:outerShdw sx="100000" sy="100000" kx="0" ky="0" algn="bl" rotWithShape="0" blurRad="101600" dist="38100" dir="5400000">
+              <a:srgbClr val="000000">
+                <a:alpha val="25000"/>
+              </a:srgbClr>
+            </a:outerShdw>
+          </a:effectLst>
+        </p:spPr>
+      </p:pic>
+      <p:sp>
+        <p:nvSpPr>
+          <p:cNvPr id="5" name="Text 1"/>
+          <p:cNvSpPr txBox="1"/>
+          <p:nvPr/>
+        </p:nvSpPr>
+        <p:spPr>
+          <a:xfrm>
+            <a:off x="5120640" y="1188720"/>
+            <a:ext cx="3566160" cy="3291840"/>
           </a:xfrm>
           <a:prstGeom prst="rect">
             <a:avLst/>
@@ -5713,17 +7480,17 @@
               <a:buChar char="•"/>
             </a:pPr>
             <a:r>
-              <a:rPr lang="en-US" sz="1600" dirty="0">
-                <a:solidFill>
-                  <a:srgbClr val="FFFFFF"/>
+              <a:rPr lang="en-US" sz="1400" dirty="0">
+                <a:solidFill>
+                  <a:srgbClr val="241F38"/>
                 </a:solidFill>
                 <a:latin typeface="Calibri" pitchFamily="34" charset="0"/>
                 <a:ea typeface="Calibri" pitchFamily="34" charset="-122"/>
                 <a:cs typeface="Calibri" pitchFamily="34" charset="-120"/>
               </a:rPr>
-              <a:t>Municipalities and utilities: verified, suburb-level outage data to dispatch faster than call centres</a:t>
-            </a:r>
-            <a:endParaRPr lang="en-US" sz="1600" dirty="0"/>
+              <a:t>One orb for navigation: tap it and the sections bloom in an arc</a:t>
+            </a:r>
+            <a:endParaRPr lang="en-US" sz="1400" dirty="0"/>
           </a:p>
           <a:p>
             <a:pPr marL="342900" indent="-342900">
@@ -5734,17 +7501,17 @@
               <a:buChar char="•"/>
             </a:pPr>
             <a:r>
-              <a:rPr lang="en-US" sz="1600" dirty="0">
-                <a:solidFill>
-                  <a:srgbClr val="FFFFFF"/>
+              <a:rPr lang="en-US" sz="1400" dirty="0">
+                <a:solidFill>
+                  <a:srgbClr val="241F38"/>
                 </a:solidFill>
                 <a:latin typeface="Calibri" pitchFamily="34" charset="0"/>
                 <a:ea typeface="Calibri" pitchFamily="34" charset="-122"/>
                 <a:cs typeface="Calibri" pitchFamily="34" charset="-120"/>
               </a:rPr>
-              <a:t>Spaza and small business: Pro plan with outage alerts and loss planner</a:t>
-            </a:r>
-            <a:endParaRPr lang="en-US" sz="1600" dirty="0"/>
+              <a:t>English, isiZulu, Sesotho, Afrikaans (drafts, native review planned)</a:t>
+            </a:r>
+            <a:endParaRPr lang="en-US" sz="1400" dirty="0"/>
           </a:p>
           <a:p>
             <a:pPr marL="342900" indent="-342900">
@@ -5755,17 +7522,17 @@
               <a:buChar char="•"/>
             </a:pPr>
             <a:r>
-              <a:rPr lang="en-US" sz="1600" dirty="0">
-                <a:solidFill>
-                  <a:srgbClr val="FFFFFF"/>
+              <a:rPr lang="en-US" sz="1400" dirty="0">
+                <a:solidFill>
+                  <a:srgbClr val="241F38"/>
                 </a:solidFill>
                 <a:latin typeface="Calibri" pitchFamily="34" charset="0"/>
                 <a:ea typeface="Calibri" pitchFamily="34" charset="-122"/>
                 <a:cs typeface="Calibri" pitchFamily="34" charset="-120"/>
               </a:rPr>
-              <a:t>Banks and insurers (e.g. FNB): township resilience and financial inclusion partnerships</a:t>
-            </a:r>
-            <a:endParaRPr lang="en-US" sz="1600" dirty="0"/>
+              <a:t>Installable, works offline. Posts queue and send when signal returns</a:t>
+            </a:r>
+            <a:endParaRPr lang="en-US" sz="1400" dirty="0"/>
           </a:p>
           <a:p>
             <a:pPr marL="342900" indent="-342900">
@@ -5776,17 +7543,17 @@
               <a:buChar char="•"/>
             </a:pPr>
             <a:r>
-              <a:rPr lang="en-US" sz="1600" dirty="0">
-                <a:solidFill>
-                  <a:srgbClr val="FFFFFF"/>
+              <a:rPr lang="en-US" sz="1400" dirty="0">
+                <a:solidFill>
+                  <a:srgbClr val="241F38"/>
                 </a:solidFill>
                 <a:latin typeface="Calibri" pitchFamily="34" charset="0"/>
                 <a:ea typeface="Calibri" pitchFamily="34" charset="-122"/>
                 <a:cs typeface="Calibri" pitchFamily="34" charset="-120"/>
               </a:rPr>
-              <a:t>Data ownership: all community data sits in our own database, exportable and anonymous</a:t>
-            </a:r>
-            <a:endParaRPr lang="en-US" sz="1600" dirty="0"/>
+              <a:t>Skip link, keyboard navigation, labelled controls, light and dark</a:t>
+            </a:r>
+            <a:endParaRPr lang="en-US" sz="1400" dirty="0"/>
           </a:p>
           <a:p>
             <a:pPr marL="342900" indent="-342900">
@@ -5797,249 +7564,15 @@
               <a:buChar char="•"/>
             </a:pPr>
             <a:r>
-              <a:rPr lang="en-US" sz="1600" dirty="0">
-                <a:solidFill>
-                  <a:srgbClr val="FFFFFF"/>
+              <a:rPr lang="en-US" sz="1400" dirty="0">
+                <a:solidFill>
+                  <a:srgbClr val="241F38"/>
                 </a:solidFill>
                 <a:latin typeface="Calibri" pitchFamily="34" charset="0"/>
                 <a:ea typeface="Calibri" pitchFamily="34" charset="-122"/>
                 <a:cs typeface="Calibri" pitchFamily="34" charset="-120"/>
               </a:rPr>
-              <a:t>Pilot: [N] neighbours in [SUBURB], [N] reports, [N] verified outages</a:t>
-            </a:r>
-            <a:endParaRPr lang="en-US" sz="1600" dirty="0"/>
-          </a:p>
-        </p:txBody>
-      </p:sp>
-      <p:sp>
-        <p:nvSpPr>
-          <p:cNvPr id="4" name="Text 2"/>
-          <p:cNvSpPr txBox="1"/>
-          <p:nvPr/>
-        </p:nvSpPr>
-        <p:spPr>
-          <a:xfrm>
-            <a:off x="5943600" y="1097280"/>
-            <a:ext cx="2743200" cy="685800"/>
-          </a:xfrm>
-          <a:prstGeom prst="rect">
-            <a:avLst/>
-          </a:prstGeom>
-          <a:noFill/>
-          <a:ln/>
-        </p:spPr>
-        <p:txBody>
-          <a:bodyPr wrap="square" lIns="0" tIns="0" rIns="0" bIns="0" rtlCol="0" anchor="ctr"/>
-          <a:lstStyle/>
-          <a:p>
-            <a:pPr indent="0" marL="0">
-              <a:buNone/>
-            </a:pPr>
-            <a:r>
-              <a:rPr lang="en-US" sz="4400" b="1" dirty="0">
-                <a:solidFill>
-                  <a:srgbClr val="9FD3F0"/>
-                </a:solidFill>
-                <a:latin typeface="Cambria" pitchFamily="34" charset="0"/>
-                <a:ea typeface="Cambria" pitchFamily="34" charset="-122"/>
-                <a:cs typeface="Cambria" pitchFamily="34" charset="-120"/>
-              </a:rPr>
-              <a:t>3+</a:t>
-            </a:r>
-            <a:endParaRPr lang="en-US" sz="4400" dirty="0"/>
-          </a:p>
-        </p:txBody>
-      </p:sp>
-      <p:sp>
-        <p:nvSpPr>
-          <p:cNvPr id="5" name="Text 3"/>
-          <p:cNvSpPr txBox="1"/>
-          <p:nvPr/>
-        </p:nvSpPr>
-        <p:spPr>
-          <a:xfrm>
-            <a:off x="5943600" y="1783080"/>
-            <a:ext cx="2743200" cy="274320"/>
-          </a:xfrm>
-          <a:prstGeom prst="rect">
-            <a:avLst/>
-          </a:prstGeom>
-          <a:noFill/>
-          <a:ln/>
-        </p:spPr>
-        <p:txBody>
-          <a:bodyPr wrap="square" lIns="0" tIns="0" rIns="0" bIns="0" rtlCol="0" anchor="ctr"/>
-          <a:lstStyle/>
-          <a:p>
-            <a:pPr indent="0" marL="0">
-              <a:buNone/>
-            </a:pPr>
-            <a:r>
-              <a:rPr lang="en-US" sz="1400" dirty="0">
-                <a:solidFill>
-                  <a:srgbClr val="DDD4F6"/>
-                </a:solidFill>
-                <a:latin typeface="Calibri" pitchFamily="34" charset="0"/>
-                <a:ea typeface="Calibri" pitchFamily="34" charset="-122"/>
-                <a:cs typeface="Calibri" pitchFamily="34" charset="-120"/>
-              </a:rPr>
-              <a:t>devices verify an outage</a:t>
-            </a:r>
-            <a:endParaRPr lang="en-US" sz="1400" dirty="0"/>
-          </a:p>
-        </p:txBody>
-      </p:sp>
-      <p:sp>
-        <p:nvSpPr>
-          <p:cNvPr id="6" name="Text 4"/>
-          <p:cNvSpPr txBox="1"/>
-          <p:nvPr/>
-        </p:nvSpPr>
-        <p:spPr>
-          <a:xfrm>
-            <a:off x="5943600" y="2286000"/>
-            <a:ext cx="2743200" cy="685800"/>
-          </a:xfrm>
-          <a:prstGeom prst="rect">
-            <a:avLst/>
-          </a:prstGeom>
-          <a:noFill/>
-          <a:ln/>
-        </p:spPr>
-        <p:txBody>
-          <a:bodyPr wrap="square" lIns="0" tIns="0" rIns="0" bIns="0" rtlCol="0" anchor="ctr"/>
-          <a:lstStyle/>
-          <a:p>
-            <a:pPr indent="0" marL="0">
-              <a:buNone/>
-            </a:pPr>
-            <a:r>
-              <a:rPr lang="en-US" sz="4400" b="1" dirty="0">
-                <a:solidFill>
-                  <a:srgbClr val="9FD3F0"/>
-                </a:solidFill>
-                <a:latin typeface="Cambria" pitchFamily="34" charset="0"/>
-                <a:ea typeface="Cambria" pitchFamily="34" charset="-122"/>
-                <a:cs typeface="Cambria" pitchFamily="34" charset="-120"/>
-              </a:rPr>
-              <a:t>4</a:t>
-            </a:r>
-            <a:endParaRPr lang="en-US" sz="4400" dirty="0"/>
-          </a:p>
-        </p:txBody>
-      </p:sp>
-      <p:sp>
-        <p:nvSpPr>
-          <p:cNvPr id="7" name="Text 5"/>
-          <p:cNvSpPr txBox="1"/>
-          <p:nvPr/>
-        </p:nvSpPr>
-        <p:spPr>
-          <a:xfrm>
-            <a:off x="5943600" y="2971800"/>
-            <a:ext cx="2743200" cy="274320"/>
-          </a:xfrm>
-          <a:prstGeom prst="rect">
-            <a:avLst/>
-          </a:prstGeom>
-          <a:noFill/>
-          <a:ln/>
-        </p:spPr>
-        <p:txBody>
-          <a:bodyPr wrap="square" lIns="0" tIns="0" rIns="0" bIns="0" rtlCol="0" anchor="ctr"/>
-          <a:lstStyle/>
-          <a:p>
-            <a:pPr indent="0" marL="0">
-              <a:buNone/>
-            </a:pPr>
-            <a:r>
-              <a:rPr lang="en-US" sz="1400" dirty="0">
-                <a:solidFill>
-                  <a:srgbClr val="DDD4F6"/>
-                </a:solidFill>
-                <a:latin typeface="Calibri" pitchFamily="34" charset="0"/>
-                <a:ea typeface="Calibri" pitchFamily="34" charset="-122"/>
-                <a:cs typeface="Calibri" pitchFamily="34" charset="-120"/>
-              </a:rPr>
-              <a:t>languages</a:t>
-            </a:r>
-            <a:endParaRPr lang="en-US" sz="1400" dirty="0"/>
-          </a:p>
-        </p:txBody>
-      </p:sp>
-      <p:sp>
-        <p:nvSpPr>
-          <p:cNvPr id="8" name="Text 6"/>
-          <p:cNvSpPr txBox="1"/>
-          <p:nvPr/>
-        </p:nvSpPr>
-        <p:spPr>
-          <a:xfrm>
-            <a:off x="5943600" y="3474720"/>
-            <a:ext cx="2743200" cy="685800"/>
-          </a:xfrm>
-          <a:prstGeom prst="rect">
-            <a:avLst/>
-          </a:prstGeom>
-          <a:noFill/>
-          <a:ln/>
-        </p:spPr>
-        <p:txBody>
-          <a:bodyPr wrap="square" lIns="0" tIns="0" rIns="0" bIns="0" rtlCol="0" anchor="ctr"/>
-          <a:lstStyle/>
-          <a:p>
-            <a:pPr indent="0" marL="0">
-              <a:buNone/>
-            </a:pPr>
-            <a:r>
-              <a:rPr lang="en-US" sz="4400" b="1" dirty="0">
-                <a:solidFill>
-                  <a:srgbClr val="9FD3F0"/>
-                </a:solidFill>
-                <a:latin typeface="Cambria" pitchFamily="34" charset="0"/>
-                <a:ea typeface="Cambria" pitchFamily="34" charset="-122"/>
-                <a:cs typeface="Cambria" pitchFamily="34" charset="-120"/>
-              </a:rPr>
-              <a:t>R0</a:t>
-            </a:r>
-            <a:endParaRPr lang="en-US" sz="4400" dirty="0"/>
-          </a:p>
-        </p:txBody>
-      </p:sp>
-      <p:sp>
-        <p:nvSpPr>
-          <p:cNvPr id="9" name="Text 7"/>
-          <p:cNvSpPr txBox="1"/>
-          <p:nvPr/>
-        </p:nvSpPr>
-        <p:spPr>
-          <a:xfrm>
-            <a:off x="5943600" y="4160520"/>
-            <a:ext cx="2743200" cy="274320"/>
-          </a:xfrm>
-          <a:prstGeom prst="rect">
-            <a:avLst/>
-          </a:prstGeom>
-          <a:noFill/>
-          <a:ln/>
-        </p:spPr>
-        <p:txBody>
-          <a:bodyPr wrap="square" lIns="0" tIns="0" rIns="0" bIns="0" rtlCol="0" anchor="ctr"/>
-          <a:lstStyle/>
-          <a:p>
-            <a:pPr indent="0" marL="0">
-              <a:buNone/>
-            </a:pPr>
-            <a:r>
-              <a:rPr lang="en-US" sz="1400" dirty="0">
-                <a:solidFill>
-                  <a:srgbClr val="DDD4F6"/>
-                </a:solidFill>
-                <a:latin typeface="Calibri" pitchFamily="34" charset="0"/>
-                <a:ea typeface="Calibri" pitchFamily="34" charset="-122"/>
-                <a:cs typeface="Calibri" pitchFamily="34" charset="-120"/>
-              </a:rPr>
-              <a:t>for residents, always</a:t>
+              <a:t>First load is about 86 kB of JavaScript (gzipped); other tabs load when opened</a:t>
             </a:r>
             <a:endParaRPr lang="en-US" sz="1400" dirty="0"/>
           </a:p>
